--- a/lecture_notes/section_3_introduction_to_amazon_aws/3-1-Introduction to Cloud Computing and Amazon AWS.pptx
+++ b/lecture_notes/section_3_introduction_to_amazon_aws/3-1-Introduction to Cloud Computing and Amazon AWS.pptx
@@ -251,36 +251,6 @@
         <pc:sldMkLst>
           <pc:docMk/>
           <pc:sldMk cId="2297456757" sldId="483"/>
-        </pc:sldMkLst>
-      </pc:sldChg>
-    </pc:docChg>
-  </pc:docChgLst>
-  <pc:docChgLst>
-    <pc:chgData name="Mohammed Fasha" userId="cc64f42d-a1a6-4f08-b97b-0c37f877119f" providerId="ADAL" clId="{4C71ED24-115E-432D-933D-C801DA3E52F1}"/>
-    <pc:docChg chg="delSld">
-      <pc:chgData name="Mohammed Fasha" userId="cc64f42d-a1a6-4f08-b97b-0c37f877119f" providerId="ADAL" clId="{4C71ED24-115E-432D-933D-C801DA3E52F1}" dt="2024-12-29T03:12:49.974" v="2" actId="47"/>
-      <pc:docMkLst>
-        <pc:docMk/>
-      </pc:docMkLst>
-      <pc:sldChg chg="del">
-        <pc:chgData name="Mohammed Fasha" userId="cc64f42d-a1a6-4f08-b97b-0c37f877119f" providerId="ADAL" clId="{4C71ED24-115E-432D-933D-C801DA3E52F1}" dt="2024-12-29T03:12:48.360" v="0" actId="47"/>
-        <pc:sldMkLst>
-          <pc:docMk/>
-          <pc:sldMk cId="2341000601" sldId="701"/>
-        </pc:sldMkLst>
-      </pc:sldChg>
-      <pc:sldChg chg="del">
-        <pc:chgData name="Mohammed Fasha" userId="cc64f42d-a1a6-4f08-b97b-0c37f877119f" providerId="ADAL" clId="{4C71ED24-115E-432D-933D-C801DA3E52F1}" dt="2024-12-29T03:12:49.133" v="1" actId="47"/>
-        <pc:sldMkLst>
-          <pc:docMk/>
-          <pc:sldMk cId="3519698944" sldId="702"/>
-        </pc:sldMkLst>
-      </pc:sldChg>
-      <pc:sldChg chg="del">
-        <pc:chgData name="Mohammed Fasha" userId="cc64f42d-a1a6-4f08-b97b-0c37f877119f" providerId="ADAL" clId="{4C71ED24-115E-432D-933D-C801DA3E52F1}" dt="2024-12-29T03:12:49.974" v="2" actId="47"/>
-        <pc:sldMkLst>
-          <pc:docMk/>
-          <pc:sldMk cId="3934257344" sldId="703"/>
         </pc:sldMkLst>
       </pc:sldChg>
     </pc:docChg>
@@ -575,6 +545,36 @@
           </pc:spChg>
         </pc:sldLayoutChg>
       </pc:sldMasterChg>
+    </pc:docChg>
+  </pc:docChgLst>
+  <pc:docChgLst>
+    <pc:chgData name="Mohammed Fasha" userId="cc64f42d-a1a6-4f08-b97b-0c37f877119f" providerId="ADAL" clId="{4C71ED24-115E-432D-933D-C801DA3E52F1}"/>
+    <pc:docChg chg="delSld">
+      <pc:chgData name="Mohammed Fasha" userId="cc64f42d-a1a6-4f08-b97b-0c37f877119f" providerId="ADAL" clId="{4C71ED24-115E-432D-933D-C801DA3E52F1}" dt="2024-12-29T03:12:49.974" v="2" actId="47"/>
+      <pc:docMkLst>
+        <pc:docMk/>
+      </pc:docMkLst>
+      <pc:sldChg chg="del">
+        <pc:chgData name="Mohammed Fasha" userId="cc64f42d-a1a6-4f08-b97b-0c37f877119f" providerId="ADAL" clId="{4C71ED24-115E-432D-933D-C801DA3E52F1}" dt="2024-12-29T03:12:48.360" v="0" actId="47"/>
+        <pc:sldMkLst>
+          <pc:docMk/>
+          <pc:sldMk cId="2341000601" sldId="701"/>
+        </pc:sldMkLst>
+      </pc:sldChg>
+      <pc:sldChg chg="del">
+        <pc:chgData name="Mohammed Fasha" userId="cc64f42d-a1a6-4f08-b97b-0c37f877119f" providerId="ADAL" clId="{4C71ED24-115E-432D-933D-C801DA3E52F1}" dt="2024-12-29T03:12:49.133" v="1" actId="47"/>
+        <pc:sldMkLst>
+          <pc:docMk/>
+          <pc:sldMk cId="3519698944" sldId="702"/>
+        </pc:sldMkLst>
+      </pc:sldChg>
+      <pc:sldChg chg="del">
+        <pc:chgData name="Mohammed Fasha" userId="cc64f42d-a1a6-4f08-b97b-0c37f877119f" providerId="ADAL" clId="{4C71ED24-115E-432D-933D-C801DA3E52F1}" dt="2024-12-29T03:12:49.974" v="2" actId="47"/>
+        <pc:sldMkLst>
+          <pc:docMk/>
+          <pc:sldMk cId="3934257344" sldId="703"/>
+        </pc:sldMkLst>
+      </pc:sldChg>
     </pc:docChg>
   </pc:docChgLst>
   <pc:docChgLst>
@@ -5701,6 +5701,30 @@
       </pc:sldMasterChg>
     </pc:docChg>
   </pc:docChgLst>
+  <pc:docChgLst>
+    <pc:chgData name="Mohammed Fasha" userId="cc64f42d-a1a6-4f08-b97b-0c37f877119f" providerId="ADAL" clId="{C4E19E38-7064-4221-B9EB-EDF8265691F0}"/>
+    <pc:docChg chg="modSld">
+      <pc:chgData name="Mohammed Fasha" userId="cc64f42d-a1a6-4f08-b97b-0c37f877119f" providerId="ADAL" clId="{C4E19E38-7064-4221-B9EB-EDF8265691F0}" dt="2025-04-20T19:30:54.966" v="2" actId="20577"/>
+      <pc:docMkLst>
+        <pc:docMk/>
+      </pc:docMkLst>
+      <pc:sldChg chg="modSp mod">
+        <pc:chgData name="Mohammed Fasha" userId="cc64f42d-a1a6-4f08-b97b-0c37f877119f" providerId="ADAL" clId="{C4E19E38-7064-4221-B9EB-EDF8265691F0}" dt="2025-04-20T19:30:54.966" v="2" actId="20577"/>
+        <pc:sldMkLst>
+          <pc:docMk/>
+          <pc:sldMk cId="2297456757" sldId="483"/>
+        </pc:sldMkLst>
+        <pc:spChg chg="mod">
+          <ac:chgData name="Mohammed Fasha" userId="cc64f42d-a1a6-4f08-b97b-0c37f877119f" providerId="ADAL" clId="{C4E19E38-7064-4221-B9EB-EDF8265691F0}" dt="2025-04-20T19:30:54.966" v="2" actId="20577"/>
+          <ac:spMkLst>
+            <pc:docMk/>
+            <pc:sldMk cId="2297456757" sldId="483"/>
+            <ac:spMk id="5" creationId="{89403830-E271-DAA0-8838-E295A84A8B5B}"/>
+          </ac:spMkLst>
+        </pc:spChg>
+      </pc:sldChg>
+    </pc:docChg>
+  </pc:docChgLst>
 </pc:chgInfo>
 </file>
 
@@ -10104,8 +10128,12 @@
           <a:lstStyle/>
           <a:p>
             <a:r>
+              <a:rPr lang="en-US" sz="3200" b="0"/>
+              <a:t>Introduction to Cloud </a:t>
+            </a:r>
+            <a:r>
               <a:rPr lang="en-US" sz="3200" b="0" dirty="0"/>
-              <a:t>Introduction Cloud Computing and Amazon AWS</a:t>
+              <a:t>Computing and Amazon AWS</a:t>
             </a:r>
           </a:p>
           <a:p>
@@ -29537,14 +29565,14 @@
             </a:ln>
             <a:extLst>
               <a:ext uri="{909E8E84-426E-40dd-AFC4-6F175D3DCCD1}">
-                <a14:hiddenFill xmlns:a14="http://schemas.microsoft.com/office/drawing/2010/main" xmlns="">
+                <a14:hiddenFill xmlns="" xmlns:a14="http://schemas.microsoft.com/office/drawing/2010/main">
                   <a:solidFill>
                     <a:srgbClr val="FFFFFF"/>
                   </a:solidFill>
                 </a14:hiddenFill>
               </a:ext>
               <a:ext uri="{91240B29-F687-4f45-9708-019B960494DF}">
-                <a14:hiddenLine xmlns:a14="http://schemas.microsoft.com/office/drawing/2010/main" xmlns="" w="9525">
+                <a14:hiddenLine xmlns="" xmlns:a14="http://schemas.microsoft.com/office/drawing/2010/main" w="9525">
                   <a:solidFill>
                     <a:srgbClr val="000000"/>
                   </a:solidFill>
@@ -29584,14 +29612,14 @@
             </a:ln>
             <a:extLst>
               <a:ext uri="{909E8E84-426E-40dd-AFC4-6F175D3DCCD1}">
-                <a14:hiddenFill xmlns:a14="http://schemas.microsoft.com/office/drawing/2010/main" xmlns="">
+                <a14:hiddenFill xmlns="" xmlns:a14="http://schemas.microsoft.com/office/drawing/2010/main">
                   <a:solidFill>
                     <a:srgbClr val="FFFFFF"/>
                   </a:solidFill>
                 </a14:hiddenFill>
               </a:ext>
               <a:ext uri="{91240B29-F687-4f45-9708-019B960494DF}">
-                <a14:hiddenLine xmlns:a14="http://schemas.microsoft.com/office/drawing/2010/main" xmlns="" w="9525">
+                <a14:hiddenLine xmlns="" xmlns:a14="http://schemas.microsoft.com/office/drawing/2010/main" w="9525">
                   <a:solidFill>
                     <a:srgbClr val="000000"/>
                   </a:solidFill>
@@ -29771,14 +29799,14 @@
             </a:ln>
             <a:extLst>
               <a:ext uri="{909E8E84-426E-40dd-AFC4-6F175D3DCCD1}">
-                <a14:hiddenFill xmlns:a14="http://schemas.microsoft.com/office/drawing/2010/main" xmlns="">
+                <a14:hiddenFill xmlns="" xmlns:a14="http://schemas.microsoft.com/office/drawing/2010/main">
                   <a:solidFill>
                     <a:srgbClr val="FFFFFF"/>
                   </a:solidFill>
                 </a14:hiddenFill>
               </a:ext>
               <a:ext uri="{91240B29-F687-4f45-9708-019B960494DF}">
-                <a14:hiddenLine xmlns:a14="http://schemas.microsoft.com/office/drawing/2010/main" xmlns="" w="9525">
+                <a14:hiddenLine xmlns="" xmlns:a14="http://schemas.microsoft.com/office/drawing/2010/main" w="9525">
                   <a:solidFill>
                     <a:srgbClr val="000000"/>
                   </a:solidFill>
@@ -29818,14 +29846,14 @@
             </a:ln>
             <a:extLst>
               <a:ext uri="{909E8E84-426E-40dd-AFC4-6F175D3DCCD1}">
-                <a14:hiddenFill xmlns:a14="http://schemas.microsoft.com/office/drawing/2010/main" xmlns="">
+                <a14:hiddenFill xmlns="" xmlns:a14="http://schemas.microsoft.com/office/drawing/2010/main">
                   <a:solidFill>
                     <a:srgbClr val="FFFFFF"/>
                   </a:solidFill>
                 </a14:hiddenFill>
               </a:ext>
               <a:ext uri="{91240B29-F687-4f45-9708-019B960494DF}">
-                <a14:hiddenLine xmlns:a14="http://schemas.microsoft.com/office/drawing/2010/main" xmlns="" w="9525">
+                <a14:hiddenLine xmlns="" xmlns:a14="http://schemas.microsoft.com/office/drawing/2010/main" w="9525">
                   <a:solidFill>
                     <a:srgbClr val="000000"/>
                   </a:solidFill>
@@ -29989,14 +30017,14 @@
             </a:ln>
             <a:extLst>
               <a:ext uri="{909E8E84-426E-40dd-AFC4-6F175D3DCCD1}">
-                <a14:hiddenFill xmlns:a14="http://schemas.microsoft.com/office/drawing/2010/main" xmlns="">
+                <a14:hiddenFill xmlns="" xmlns:a14="http://schemas.microsoft.com/office/drawing/2010/main">
                   <a:solidFill>
                     <a:srgbClr val="FFFFFF"/>
                   </a:solidFill>
                 </a14:hiddenFill>
               </a:ext>
               <a:ext uri="{91240B29-F687-4f45-9708-019B960494DF}">
-                <a14:hiddenLine xmlns:a14="http://schemas.microsoft.com/office/drawing/2010/main" xmlns="" w="9525">
+                <a14:hiddenLine xmlns="" xmlns:a14="http://schemas.microsoft.com/office/drawing/2010/main" w="9525">
                   <a:solidFill>
                     <a:srgbClr val="000000"/>
                   </a:solidFill>
@@ -30225,14 +30253,14 @@
             </a:ln>
             <a:extLst>
               <a:ext uri="{909E8E84-426E-40dd-AFC4-6F175D3DCCD1}">
-                <a14:hiddenFill xmlns:a14="http://schemas.microsoft.com/office/drawing/2010/main" xmlns="">
+                <a14:hiddenFill xmlns="" xmlns:a14="http://schemas.microsoft.com/office/drawing/2010/main">
                   <a:solidFill>
                     <a:srgbClr val="FFFFFF"/>
                   </a:solidFill>
                 </a14:hiddenFill>
               </a:ext>
               <a:ext uri="{91240B29-F687-4f45-9708-019B960494DF}">
-                <a14:hiddenLine xmlns:a14="http://schemas.microsoft.com/office/drawing/2010/main" xmlns="" w="9525">
+                <a14:hiddenLine xmlns="" xmlns:a14="http://schemas.microsoft.com/office/drawing/2010/main" w="9525">
                   <a:solidFill>
                     <a:srgbClr val="000000"/>
                   </a:solidFill>
@@ -30539,14 +30567,14 @@
             </a:ln>
             <a:extLst>
               <a:ext uri="{909E8E84-426E-40dd-AFC4-6F175D3DCCD1}">
-                <a14:hiddenFill xmlns:a14="http://schemas.microsoft.com/office/drawing/2010/main" xmlns="">
+                <a14:hiddenFill xmlns="" xmlns:a14="http://schemas.microsoft.com/office/drawing/2010/main">
                   <a:solidFill>
                     <a:srgbClr val="FFFFFF"/>
                   </a:solidFill>
                 </a14:hiddenFill>
               </a:ext>
               <a:ext uri="{91240B29-F687-4f45-9708-019B960494DF}">
-                <a14:hiddenLine xmlns:a14="http://schemas.microsoft.com/office/drawing/2010/main" xmlns="" w="9525">
+                <a14:hiddenLine xmlns="" xmlns:a14="http://schemas.microsoft.com/office/drawing/2010/main" w="9525">
                   <a:solidFill>
                     <a:srgbClr val="000000"/>
                   </a:solidFill>
@@ -30726,14 +30754,14 @@
             </a:ln>
             <a:extLst>
               <a:ext uri="{909E8E84-426E-40dd-AFC4-6F175D3DCCD1}">
-                <a14:hiddenFill xmlns:a14="http://schemas.microsoft.com/office/drawing/2010/main" xmlns="">
+                <a14:hiddenFill xmlns="" xmlns:a14="http://schemas.microsoft.com/office/drawing/2010/main">
                   <a:solidFill>
                     <a:srgbClr val="FFFFFF"/>
                   </a:solidFill>
                 </a14:hiddenFill>
               </a:ext>
               <a:ext uri="{91240B29-F687-4f45-9708-019B960494DF}">
-                <a14:hiddenLine xmlns:a14="http://schemas.microsoft.com/office/drawing/2010/main" xmlns="" w="9525">
+                <a14:hiddenLine xmlns="" xmlns:a14="http://schemas.microsoft.com/office/drawing/2010/main" w="9525">
                   <a:solidFill>
                     <a:srgbClr val="000000"/>
                   </a:solidFill>
@@ -30773,14 +30801,14 @@
             </a:ln>
             <a:extLst>
               <a:ext uri="{909E8E84-426E-40dd-AFC4-6F175D3DCCD1}">
-                <a14:hiddenFill xmlns:a14="http://schemas.microsoft.com/office/drawing/2010/main" xmlns="">
+                <a14:hiddenFill xmlns="" xmlns:a14="http://schemas.microsoft.com/office/drawing/2010/main">
                   <a:solidFill>
                     <a:srgbClr val="FFFFFF"/>
                   </a:solidFill>
                 </a14:hiddenFill>
               </a:ext>
               <a:ext uri="{91240B29-F687-4f45-9708-019B960494DF}">
-                <a14:hiddenLine xmlns:a14="http://schemas.microsoft.com/office/drawing/2010/main" xmlns="" w="9525">
+                <a14:hiddenLine xmlns="" xmlns:a14="http://schemas.microsoft.com/office/drawing/2010/main" w="9525">
                   <a:solidFill>
                     <a:srgbClr val="000000"/>
                   </a:solidFill>
@@ -30960,14 +30988,14 @@
             </a:ln>
             <a:extLst>
               <a:ext uri="{909E8E84-426E-40dd-AFC4-6F175D3DCCD1}">
-                <a14:hiddenFill xmlns:a14="http://schemas.microsoft.com/office/drawing/2010/main" xmlns="">
+                <a14:hiddenFill xmlns="" xmlns:a14="http://schemas.microsoft.com/office/drawing/2010/main">
                   <a:solidFill>
                     <a:srgbClr val="FFFFFF"/>
                   </a:solidFill>
                 </a14:hiddenFill>
               </a:ext>
               <a:ext uri="{91240B29-F687-4f45-9708-019B960494DF}">
-                <a14:hiddenLine xmlns:a14="http://schemas.microsoft.com/office/drawing/2010/main" xmlns="" w="9525">
+                <a14:hiddenLine xmlns="" xmlns:a14="http://schemas.microsoft.com/office/drawing/2010/main" w="9525">
                   <a:solidFill>
                     <a:srgbClr val="000000"/>
                   </a:solidFill>
@@ -31007,14 +31035,14 @@
             </a:ln>
             <a:extLst>
               <a:ext uri="{909E8E84-426E-40dd-AFC4-6F175D3DCCD1}">
-                <a14:hiddenFill xmlns:a14="http://schemas.microsoft.com/office/drawing/2010/main" xmlns="">
+                <a14:hiddenFill xmlns="" xmlns:a14="http://schemas.microsoft.com/office/drawing/2010/main">
                   <a:solidFill>
                     <a:srgbClr val="FFFFFF"/>
                   </a:solidFill>
                 </a14:hiddenFill>
               </a:ext>
               <a:ext uri="{91240B29-F687-4f45-9708-019B960494DF}">
-                <a14:hiddenLine xmlns:a14="http://schemas.microsoft.com/office/drawing/2010/main" xmlns="" w="9525">
+                <a14:hiddenLine xmlns="" xmlns:a14="http://schemas.microsoft.com/office/drawing/2010/main" w="9525">
                   <a:solidFill>
                     <a:srgbClr val="000000"/>
                   </a:solidFill>
@@ -31468,14 +31496,14 @@
             </a:ln>
             <a:extLst>
               <a:ext uri="{909E8E84-426E-40dd-AFC4-6F175D3DCCD1}">
-                <a14:hiddenFill xmlns:a14="http://schemas.microsoft.com/office/drawing/2010/main" xmlns="">
+                <a14:hiddenFill xmlns="" xmlns:a14="http://schemas.microsoft.com/office/drawing/2010/main">
                   <a:solidFill>
                     <a:srgbClr val="FFFFFF"/>
                   </a:solidFill>
                 </a14:hiddenFill>
               </a:ext>
               <a:ext uri="{91240B29-F687-4f45-9708-019B960494DF}">
-                <a14:hiddenLine xmlns:a14="http://schemas.microsoft.com/office/drawing/2010/main" xmlns="" w="9525">
+                <a14:hiddenLine xmlns="" xmlns:a14="http://schemas.microsoft.com/office/drawing/2010/main" w="9525">
                   <a:solidFill>
                     <a:srgbClr val="000000"/>
                   </a:solidFill>

--- a/lecture_notes/section_3_introduction_to_amazon_aws/3-1-Introduction to Cloud Computing and Amazon AWS.pptx
+++ b/lecture_notes/section_3_introduction_to_amazon_aws/3-1-Introduction to Cloud Computing and Amazon AWS.pptx
@@ -5,7 +5,7 @@
     <p:sldMasterId id="2147483648" r:id="rId1"/>
   </p:sldMasterIdLst>
   <p:notesMasterIdLst>
-    <p:notesMasterId r:id="rId111"/>
+    <p:notesMasterId r:id="rId109"/>
   </p:notesMasterIdLst>
   <p:sldIdLst>
     <p:sldId id="483" r:id="rId2"/>
@@ -62,61 +62,59 @@
     <p:sldId id="538" r:id="rId53"/>
     <p:sldId id="565" r:id="rId54"/>
     <p:sldId id="539" r:id="rId55"/>
-    <p:sldId id="541" r:id="rId56"/>
-    <p:sldId id="542" r:id="rId57"/>
-    <p:sldId id="543" r:id="rId58"/>
-    <p:sldId id="544" r:id="rId59"/>
-    <p:sldId id="545" r:id="rId60"/>
-    <p:sldId id="546" r:id="rId61"/>
-    <p:sldId id="548" r:id="rId62"/>
-    <p:sldId id="547" r:id="rId63"/>
-    <p:sldId id="549" r:id="rId64"/>
-    <p:sldId id="550" r:id="rId65"/>
-    <p:sldId id="551" r:id="rId66"/>
-    <p:sldId id="552" r:id="rId67"/>
-    <p:sldId id="553" r:id="rId68"/>
-    <p:sldId id="554" r:id="rId69"/>
-    <p:sldId id="555" r:id="rId70"/>
-    <p:sldId id="566" r:id="rId71"/>
-    <p:sldId id="556" r:id="rId72"/>
-    <p:sldId id="557" r:id="rId73"/>
-    <p:sldId id="558" r:id="rId74"/>
-    <p:sldId id="559" r:id="rId75"/>
-    <p:sldId id="560" r:id="rId76"/>
-    <p:sldId id="561" r:id="rId77"/>
-    <p:sldId id="562" r:id="rId78"/>
-    <p:sldId id="563" r:id="rId79"/>
-    <p:sldId id="564" r:id="rId80"/>
-    <p:sldId id="567" r:id="rId81"/>
-    <p:sldId id="568" r:id="rId82"/>
-    <p:sldId id="569" r:id="rId83"/>
-    <p:sldId id="570" r:id="rId84"/>
-    <p:sldId id="571" r:id="rId85"/>
-    <p:sldId id="572" r:id="rId86"/>
-    <p:sldId id="576" r:id="rId87"/>
-    <p:sldId id="573" r:id="rId88"/>
-    <p:sldId id="574" r:id="rId89"/>
-    <p:sldId id="575" r:id="rId90"/>
-    <p:sldId id="577" r:id="rId91"/>
-    <p:sldId id="578" r:id="rId92"/>
-    <p:sldId id="579" r:id="rId93"/>
-    <p:sldId id="580" r:id="rId94"/>
-    <p:sldId id="581" r:id="rId95"/>
-    <p:sldId id="582" r:id="rId96"/>
-    <p:sldId id="583" r:id="rId97"/>
-    <p:sldId id="584" r:id="rId98"/>
-    <p:sldId id="585" r:id="rId99"/>
-    <p:sldId id="586" r:id="rId100"/>
-    <p:sldId id="587" r:id="rId101"/>
-    <p:sldId id="588" r:id="rId102"/>
-    <p:sldId id="589" r:id="rId103"/>
-    <p:sldId id="590" r:id="rId104"/>
-    <p:sldId id="591" r:id="rId105"/>
-    <p:sldId id="592" r:id="rId106"/>
-    <p:sldId id="593" r:id="rId107"/>
-    <p:sldId id="594" r:id="rId108"/>
-    <p:sldId id="595" r:id="rId109"/>
-    <p:sldId id="470" r:id="rId110"/>
+    <p:sldId id="542" r:id="rId56"/>
+    <p:sldId id="544" r:id="rId57"/>
+    <p:sldId id="545" r:id="rId58"/>
+    <p:sldId id="546" r:id="rId59"/>
+    <p:sldId id="548" r:id="rId60"/>
+    <p:sldId id="547" r:id="rId61"/>
+    <p:sldId id="549" r:id="rId62"/>
+    <p:sldId id="550" r:id="rId63"/>
+    <p:sldId id="551" r:id="rId64"/>
+    <p:sldId id="552" r:id="rId65"/>
+    <p:sldId id="553" r:id="rId66"/>
+    <p:sldId id="554" r:id="rId67"/>
+    <p:sldId id="555" r:id="rId68"/>
+    <p:sldId id="566" r:id="rId69"/>
+    <p:sldId id="556" r:id="rId70"/>
+    <p:sldId id="557" r:id="rId71"/>
+    <p:sldId id="558" r:id="rId72"/>
+    <p:sldId id="559" r:id="rId73"/>
+    <p:sldId id="560" r:id="rId74"/>
+    <p:sldId id="561" r:id="rId75"/>
+    <p:sldId id="562" r:id="rId76"/>
+    <p:sldId id="563" r:id="rId77"/>
+    <p:sldId id="564" r:id="rId78"/>
+    <p:sldId id="567" r:id="rId79"/>
+    <p:sldId id="568" r:id="rId80"/>
+    <p:sldId id="569" r:id="rId81"/>
+    <p:sldId id="570" r:id="rId82"/>
+    <p:sldId id="571" r:id="rId83"/>
+    <p:sldId id="572" r:id="rId84"/>
+    <p:sldId id="576" r:id="rId85"/>
+    <p:sldId id="573" r:id="rId86"/>
+    <p:sldId id="574" r:id="rId87"/>
+    <p:sldId id="575" r:id="rId88"/>
+    <p:sldId id="577" r:id="rId89"/>
+    <p:sldId id="578" r:id="rId90"/>
+    <p:sldId id="579" r:id="rId91"/>
+    <p:sldId id="580" r:id="rId92"/>
+    <p:sldId id="581" r:id="rId93"/>
+    <p:sldId id="582" r:id="rId94"/>
+    <p:sldId id="583" r:id="rId95"/>
+    <p:sldId id="584" r:id="rId96"/>
+    <p:sldId id="585" r:id="rId97"/>
+    <p:sldId id="586" r:id="rId98"/>
+    <p:sldId id="587" r:id="rId99"/>
+    <p:sldId id="588" r:id="rId100"/>
+    <p:sldId id="589" r:id="rId101"/>
+    <p:sldId id="590" r:id="rId102"/>
+    <p:sldId id="591" r:id="rId103"/>
+    <p:sldId id="592" r:id="rId104"/>
+    <p:sldId id="593" r:id="rId105"/>
+    <p:sldId id="594" r:id="rId106"/>
+    <p:sldId id="595" r:id="rId107"/>
+    <p:sldId id="470" r:id="rId108"/>
   </p:sldIdLst>
   <p:sldSz cx="12192000" cy="6858000"/>
   <p:notesSz cx="6858000" cy="9144000"/>
@@ -229,32 +227,8 @@
 </p:cmAuthorLst>
 </file>
 
-<file path=ppt/revisionInfo.xml><?xml version="1.0" encoding="utf-8"?>
-<p1510:revInfo xmlns:a="http://schemas.openxmlformats.org/drawingml/2006/main" xmlns:r="http://schemas.openxmlformats.org/officeDocument/2006/relationships" xmlns:p1510="http://schemas.microsoft.com/office/powerpoint/2015/10/main">
-  <p1510:revLst>
-    <p1510:client id="{8DFC6787-4569-4AEF-BB23-FDF85FEE05FB}" v="270" dt="2025-04-20T17:11:41.586"/>
-  </p1510:revLst>
-</p1510:revInfo>
-</file>
-
 <file path=ppt/changesInfos/changesInfo1.xml><?xml version="1.0" encoding="utf-8"?>
 <pc:chgInfo xmlns:a="http://schemas.openxmlformats.org/drawingml/2006/main" xmlns:r="http://schemas.openxmlformats.org/officeDocument/2006/relationships" xmlns:ac="http://schemas.microsoft.com/office/drawing/2013/main/command" xmlns:pc="http://schemas.microsoft.com/office/powerpoint/2013/main/command">
-  <pc:docChgLst>
-    <pc:chgData name="Mohammed Fasha" userId="cc64f42d-a1a6-4f08-b97b-0c37f877119f" providerId="ADAL" clId="{5980B3BB-4EB6-4E37-92BF-3A2A8F4B2C7A}"/>
-    <pc:docChg chg="custSel modSld">
-      <pc:chgData name="Mohammed Fasha" userId="cc64f42d-a1a6-4f08-b97b-0c37f877119f" providerId="ADAL" clId="{5980B3BB-4EB6-4E37-92BF-3A2A8F4B2C7A}" dt="2024-10-15T02:28:13.535" v="0" actId="478"/>
-      <pc:docMkLst>
-        <pc:docMk/>
-      </pc:docMkLst>
-      <pc:sldChg chg="delSp mod">
-        <pc:chgData name="Mohammed Fasha" userId="cc64f42d-a1a6-4f08-b97b-0c37f877119f" providerId="ADAL" clId="{5980B3BB-4EB6-4E37-92BF-3A2A8F4B2C7A}" dt="2024-10-15T02:28:13.535" v="0" actId="478"/>
-        <pc:sldMkLst>
-          <pc:docMk/>
-          <pc:sldMk cId="2297456757" sldId="483"/>
-        </pc:sldMkLst>
-      </pc:sldChg>
-    </pc:docChg>
-  </pc:docChgLst>
   <pc:docChgLst>
     <pc:chgData name="Mohammed Fasha" userId="cc64f42d-a1a6-4f08-b97b-0c37f877119f" providerId="ADAL" clId="{19B6BCF0-69C5-47B4-98CC-B0941D29A039}"/>
     <pc:docChg chg="undo redo custSel addSld delSld modSld sldOrd modMainMaster">
@@ -548,31 +522,102 @@
     </pc:docChg>
   </pc:docChgLst>
   <pc:docChgLst>
-    <pc:chgData name="Mohammed Fasha" userId="cc64f42d-a1a6-4f08-b97b-0c37f877119f" providerId="ADAL" clId="{4C71ED24-115E-432D-933D-C801DA3E52F1}"/>
-    <pc:docChg chg="delSld">
-      <pc:chgData name="Mohammed Fasha" userId="cc64f42d-a1a6-4f08-b97b-0c37f877119f" providerId="ADAL" clId="{4C71ED24-115E-432D-933D-C801DA3E52F1}" dt="2024-12-29T03:12:49.974" v="2" actId="47"/>
+    <pc:chgData name="Mohammed Fasha" userId="cc64f42d-a1a6-4f08-b97b-0c37f877119f" providerId="ADAL" clId="{25C05559-E4DC-4EE1-91BC-1444D09EE869}"/>
+    <pc:docChg chg="undo custSel modSld sldOrd">
+      <pc:chgData name="Mohammed Fasha" userId="cc64f42d-a1a6-4f08-b97b-0c37f877119f" providerId="ADAL" clId="{25C05559-E4DC-4EE1-91BC-1444D09EE869}" dt="2025-04-16T06:49:10.468" v="48" actId="404"/>
       <pc:docMkLst>
         <pc:docMk/>
       </pc:docMkLst>
-      <pc:sldChg chg="del">
-        <pc:chgData name="Mohammed Fasha" userId="cc64f42d-a1a6-4f08-b97b-0c37f877119f" providerId="ADAL" clId="{4C71ED24-115E-432D-933D-C801DA3E52F1}" dt="2024-12-29T03:12:48.360" v="0" actId="47"/>
+      <pc:sldChg chg="modSp mod">
+        <pc:chgData name="Mohammed Fasha" userId="cc64f42d-a1a6-4f08-b97b-0c37f877119f" providerId="ADAL" clId="{25C05559-E4DC-4EE1-91BC-1444D09EE869}" dt="2025-04-16T06:14:55.232" v="16" actId="1076"/>
         <pc:sldMkLst>
           <pc:docMk/>
-          <pc:sldMk cId="2341000601" sldId="701"/>
+          <pc:sldMk cId="1499958888" sldId="394"/>
         </pc:sldMkLst>
       </pc:sldChg>
-      <pc:sldChg chg="del">
-        <pc:chgData name="Mohammed Fasha" userId="cc64f42d-a1a6-4f08-b97b-0c37f877119f" providerId="ADAL" clId="{4C71ED24-115E-432D-933D-C801DA3E52F1}" dt="2024-12-29T03:12:49.133" v="1" actId="47"/>
+      <pc:sldChg chg="delSp modSp mod delAnim">
+        <pc:chgData name="Mohammed Fasha" userId="cc64f42d-a1a6-4f08-b97b-0c37f877119f" providerId="ADAL" clId="{25C05559-E4DC-4EE1-91BC-1444D09EE869}" dt="2025-04-16T06:43:36.666" v="20" actId="478"/>
         <pc:sldMkLst>
           <pc:docMk/>
-          <pc:sldMk cId="3519698944" sldId="702"/>
+          <pc:sldMk cId="2905491798" sldId="440"/>
         </pc:sldMkLst>
       </pc:sldChg>
-      <pc:sldChg chg="del">
-        <pc:chgData name="Mohammed Fasha" userId="cc64f42d-a1a6-4f08-b97b-0c37f877119f" providerId="ADAL" clId="{4C71ED24-115E-432D-933D-C801DA3E52F1}" dt="2024-12-29T03:12:49.974" v="2" actId="47"/>
+      <pc:sldChg chg="modSp mod">
+        <pc:chgData name="Mohammed Fasha" userId="cc64f42d-a1a6-4f08-b97b-0c37f877119f" providerId="ADAL" clId="{25C05559-E4DC-4EE1-91BC-1444D09EE869}" dt="2025-04-09T06:23:26.187" v="0" actId="20577"/>
         <pc:sldMkLst>
           <pc:docMk/>
-          <pc:sldMk cId="3934257344" sldId="703"/>
+          <pc:sldMk cId="2297456757" sldId="483"/>
+        </pc:sldMkLst>
+        <pc:spChg chg="mod">
+          <ac:chgData name="Mohammed Fasha" userId="cc64f42d-a1a6-4f08-b97b-0c37f877119f" providerId="ADAL" clId="{25C05559-E4DC-4EE1-91BC-1444D09EE869}" dt="2025-04-09T06:23:26.187" v="0" actId="20577"/>
+          <ac:spMkLst>
+            <pc:docMk/>
+            <pc:sldMk cId="2297456757" sldId="483"/>
+            <ac:spMk id="5" creationId="{89403830-E271-DAA0-8838-E295A84A8B5B}"/>
+          </ac:spMkLst>
+        </pc:spChg>
+      </pc:sldChg>
+      <pc:sldChg chg="ord">
+        <pc:chgData name="Mohammed Fasha" userId="cc64f42d-a1a6-4f08-b97b-0c37f877119f" providerId="ADAL" clId="{25C05559-E4DC-4EE1-91BC-1444D09EE869}" dt="2025-04-16T06:46:21.733" v="23" actId="20578"/>
+        <pc:sldMkLst>
+          <pc:docMk/>
+          <pc:sldMk cId="3480194047" sldId="599"/>
+        </pc:sldMkLst>
+      </pc:sldChg>
+      <pc:sldChg chg="modSp mod">
+        <pc:chgData name="Mohammed Fasha" userId="cc64f42d-a1a6-4f08-b97b-0c37f877119f" providerId="ADAL" clId="{25C05559-E4DC-4EE1-91BC-1444D09EE869}" dt="2025-04-16T06:46:47.902" v="27" actId="404"/>
+        <pc:sldMkLst>
+          <pc:docMk/>
+          <pc:sldMk cId="3146452721" sldId="600"/>
+        </pc:sldMkLst>
+      </pc:sldChg>
+      <pc:sldChg chg="delSp mod">
+        <pc:chgData name="Mohammed Fasha" userId="cc64f42d-a1a6-4f08-b97b-0c37f877119f" providerId="ADAL" clId="{25C05559-E4DC-4EE1-91BC-1444D09EE869}" dt="2025-04-16T06:47:57.131" v="35" actId="21"/>
+        <pc:sldMkLst>
+          <pc:docMk/>
+          <pc:sldMk cId="202107314" sldId="647"/>
+        </pc:sldMkLst>
+      </pc:sldChg>
+      <pc:sldChg chg="modSp mod">
+        <pc:chgData name="Mohammed Fasha" userId="cc64f42d-a1a6-4f08-b97b-0c37f877119f" providerId="ADAL" clId="{25C05559-E4DC-4EE1-91BC-1444D09EE869}" dt="2025-04-16T06:48:42.467" v="40" actId="14100"/>
+        <pc:sldMkLst>
+          <pc:docMk/>
+          <pc:sldMk cId="3454522070" sldId="679"/>
+        </pc:sldMkLst>
+      </pc:sldChg>
+      <pc:sldChg chg="modSp mod">
+        <pc:chgData name="Mohammed Fasha" userId="cc64f42d-a1a6-4f08-b97b-0c37f877119f" providerId="ADAL" clId="{25C05559-E4DC-4EE1-91BC-1444D09EE869}" dt="2025-04-16T06:49:10.468" v="48" actId="404"/>
+        <pc:sldMkLst>
+          <pc:docMk/>
+          <pc:sldMk cId="2856814121" sldId="681"/>
+        </pc:sldMkLst>
+      </pc:sldChg>
+      <pc:sldChg chg="modSp mod">
+        <pc:chgData name="Mohammed Fasha" userId="cc64f42d-a1a6-4f08-b97b-0c37f877119f" providerId="ADAL" clId="{25C05559-E4DC-4EE1-91BC-1444D09EE869}" dt="2025-04-16T06:48:55.287" v="46" actId="27636"/>
+        <pc:sldMkLst>
+          <pc:docMk/>
+          <pc:sldMk cId="265576630" sldId="698"/>
+        </pc:sldMkLst>
+      </pc:sldChg>
+      <pc:sldChg chg="modSp">
+        <pc:chgData name="Mohammed Fasha" userId="cc64f42d-a1a6-4f08-b97b-0c37f877119f" providerId="ADAL" clId="{25C05559-E4DC-4EE1-91BC-1444D09EE869}" dt="2025-04-16T06:48:02.658" v="36" actId="1076"/>
+        <pc:sldMkLst>
+          <pc:docMk/>
+          <pc:sldMk cId="3085160177" sldId="704"/>
+        </pc:sldMkLst>
+      </pc:sldChg>
+      <pc:sldChg chg="modSp mod">
+        <pc:chgData name="Mohammed Fasha" userId="cc64f42d-a1a6-4f08-b97b-0c37f877119f" providerId="ADAL" clId="{25C05559-E4DC-4EE1-91BC-1444D09EE869}" dt="2025-04-16T06:47:18.630" v="34" actId="1076"/>
+        <pc:sldMkLst>
+          <pc:docMk/>
+          <pc:sldMk cId="32004852" sldId="708"/>
+        </pc:sldMkLst>
+      </pc:sldChg>
+      <pc:sldChg chg="addSp delSp modSp mod">
+        <pc:chgData name="Mohammed Fasha" userId="cc64f42d-a1a6-4f08-b97b-0c37f877119f" providerId="ADAL" clId="{25C05559-E4DC-4EE1-91BC-1444D09EE869}" dt="2025-04-16T06:14:10.424" v="11" actId="167"/>
+        <pc:sldMkLst>
+          <pc:docMk/>
+          <pc:sldMk cId="3150550060" sldId="720"/>
         </pc:sldMkLst>
       </pc:sldChg>
     </pc:docChg>
@@ -846,96 +891,97 @@
     </pc:docChg>
   </pc:docChgLst>
   <pc:docChgLst>
-    <pc:chgData name="Mohammed Fasha" userId="cc64f42d-a1a6-4f08-b97b-0c37f877119f" providerId="ADAL" clId="{2E5FBF59-3168-4932-9518-582502FE1AD5}"/>
-    <pc:docChg chg="undo custSel delSld modSld">
-      <pc:chgData name="Mohammed Fasha" userId="cc64f42d-a1a6-4f08-b97b-0c37f877119f" providerId="ADAL" clId="{2E5FBF59-3168-4932-9518-582502FE1AD5}" dt="2024-12-24T08:08:19.987" v="550" actId="20577"/>
+    <pc:chgData name="Mohammed Fasha" userId="cc64f42d-a1a6-4f08-b97b-0c37f877119f" providerId="ADAL" clId="{5980B3BB-4EB6-4E37-92BF-3A2A8F4B2C7A}"/>
+    <pc:docChg chg="custSel modSld">
+      <pc:chgData name="Mohammed Fasha" userId="cc64f42d-a1a6-4f08-b97b-0c37f877119f" providerId="ADAL" clId="{5980B3BB-4EB6-4E37-92BF-3A2A8F4B2C7A}" dt="2024-10-15T02:28:13.535" v="0" actId="478"/>
       <pc:docMkLst>
         <pc:docMk/>
       </pc:docMkLst>
-      <pc:sldChg chg="delSp">
-        <pc:chgData name="Mohammed Fasha" userId="cc64f42d-a1a6-4f08-b97b-0c37f877119f" providerId="ADAL" clId="{2E5FBF59-3168-4932-9518-582502FE1AD5}" dt="2024-11-19T07:40:47.121" v="208" actId="478"/>
-        <pc:sldMkLst>
-          <pc:docMk/>
-          <pc:sldMk cId="391491219" sldId="428"/>
-        </pc:sldMkLst>
-      </pc:sldChg>
-      <pc:sldChg chg="modSp">
-        <pc:chgData name="Mohammed Fasha" userId="cc64f42d-a1a6-4f08-b97b-0c37f877119f" providerId="ADAL" clId="{2E5FBF59-3168-4932-9518-582502FE1AD5}" dt="2024-12-03T07:43:58.007" v="456" actId="1076"/>
-        <pc:sldMkLst>
-          <pc:docMk/>
-          <pc:sldMk cId="3339445507" sldId="430"/>
-        </pc:sldMkLst>
-      </pc:sldChg>
-      <pc:sldChg chg="modSp">
-        <pc:chgData name="Mohammed Fasha" userId="cc64f42d-a1a6-4f08-b97b-0c37f877119f" providerId="ADAL" clId="{2E5FBF59-3168-4932-9518-582502FE1AD5}" dt="2024-12-03T07:45:08.136" v="474" actId="20577"/>
-        <pc:sldMkLst>
-          <pc:docMk/>
-          <pc:sldMk cId="3389046835" sldId="431"/>
-        </pc:sldMkLst>
-      </pc:sldChg>
-      <pc:sldChg chg="modSp">
-        <pc:chgData name="Mohammed Fasha" userId="cc64f42d-a1a6-4f08-b97b-0c37f877119f" providerId="ADAL" clId="{2E5FBF59-3168-4932-9518-582502FE1AD5}" dt="2024-11-10T06:33:09.727" v="37" actId="207"/>
-        <pc:sldMkLst>
-          <pc:docMk/>
-          <pc:sldMk cId="2726994946" sldId="479"/>
-        </pc:sldMkLst>
-      </pc:sldChg>
-      <pc:sldChg chg="modSp">
-        <pc:chgData name="Mohammed Fasha" userId="cc64f42d-a1a6-4f08-b97b-0c37f877119f" providerId="ADAL" clId="{2E5FBF59-3168-4932-9518-582502FE1AD5}" dt="2024-11-19T07:44:28.766" v="211" actId="20577"/>
+      <pc:sldChg chg="delSp mod">
+        <pc:chgData name="Mohammed Fasha" userId="cc64f42d-a1a6-4f08-b97b-0c37f877119f" providerId="ADAL" clId="{5980B3BB-4EB6-4E37-92BF-3A2A8F4B2C7A}" dt="2024-10-15T02:28:13.535" v="0" actId="478"/>
         <pc:sldMkLst>
           <pc:docMk/>
           <pc:sldMk cId="2297456757" sldId="483"/>
         </pc:sldMkLst>
       </pc:sldChg>
-      <pc:sldChg chg="modSp">
-        <pc:chgData name="Mohammed Fasha" userId="cc64f42d-a1a6-4f08-b97b-0c37f877119f" providerId="ADAL" clId="{2E5FBF59-3168-4932-9518-582502FE1AD5}" dt="2024-11-10T06:45:09.392" v="40" actId="20577"/>
+    </pc:docChg>
+  </pc:docChgLst>
+  <pc:docChgLst>
+    <pc:chgData name="Mohammed Fasha" userId="cc64f42d-a1a6-4f08-b97b-0c37f877119f" providerId="ADAL" clId="{C4E19E38-7064-4221-B9EB-EDF8265691F0}"/>
+    <pc:docChg chg="modSld">
+      <pc:chgData name="Mohammed Fasha" userId="cc64f42d-a1a6-4f08-b97b-0c37f877119f" providerId="ADAL" clId="{C4E19E38-7064-4221-B9EB-EDF8265691F0}" dt="2025-04-20T19:30:54.966" v="2" actId="20577"/>
+      <pc:docMkLst>
+        <pc:docMk/>
+      </pc:docMkLst>
+      <pc:sldChg chg="modSp mod">
+        <pc:chgData name="Mohammed Fasha" userId="cc64f42d-a1a6-4f08-b97b-0c37f877119f" providerId="ADAL" clId="{C4E19E38-7064-4221-B9EB-EDF8265691F0}" dt="2025-04-20T19:30:54.966" v="2" actId="20577"/>
         <pc:sldMkLst>
           <pc:docMk/>
-          <pc:sldMk cId="3474268344" sldId="596"/>
+          <pc:sldMk cId="2297456757" sldId="483"/>
+        </pc:sldMkLst>
+        <pc:spChg chg="mod">
+          <ac:chgData name="Mohammed Fasha" userId="cc64f42d-a1a6-4f08-b97b-0c37f877119f" providerId="ADAL" clId="{C4E19E38-7064-4221-B9EB-EDF8265691F0}" dt="2025-04-20T19:30:54.966" v="2" actId="20577"/>
+          <ac:spMkLst>
+            <pc:docMk/>
+            <pc:sldMk cId="2297456757" sldId="483"/>
+            <ac:spMk id="5" creationId="{89403830-E271-DAA0-8838-E295A84A8B5B}"/>
+          </ac:spMkLst>
+        </pc:spChg>
+      </pc:sldChg>
+    </pc:docChg>
+  </pc:docChgLst>
+  <pc:docChgLst>
+    <pc:chgData name="Mohammed Fasha" userId="cc64f42d-a1a6-4f08-b97b-0c37f877119f" providerId="ADAL" clId="{4C71ED24-115E-432D-933D-C801DA3E52F1}"/>
+    <pc:docChg chg="delSld">
+      <pc:chgData name="Mohammed Fasha" userId="cc64f42d-a1a6-4f08-b97b-0c37f877119f" providerId="ADAL" clId="{4C71ED24-115E-432D-933D-C801DA3E52F1}" dt="2024-12-29T03:12:49.974" v="2" actId="47"/>
+      <pc:docMkLst>
+        <pc:docMk/>
+      </pc:docMkLst>
+      <pc:sldChg chg="del">
+        <pc:chgData name="Mohammed Fasha" userId="cc64f42d-a1a6-4f08-b97b-0c37f877119f" providerId="ADAL" clId="{4C71ED24-115E-432D-933D-C801DA3E52F1}" dt="2024-12-29T03:12:48.360" v="0" actId="47"/>
+        <pc:sldMkLst>
+          <pc:docMk/>
+          <pc:sldMk cId="2341000601" sldId="701"/>
         </pc:sldMkLst>
       </pc:sldChg>
-      <pc:sldChg chg="modSp">
-        <pc:chgData name="Mohammed Fasha" userId="cc64f42d-a1a6-4f08-b97b-0c37f877119f" providerId="ADAL" clId="{2E5FBF59-3168-4932-9518-582502FE1AD5}" dt="2024-12-03T07:47:21.561" v="476" actId="6549"/>
+      <pc:sldChg chg="del">
+        <pc:chgData name="Mohammed Fasha" userId="cc64f42d-a1a6-4f08-b97b-0c37f877119f" providerId="ADAL" clId="{4C71ED24-115E-432D-933D-C801DA3E52F1}" dt="2024-12-29T03:12:49.133" v="1" actId="47"/>
         <pc:sldMkLst>
           <pc:docMk/>
-          <pc:sldMk cId="399592497" sldId="613"/>
+          <pc:sldMk cId="3519698944" sldId="702"/>
         </pc:sldMkLst>
       </pc:sldChg>
-      <pc:sldChg chg="modSp">
-        <pc:chgData name="Mohammed Fasha" userId="cc64f42d-a1a6-4f08-b97b-0c37f877119f" providerId="ADAL" clId="{2E5FBF59-3168-4932-9518-582502FE1AD5}" dt="2024-12-03T07:49:02.980" v="478" actId="207"/>
+      <pc:sldChg chg="del">
+        <pc:chgData name="Mohammed Fasha" userId="cc64f42d-a1a6-4f08-b97b-0c37f877119f" providerId="ADAL" clId="{4C71ED24-115E-432D-933D-C801DA3E52F1}" dt="2024-12-29T03:12:49.974" v="2" actId="47"/>
         <pc:sldMkLst>
           <pc:docMk/>
-          <pc:sldMk cId="3329135496" sldId="617"/>
+          <pc:sldMk cId="3934257344" sldId="703"/>
         </pc:sldMkLst>
       </pc:sldChg>
-      <pc:sldChg chg="modSp">
-        <pc:chgData name="Mohammed Fasha" userId="cc64f42d-a1a6-4f08-b97b-0c37f877119f" providerId="ADAL" clId="{2E5FBF59-3168-4932-9518-582502FE1AD5}" dt="2024-12-24T08:05:16.608" v="482" actId="403"/>
-        <pc:sldMkLst>
+    </pc:docChg>
+  </pc:docChgLst>
+  <pc:docChgLst>
+    <pc:chgData name="Mohammed Fasha" userId="cc64f42d-a1a6-4f08-b97b-0c37f877119f" providerId="ADAL" clId="{6804A8E6-8D7F-46E3-B091-66A8F6B926BF}"/>
+    <pc:docChg chg="custSel modMainMaster">
+      <pc:chgData name="Mohammed Fasha" userId="cc64f42d-a1a6-4f08-b97b-0c37f877119f" providerId="ADAL" clId="{6804A8E6-8D7F-46E3-B091-66A8F6B926BF}" dt="2024-11-09T05:15:35.019" v="2" actId="1076"/>
+      <pc:docMkLst>
+        <pc:docMk/>
+      </pc:docMkLst>
+      <pc:sldMasterChg chg="delSp mod modSldLayout">
+        <pc:chgData name="Mohammed Fasha" userId="cc64f42d-a1a6-4f08-b97b-0c37f877119f" providerId="ADAL" clId="{6804A8E6-8D7F-46E3-B091-66A8F6B926BF}" dt="2024-11-09T05:15:35.019" v="2" actId="1076"/>
+        <pc:sldMasterMkLst>
           <pc:docMk/>
-          <pc:sldMk cId="2990045589" sldId="659"/>
-        </pc:sldMkLst>
-      </pc:sldChg>
-      <pc:sldChg chg="modSp">
-        <pc:chgData name="Mohammed Fasha" userId="cc64f42d-a1a6-4f08-b97b-0c37f877119f" providerId="ADAL" clId="{2E5FBF59-3168-4932-9518-582502FE1AD5}" dt="2024-12-24T08:08:19.987" v="550" actId="20577"/>
-        <pc:sldMkLst>
-          <pc:docMk/>
-          <pc:sldMk cId="2680231355" sldId="669"/>
-        </pc:sldMkLst>
-      </pc:sldChg>
-      <pc:sldChg chg="addSp modSp">
-        <pc:chgData name="Mohammed Fasha" userId="cc64f42d-a1a6-4f08-b97b-0c37f877119f" providerId="ADAL" clId="{2E5FBF59-3168-4932-9518-582502FE1AD5}" dt="2024-12-24T08:05:52.910" v="488" actId="1076"/>
-        <pc:sldMkLst>
-          <pc:docMk/>
-          <pc:sldMk cId="916102856" sldId="685"/>
-        </pc:sldMkLst>
-      </pc:sldChg>
-      <pc:sldChg chg="modSp">
-        <pc:chgData name="Mohammed Fasha" userId="cc64f42d-a1a6-4f08-b97b-0c37f877119f" providerId="ADAL" clId="{2E5FBF59-3168-4932-9518-582502FE1AD5}" dt="2024-11-19T07:03:29.557" v="206" actId="207"/>
-        <pc:sldMkLst>
-          <pc:docMk/>
-          <pc:sldMk cId="32004852" sldId="708"/>
-        </pc:sldMkLst>
-      </pc:sldChg>
+          <pc:sldMasterMk cId="742811419" sldId="2147483648"/>
+        </pc:sldMasterMkLst>
+        <pc:sldLayoutChg chg="addSp modSp mod">
+          <pc:chgData name="Mohammed Fasha" userId="cc64f42d-a1a6-4f08-b97b-0c37f877119f" providerId="ADAL" clId="{6804A8E6-8D7F-46E3-B091-66A8F6B926BF}" dt="2024-11-09T05:15:35.019" v="2" actId="1076"/>
+          <pc:sldLayoutMkLst>
+            <pc:docMk/>
+            <pc:sldMasterMk cId="742811419" sldId="2147483648"/>
+            <pc:sldLayoutMk cId="4063788262" sldId="2147483649"/>
+          </pc:sldLayoutMkLst>
+        </pc:sldLayoutChg>
+      </pc:sldMasterChg>
     </pc:docChg>
   </pc:docChgLst>
   <pc:docChgLst>
@@ -5577,149 +5623,739 @@
     </pc:docChg>
   </pc:docChgLst>
   <pc:docChgLst>
-    <pc:chgData name="Mohammed Fasha" userId="cc64f42d-a1a6-4f08-b97b-0c37f877119f" providerId="ADAL" clId="{25C05559-E4DC-4EE1-91BC-1444D09EE869}"/>
-    <pc:docChg chg="undo custSel modSld sldOrd">
-      <pc:chgData name="Mohammed Fasha" userId="cc64f42d-a1a6-4f08-b97b-0c37f877119f" providerId="ADAL" clId="{25C05559-E4DC-4EE1-91BC-1444D09EE869}" dt="2025-04-16T06:49:10.468" v="48" actId="404"/>
+    <pc:chgData name="Mohammed Fasha" userId="cc64f42d-a1a6-4f08-b97b-0c37f877119f" providerId="ADAL" clId="{2E5FBF59-3168-4932-9518-582502FE1AD5}"/>
+    <pc:docChg chg="undo custSel delSld modSld">
+      <pc:chgData name="Mohammed Fasha" userId="cc64f42d-a1a6-4f08-b97b-0c37f877119f" providerId="ADAL" clId="{2E5FBF59-3168-4932-9518-582502FE1AD5}" dt="2024-12-24T08:08:19.987" v="550" actId="20577"/>
       <pc:docMkLst>
         <pc:docMk/>
       </pc:docMkLst>
-      <pc:sldChg chg="modSp mod">
-        <pc:chgData name="Mohammed Fasha" userId="cc64f42d-a1a6-4f08-b97b-0c37f877119f" providerId="ADAL" clId="{25C05559-E4DC-4EE1-91BC-1444D09EE869}" dt="2025-04-16T06:14:55.232" v="16" actId="1076"/>
+      <pc:sldChg chg="delSp">
+        <pc:chgData name="Mohammed Fasha" userId="cc64f42d-a1a6-4f08-b97b-0c37f877119f" providerId="ADAL" clId="{2E5FBF59-3168-4932-9518-582502FE1AD5}" dt="2024-11-19T07:40:47.121" v="208" actId="478"/>
         <pc:sldMkLst>
           <pc:docMk/>
-          <pc:sldMk cId="1499958888" sldId="394"/>
+          <pc:sldMk cId="391491219" sldId="428"/>
         </pc:sldMkLst>
       </pc:sldChg>
-      <pc:sldChg chg="delSp modSp mod delAnim">
-        <pc:chgData name="Mohammed Fasha" userId="cc64f42d-a1a6-4f08-b97b-0c37f877119f" providerId="ADAL" clId="{25C05559-E4DC-4EE1-91BC-1444D09EE869}" dt="2025-04-16T06:43:36.666" v="20" actId="478"/>
+      <pc:sldChg chg="modSp">
+        <pc:chgData name="Mohammed Fasha" userId="cc64f42d-a1a6-4f08-b97b-0c37f877119f" providerId="ADAL" clId="{2E5FBF59-3168-4932-9518-582502FE1AD5}" dt="2024-12-03T07:43:58.007" v="456" actId="1076"/>
         <pc:sldMkLst>
           <pc:docMk/>
-          <pc:sldMk cId="2905491798" sldId="440"/>
+          <pc:sldMk cId="3339445507" sldId="430"/>
         </pc:sldMkLst>
       </pc:sldChg>
-      <pc:sldChg chg="modSp mod">
-        <pc:chgData name="Mohammed Fasha" userId="cc64f42d-a1a6-4f08-b97b-0c37f877119f" providerId="ADAL" clId="{25C05559-E4DC-4EE1-91BC-1444D09EE869}" dt="2025-04-09T06:23:26.187" v="0" actId="20577"/>
+      <pc:sldChg chg="modSp">
+        <pc:chgData name="Mohammed Fasha" userId="cc64f42d-a1a6-4f08-b97b-0c37f877119f" providerId="ADAL" clId="{2E5FBF59-3168-4932-9518-582502FE1AD5}" dt="2024-12-03T07:45:08.136" v="474" actId="20577"/>
+        <pc:sldMkLst>
+          <pc:docMk/>
+          <pc:sldMk cId="3389046835" sldId="431"/>
+        </pc:sldMkLst>
+      </pc:sldChg>
+      <pc:sldChg chg="modSp">
+        <pc:chgData name="Mohammed Fasha" userId="cc64f42d-a1a6-4f08-b97b-0c37f877119f" providerId="ADAL" clId="{2E5FBF59-3168-4932-9518-582502FE1AD5}" dt="2024-11-10T06:33:09.727" v="37" actId="207"/>
+        <pc:sldMkLst>
+          <pc:docMk/>
+          <pc:sldMk cId="2726994946" sldId="479"/>
+        </pc:sldMkLst>
+      </pc:sldChg>
+      <pc:sldChg chg="modSp">
+        <pc:chgData name="Mohammed Fasha" userId="cc64f42d-a1a6-4f08-b97b-0c37f877119f" providerId="ADAL" clId="{2E5FBF59-3168-4932-9518-582502FE1AD5}" dt="2024-11-19T07:44:28.766" v="211" actId="20577"/>
         <pc:sldMkLst>
           <pc:docMk/>
           <pc:sldMk cId="2297456757" sldId="483"/>
         </pc:sldMkLst>
-        <pc:spChg chg="mod">
-          <ac:chgData name="Mohammed Fasha" userId="cc64f42d-a1a6-4f08-b97b-0c37f877119f" providerId="ADAL" clId="{25C05559-E4DC-4EE1-91BC-1444D09EE869}" dt="2025-04-09T06:23:26.187" v="0" actId="20577"/>
-          <ac:spMkLst>
-            <pc:docMk/>
-            <pc:sldMk cId="2297456757" sldId="483"/>
-            <ac:spMk id="5" creationId="{89403830-E271-DAA0-8838-E295A84A8B5B}"/>
-          </ac:spMkLst>
-        </pc:spChg>
       </pc:sldChg>
-      <pc:sldChg chg="ord">
-        <pc:chgData name="Mohammed Fasha" userId="cc64f42d-a1a6-4f08-b97b-0c37f877119f" providerId="ADAL" clId="{25C05559-E4DC-4EE1-91BC-1444D09EE869}" dt="2025-04-16T06:46:21.733" v="23" actId="20578"/>
+      <pc:sldChg chg="modSp">
+        <pc:chgData name="Mohammed Fasha" userId="cc64f42d-a1a6-4f08-b97b-0c37f877119f" providerId="ADAL" clId="{2E5FBF59-3168-4932-9518-582502FE1AD5}" dt="2024-11-10T06:45:09.392" v="40" actId="20577"/>
         <pc:sldMkLst>
           <pc:docMk/>
-          <pc:sldMk cId="3480194047" sldId="599"/>
-        </pc:sldMkLst>
-      </pc:sldChg>
-      <pc:sldChg chg="modSp mod">
-        <pc:chgData name="Mohammed Fasha" userId="cc64f42d-a1a6-4f08-b97b-0c37f877119f" providerId="ADAL" clId="{25C05559-E4DC-4EE1-91BC-1444D09EE869}" dt="2025-04-16T06:46:47.902" v="27" actId="404"/>
-        <pc:sldMkLst>
-          <pc:docMk/>
-          <pc:sldMk cId="3146452721" sldId="600"/>
-        </pc:sldMkLst>
-      </pc:sldChg>
-      <pc:sldChg chg="delSp mod">
-        <pc:chgData name="Mohammed Fasha" userId="cc64f42d-a1a6-4f08-b97b-0c37f877119f" providerId="ADAL" clId="{25C05559-E4DC-4EE1-91BC-1444D09EE869}" dt="2025-04-16T06:47:57.131" v="35" actId="21"/>
-        <pc:sldMkLst>
-          <pc:docMk/>
-          <pc:sldMk cId="202107314" sldId="647"/>
-        </pc:sldMkLst>
-      </pc:sldChg>
-      <pc:sldChg chg="modSp mod">
-        <pc:chgData name="Mohammed Fasha" userId="cc64f42d-a1a6-4f08-b97b-0c37f877119f" providerId="ADAL" clId="{25C05559-E4DC-4EE1-91BC-1444D09EE869}" dt="2025-04-16T06:48:42.467" v="40" actId="14100"/>
-        <pc:sldMkLst>
-          <pc:docMk/>
-          <pc:sldMk cId="3454522070" sldId="679"/>
-        </pc:sldMkLst>
-      </pc:sldChg>
-      <pc:sldChg chg="modSp mod">
-        <pc:chgData name="Mohammed Fasha" userId="cc64f42d-a1a6-4f08-b97b-0c37f877119f" providerId="ADAL" clId="{25C05559-E4DC-4EE1-91BC-1444D09EE869}" dt="2025-04-16T06:49:10.468" v="48" actId="404"/>
-        <pc:sldMkLst>
-          <pc:docMk/>
-          <pc:sldMk cId="2856814121" sldId="681"/>
-        </pc:sldMkLst>
-      </pc:sldChg>
-      <pc:sldChg chg="modSp mod">
-        <pc:chgData name="Mohammed Fasha" userId="cc64f42d-a1a6-4f08-b97b-0c37f877119f" providerId="ADAL" clId="{25C05559-E4DC-4EE1-91BC-1444D09EE869}" dt="2025-04-16T06:48:55.287" v="46" actId="27636"/>
-        <pc:sldMkLst>
-          <pc:docMk/>
-          <pc:sldMk cId="265576630" sldId="698"/>
+          <pc:sldMk cId="3474268344" sldId="596"/>
         </pc:sldMkLst>
       </pc:sldChg>
       <pc:sldChg chg="modSp">
-        <pc:chgData name="Mohammed Fasha" userId="cc64f42d-a1a6-4f08-b97b-0c37f877119f" providerId="ADAL" clId="{25C05559-E4DC-4EE1-91BC-1444D09EE869}" dt="2025-04-16T06:48:02.658" v="36" actId="1076"/>
+        <pc:chgData name="Mohammed Fasha" userId="cc64f42d-a1a6-4f08-b97b-0c37f877119f" providerId="ADAL" clId="{2E5FBF59-3168-4932-9518-582502FE1AD5}" dt="2024-12-03T07:47:21.561" v="476" actId="6549"/>
         <pc:sldMkLst>
           <pc:docMk/>
-          <pc:sldMk cId="3085160177" sldId="704"/>
+          <pc:sldMk cId="399592497" sldId="613"/>
         </pc:sldMkLst>
       </pc:sldChg>
-      <pc:sldChg chg="modSp mod">
-        <pc:chgData name="Mohammed Fasha" userId="cc64f42d-a1a6-4f08-b97b-0c37f877119f" providerId="ADAL" clId="{25C05559-E4DC-4EE1-91BC-1444D09EE869}" dt="2025-04-16T06:47:18.630" v="34" actId="1076"/>
+      <pc:sldChg chg="modSp">
+        <pc:chgData name="Mohammed Fasha" userId="cc64f42d-a1a6-4f08-b97b-0c37f877119f" providerId="ADAL" clId="{2E5FBF59-3168-4932-9518-582502FE1AD5}" dt="2024-12-03T07:49:02.980" v="478" actId="207"/>
+        <pc:sldMkLst>
+          <pc:docMk/>
+          <pc:sldMk cId="3329135496" sldId="617"/>
+        </pc:sldMkLst>
+      </pc:sldChg>
+      <pc:sldChg chg="modSp">
+        <pc:chgData name="Mohammed Fasha" userId="cc64f42d-a1a6-4f08-b97b-0c37f877119f" providerId="ADAL" clId="{2E5FBF59-3168-4932-9518-582502FE1AD5}" dt="2024-12-24T08:05:16.608" v="482" actId="403"/>
+        <pc:sldMkLst>
+          <pc:docMk/>
+          <pc:sldMk cId="2990045589" sldId="659"/>
+        </pc:sldMkLst>
+      </pc:sldChg>
+      <pc:sldChg chg="modSp">
+        <pc:chgData name="Mohammed Fasha" userId="cc64f42d-a1a6-4f08-b97b-0c37f877119f" providerId="ADAL" clId="{2E5FBF59-3168-4932-9518-582502FE1AD5}" dt="2024-12-24T08:08:19.987" v="550" actId="20577"/>
+        <pc:sldMkLst>
+          <pc:docMk/>
+          <pc:sldMk cId="2680231355" sldId="669"/>
+        </pc:sldMkLst>
+      </pc:sldChg>
+      <pc:sldChg chg="addSp modSp">
+        <pc:chgData name="Mohammed Fasha" userId="cc64f42d-a1a6-4f08-b97b-0c37f877119f" providerId="ADAL" clId="{2E5FBF59-3168-4932-9518-582502FE1AD5}" dt="2024-12-24T08:05:52.910" v="488" actId="1076"/>
+        <pc:sldMkLst>
+          <pc:docMk/>
+          <pc:sldMk cId="916102856" sldId="685"/>
+        </pc:sldMkLst>
+      </pc:sldChg>
+      <pc:sldChg chg="modSp">
+        <pc:chgData name="Mohammed Fasha" userId="cc64f42d-a1a6-4f08-b97b-0c37f877119f" providerId="ADAL" clId="{2E5FBF59-3168-4932-9518-582502FE1AD5}" dt="2024-11-19T07:03:29.557" v="206" actId="207"/>
         <pc:sldMkLst>
           <pc:docMk/>
           <pc:sldMk cId="32004852" sldId="708"/>
         </pc:sldMkLst>
       </pc:sldChg>
-      <pc:sldChg chg="addSp delSp modSp mod">
-        <pc:chgData name="Mohammed Fasha" userId="cc64f42d-a1a6-4f08-b97b-0c37f877119f" providerId="ADAL" clId="{25C05559-E4DC-4EE1-91BC-1444D09EE869}" dt="2025-04-16T06:14:10.424" v="11" actId="167"/>
-        <pc:sldMkLst>
-          <pc:docMk/>
-          <pc:sldMk cId="3150550060" sldId="720"/>
-        </pc:sldMkLst>
-      </pc:sldChg>
     </pc:docChg>
   </pc:docChgLst>
   <pc:docChgLst>
-    <pc:chgData name="Mohammed Fasha" userId="cc64f42d-a1a6-4f08-b97b-0c37f877119f" providerId="ADAL" clId="{6804A8E6-8D7F-46E3-B091-66A8F6B926BF}"/>
-    <pc:docChg chg="custSel modMainMaster">
-      <pc:chgData name="Mohammed Fasha" userId="cc64f42d-a1a6-4f08-b97b-0c37f877119f" providerId="ADAL" clId="{6804A8E6-8D7F-46E3-B091-66A8F6B926BF}" dt="2024-11-09T05:15:35.019" v="2" actId="1076"/>
-      <pc:docMkLst>
-        <pc:docMk/>
-      </pc:docMkLst>
-      <pc:sldMasterChg chg="delSp mod modSldLayout">
-        <pc:chgData name="Mohammed Fasha" userId="cc64f42d-a1a6-4f08-b97b-0c37f877119f" providerId="ADAL" clId="{6804A8E6-8D7F-46E3-B091-66A8F6B926BF}" dt="2024-11-09T05:15:35.019" v="2" actId="1076"/>
-        <pc:sldMasterMkLst>
-          <pc:docMk/>
-          <pc:sldMasterMk cId="742811419" sldId="2147483648"/>
-        </pc:sldMasterMkLst>
-        <pc:sldLayoutChg chg="addSp modSp mod">
-          <pc:chgData name="Mohammed Fasha" userId="cc64f42d-a1a6-4f08-b97b-0c37f877119f" providerId="ADAL" clId="{6804A8E6-8D7F-46E3-B091-66A8F6B926BF}" dt="2024-11-09T05:15:35.019" v="2" actId="1076"/>
-          <pc:sldLayoutMkLst>
-            <pc:docMk/>
-            <pc:sldMasterMk cId="742811419" sldId="2147483648"/>
-            <pc:sldLayoutMk cId="4063788262" sldId="2147483649"/>
-          </pc:sldLayoutMkLst>
-        </pc:sldLayoutChg>
-      </pc:sldMasterChg>
-    </pc:docChg>
-  </pc:docChgLst>
-  <pc:docChgLst>
-    <pc:chgData name="Mohammed Fasha" userId="cc64f42d-a1a6-4f08-b97b-0c37f877119f" providerId="ADAL" clId="{C4E19E38-7064-4221-B9EB-EDF8265691F0}"/>
-    <pc:docChg chg="modSld">
-      <pc:chgData name="Mohammed Fasha" userId="cc64f42d-a1a6-4f08-b97b-0c37f877119f" providerId="ADAL" clId="{C4E19E38-7064-4221-B9EB-EDF8265691F0}" dt="2025-04-20T19:30:54.966" v="2" actId="20577"/>
+    <pc:chgData name="Mohammed Fasha" userId="cc64f42d-a1a6-4f08-b97b-0c37f877119f" providerId="ADAL" clId="{AA8E1541-7D85-4F75-963C-030DEE10BF8B}"/>
+    <pc:docChg chg="undo custSel delSld modSld">
+      <pc:chgData name="Mohammed Fasha" userId="cc64f42d-a1a6-4f08-b97b-0c37f877119f" providerId="ADAL" clId="{AA8E1541-7D85-4F75-963C-030DEE10BF8B}" dt="2025-04-22T08:02:28.562" v="130" actId="207"/>
       <pc:docMkLst>
         <pc:docMk/>
       </pc:docMkLst>
       <pc:sldChg chg="modSp mod">
-        <pc:chgData name="Mohammed Fasha" userId="cc64f42d-a1a6-4f08-b97b-0c37f877119f" providerId="ADAL" clId="{C4E19E38-7064-4221-B9EB-EDF8265691F0}" dt="2025-04-20T19:30:54.966" v="2" actId="20577"/>
+        <pc:chgData name="Mohammed Fasha" userId="cc64f42d-a1a6-4f08-b97b-0c37f877119f" providerId="ADAL" clId="{AA8E1541-7D85-4F75-963C-030DEE10BF8B}" dt="2025-04-22T07:45:02.768" v="0" actId="12"/>
         <pc:sldMkLst>
           <pc:docMk/>
-          <pc:sldMk cId="2297456757" sldId="483"/>
+          <pc:sldMk cId="974044099" sldId="536"/>
         </pc:sldMkLst>
         <pc:spChg chg="mod">
-          <ac:chgData name="Mohammed Fasha" userId="cc64f42d-a1a6-4f08-b97b-0c37f877119f" providerId="ADAL" clId="{C4E19E38-7064-4221-B9EB-EDF8265691F0}" dt="2025-04-20T19:30:54.966" v="2" actId="20577"/>
+          <ac:chgData name="Mohammed Fasha" userId="cc64f42d-a1a6-4f08-b97b-0c37f877119f" providerId="ADAL" clId="{AA8E1541-7D85-4F75-963C-030DEE10BF8B}" dt="2025-04-22T07:45:02.768" v="0" actId="12"/>
           <ac:spMkLst>
             <pc:docMk/>
-            <pc:sldMk cId="2297456757" sldId="483"/>
-            <ac:spMk id="5" creationId="{89403830-E271-DAA0-8838-E295A84A8B5B}"/>
+            <pc:sldMk cId="974044099" sldId="536"/>
+            <ac:spMk id="3" creationId="{8EF64BF2-EDFA-AD1B-0B43-6A5CED0008CB}"/>
+          </ac:spMkLst>
+        </pc:spChg>
+      </pc:sldChg>
+      <pc:sldChg chg="modSp mod">
+        <pc:chgData name="Mohammed Fasha" userId="cc64f42d-a1a6-4f08-b97b-0c37f877119f" providerId="ADAL" clId="{AA8E1541-7D85-4F75-963C-030DEE10BF8B}" dt="2025-04-22T07:45:40.497" v="3" actId="207"/>
+        <pc:sldMkLst>
+          <pc:docMk/>
+          <pc:sldMk cId="3850774780" sldId="537"/>
+        </pc:sldMkLst>
+        <pc:spChg chg="mod">
+          <ac:chgData name="Mohammed Fasha" userId="cc64f42d-a1a6-4f08-b97b-0c37f877119f" providerId="ADAL" clId="{AA8E1541-7D85-4F75-963C-030DEE10BF8B}" dt="2025-04-22T07:45:40.497" v="3" actId="207"/>
+          <ac:spMkLst>
+            <pc:docMk/>
+            <pc:sldMk cId="3850774780" sldId="537"/>
+            <ac:spMk id="3" creationId="{2244D89F-842A-A4E4-4DAE-391D823DD460}"/>
+          </ac:spMkLst>
+        </pc:spChg>
+      </pc:sldChg>
+      <pc:sldChg chg="modSp mod">
+        <pc:chgData name="Mohammed Fasha" userId="cc64f42d-a1a6-4f08-b97b-0c37f877119f" providerId="ADAL" clId="{AA8E1541-7D85-4F75-963C-030DEE10BF8B}" dt="2025-04-22T07:51:29.735" v="45" actId="113"/>
+        <pc:sldMkLst>
+          <pc:docMk/>
+          <pc:sldMk cId="535607353" sldId="539"/>
+        </pc:sldMkLst>
+        <pc:spChg chg="mod">
+          <ac:chgData name="Mohammed Fasha" userId="cc64f42d-a1a6-4f08-b97b-0c37f877119f" providerId="ADAL" clId="{AA8E1541-7D85-4F75-963C-030DEE10BF8B}" dt="2025-04-22T07:51:29.735" v="45" actId="113"/>
+          <ac:spMkLst>
+            <pc:docMk/>
+            <pc:sldMk cId="535607353" sldId="539"/>
+            <ac:spMk id="3" creationId="{35176D50-7DBE-74A7-C832-E8C7593B609A}"/>
+          </ac:spMkLst>
+        </pc:spChg>
+      </pc:sldChg>
+      <pc:sldChg chg="modSp del mod">
+        <pc:chgData name="Mohammed Fasha" userId="cc64f42d-a1a6-4f08-b97b-0c37f877119f" providerId="ADAL" clId="{AA8E1541-7D85-4F75-963C-030DEE10BF8B}" dt="2025-04-22T07:51:33.035" v="46" actId="2696"/>
+        <pc:sldMkLst>
+          <pc:docMk/>
+          <pc:sldMk cId="3049387189" sldId="541"/>
+        </pc:sldMkLst>
+        <pc:spChg chg="mod">
+          <ac:chgData name="Mohammed Fasha" userId="cc64f42d-a1a6-4f08-b97b-0c37f877119f" providerId="ADAL" clId="{AA8E1541-7D85-4F75-963C-030DEE10BF8B}" dt="2025-04-22T07:51:08.379" v="7" actId="21"/>
+          <ac:spMkLst>
+            <pc:docMk/>
+            <pc:sldMk cId="3049387189" sldId="541"/>
+            <ac:spMk id="3" creationId="{2977F580-A6AA-F5BD-3BB9-ED7F2E2DA031}"/>
+          </ac:spMkLst>
+        </pc:spChg>
+      </pc:sldChg>
+      <pc:sldChg chg="modSp mod">
+        <pc:chgData name="Mohammed Fasha" userId="cc64f42d-a1a6-4f08-b97b-0c37f877119f" providerId="ADAL" clId="{AA8E1541-7D85-4F75-963C-030DEE10BF8B}" dt="2025-04-22T07:51:42.388" v="47" actId="12"/>
+        <pc:sldMkLst>
+          <pc:docMk/>
+          <pc:sldMk cId="1726072780" sldId="542"/>
+        </pc:sldMkLst>
+        <pc:spChg chg="mod">
+          <ac:chgData name="Mohammed Fasha" userId="cc64f42d-a1a6-4f08-b97b-0c37f877119f" providerId="ADAL" clId="{AA8E1541-7D85-4F75-963C-030DEE10BF8B}" dt="2025-04-22T07:51:42.388" v="47" actId="12"/>
+          <ac:spMkLst>
+            <pc:docMk/>
+            <pc:sldMk cId="1726072780" sldId="542"/>
+            <ac:spMk id="3" creationId="{057A3ED1-0A19-9CDA-46C3-D3BBC2B481C3}"/>
+          </ac:spMkLst>
+        </pc:spChg>
+      </pc:sldChg>
+      <pc:sldChg chg="del">
+        <pc:chgData name="Mohammed Fasha" userId="cc64f42d-a1a6-4f08-b97b-0c37f877119f" providerId="ADAL" clId="{AA8E1541-7D85-4F75-963C-030DEE10BF8B}" dt="2025-04-22T07:52:08.571" v="48" actId="47"/>
+        <pc:sldMkLst>
+          <pc:docMk/>
+          <pc:sldMk cId="1046126438" sldId="543"/>
+        </pc:sldMkLst>
+      </pc:sldChg>
+      <pc:sldChg chg="modSp mod">
+        <pc:chgData name="Mohammed Fasha" userId="cc64f42d-a1a6-4f08-b97b-0c37f877119f" providerId="ADAL" clId="{AA8E1541-7D85-4F75-963C-030DEE10BF8B}" dt="2025-04-22T07:53:42.965" v="71" actId="207"/>
+        <pc:sldMkLst>
+          <pc:docMk/>
+          <pc:sldMk cId="2367421114" sldId="544"/>
+        </pc:sldMkLst>
+        <pc:spChg chg="mod">
+          <ac:chgData name="Mohammed Fasha" userId="cc64f42d-a1a6-4f08-b97b-0c37f877119f" providerId="ADAL" clId="{AA8E1541-7D85-4F75-963C-030DEE10BF8B}" dt="2025-04-22T07:53:42.965" v="71" actId="207"/>
+          <ac:spMkLst>
+            <pc:docMk/>
+            <pc:sldMk cId="2367421114" sldId="544"/>
+            <ac:spMk id="3" creationId="{B1CA823B-EFCF-52EE-7B6D-C87B19D4D1AD}"/>
+          </ac:spMkLst>
+        </pc:spChg>
+      </pc:sldChg>
+      <pc:sldChg chg="modSp mod">
+        <pc:chgData name="Mohammed Fasha" userId="cc64f42d-a1a6-4f08-b97b-0c37f877119f" providerId="ADAL" clId="{AA8E1541-7D85-4F75-963C-030DEE10BF8B}" dt="2025-04-22T07:53:50.508" v="72" actId="207"/>
+        <pc:sldMkLst>
+          <pc:docMk/>
+          <pc:sldMk cId="2873219672" sldId="545"/>
+        </pc:sldMkLst>
+        <pc:spChg chg="mod">
+          <ac:chgData name="Mohammed Fasha" userId="cc64f42d-a1a6-4f08-b97b-0c37f877119f" providerId="ADAL" clId="{AA8E1541-7D85-4F75-963C-030DEE10BF8B}" dt="2025-04-22T07:53:50.508" v="72" actId="207"/>
+          <ac:spMkLst>
+            <pc:docMk/>
+            <pc:sldMk cId="2873219672" sldId="545"/>
+            <ac:spMk id="3" creationId="{3506EBC8-A8EF-0FFA-8A82-7C36F13B9B3A}"/>
+          </ac:spMkLst>
+        </pc:spChg>
+      </pc:sldChg>
+      <pc:sldChg chg="modSp mod">
+        <pc:chgData name="Mohammed Fasha" userId="cc64f42d-a1a6-4f08-b97b-0c37f877119f" providerId="ADAL" clId="{AA8E1541-7D85-4F75-963C-030DEE10BF8B}" dt="2025-04-22T07:54:24.120" v="74" actId="14734"/>
+        <pc:sldMkLst>
+          <pc:docMk/>
+          <pc:sldMk cId="3792898422" sldId="549"/>
+        </pc:sldMkLst>
+        <pc:graphicFrameChg chg="modGraphic">
+          <ac:chgData name="Mohammed Fasha" userId="cc64f42d-a1a6-4f08-b97b-0c37f877119f" providerId="ADAL" clId="{AA8E1541-7D85-4F75-963C-030DEE10BF8B}" dt="2025-04-22T07:54:24.120" v="74" actId="14734"/>
+          <ac:graphicFrameMkLst>
+            <pc:docMk/>
+            <pc:sldMk cId="3792898422" sldId="549"/>
+            <ac:graphicFrameMk id="4" creationId="{23784DCA-38B3-2B08-C761-B38A9BE7C30C}"/>
+          </ac:graphicFrameMkLst>
+        </pc:graphicFrameChg>
+      </pc:sldChg>
+      <pc:sldChg chg="modSp mod">
+        <pc:chgData name="Mohammed Fasha" userId="cc64f42d-a1a6-4f08-b97b-0c37f877119f" providerId="ADAL" clId="{AA8E1541-7D85-4F75-963C-030DEE10BF8B}" dt="2025-04-22T07:54:34.927" v="75" actId="207"/>
+        <pc:sldMkLst>
+          <pc:docMk/>
+          <pc:sldMk cId="1904661062" sldId="550"/>
+        </pc:sldMkLst>
+        <pc:spChg chg="mod">
+          <ac:chgData name="Mohammed Fasha" userId="cc64f42d-a1a6-4f08-b97b-0c37f877119f" providerId="ADAL" clId="{AA8E1541-7D85-4F75-963C-030DEE10BF8B}" dt="2025-04-22T07:54:34.927" v="75" actId="207"/>
+          <ac:spMkLst>
+            <pc:docMk/>
+            <pc:sldMk cId="1904661062" sldId="550"/>
+            <ac:spMk id="3" creationId="{3931397A-7788-D1BD-366C-19C0F6CB7739}"/>
+          </ac:spMkLst>
+        </pc:spChg>
+      </pc:sldChg>
+      <pc:sldChg chg="modSp mod">
+        <pc:chgData name="Mohammed Fasha" userId="cc64f42d-a1a6-4f08-b97b-0c37f877119f" providerId="ADAL" clId="{AA8E1541-7D85-4F75-963C-030DEE10BF8B}" dt="2025-04-22T07:54:42.330" v="76" actId="207"/>
+        <pc:sldMkLst>
+          <pc:docMk/>
+          <pc:sldMk cId="1778249791" sldId="551"/>
+        </pc:sldMkLst>
+        <pc:spChg chg="mod">
+          <ac:chgData name="Mohammed Fasha" userId="cc64f42d-a1a6-4f08-b97b-0c37f877119f" providerId="ADAL" clId="{AA8E1541-7D85-4F75-963C-030DEE10BF8B}" dt="2025-04-22T07:54:42.330" v="76" actId="207"/>
+          <ac:spMkLst>
+            <pc:docMk/>
+            <pc:sldMk cId="1778249791" sldId="551"/>
+            <ac:spMk id="3" creationId="{81ECA7CD-91EE-5722-4174-C950F2B8D0A8}"/>
+          </ac:spMkLst>
+        </pc:spChg>
+      </pc:sldChg>
+      <pc:sldChg chg="modSp mod">
+        <pc:chgData name="Mohammed Fasha" userId="cc64f42d-a1a6-4f08-b97b-0c37f877119f" providerId="ADAL" clId="{AA8E1541-7D85-4F75-963C-030DEE10BF8B}" dt="2025-04-22T07:54:51.255" v="77" actId="207"/>
+        <pc:sldMkLst>
+          <pc:docMk/>
+          <pc:sldMk cId="3613121118" sldId="552"/>
+        </pc:sldMkLst>
+        <pc:spChg chg="mod">
+          <ac:chgData name="Mohammed Fasha" userId="cc64f42d-a1a6-4f08-b97b-0c37f877119f" providerId="ADAL" clId="{AA8E1541-7D85-4F75-963C-030DEE10BF8B}" dt="2025-04-22T07:54:51.255" v="77" actId="207"/>
+          <ac:spMkLst>
+            <pc:docMk/>
+            <pc:sldMk cId="3613121118" sldId="552"/>
+            <ac:spMk id="3" creationId="{C08BBBCF-DECF-94E6-0D26-5AFDEA6C3095}"/>
+          </ac:spMkLst>
+        </pc:spChg>
+      </pc:sldChg>
+      <pc:sldChg chg="modSp mod">
+        <pc:chgData name="Mohammed Fasha" userId="cc64f42d-a1a6-4f08-b97b-0c37f877119f" providerId="ADAL" clId="{AA8E1541-7D85-4F75-963C-030DEE10BF8B}" dt="2025-04-22T07:54:59.843" v="78" actId="207"/>
+        <pc:sldMkLst>
+          <pc:docMk/>
+          <pc:sldMk cId="1591255543" sldId="553"/>
+        </pc:sldMkLst>
+        <pc:spChg chg="mod">
+          <ac:chgData name="Mohammed Fasha" userId="cc64f42d-a1a6-4f08-b97b-0c37f877119f" providerId="ADAL" clId="{AA8E1541-7D85-4F75-963C-030DEE10BF8B}" dt="2025-04-22T07:54:59.843" v="78" actId="207"/>
+          <ac:spMkLst>
+            <pc:docMk/>
+            <pc:sldMk cId="1591255543" sldId="553"/>
+            <ac:spMk id="3" creationId="{8BEDF79E-A50F-D475-FE47-442C2C6614AD}"/>
+          </ac:spMkLst>
+        </pc:spChg>
+      </pc:sldChg>
+      <pc:sldChg chg="modSp mod">
+        <pc:chgData name="Mohammed Fasha" userId="cc64f42d-a1a6-4f08-b97b-0c37f877119f" providerId="ADAL" clId="{AA8E1541-7D85-4F75-963C-030DEE10BF8B}" dt="2025-04-22T07:55:05.629" v="79" actId="14734"/>
+        <pc:sldMkLst>
+          <pc:docMk/>
+          <pc:sldMk cId="1163823271" sldId="554"/>
+        </pc:sldMkLst>
+        <pc:graphicFrameChg chg="modGraphic">
+          <ac:chgData name="Mohammed Fasha" userId="cc64f42d-a1a6-4f08-b97b-0c37f877119f" providerId="ADAL" clId="{AA8E1541-7D85-4F75-963C-030DEE10BF8B}" dt="2025-04-22T07:55:05.629" v="79" actId="14734"/>
+          <ac:graphicFrameMkLst>
+            <pc:docMk/>
+            <pc:sldMk cId="1163823271" sldId="554"/>
+            <ac:graphicFrameMk id="4" creationId="{12750FDE-A73F-F19F-19CA-43E01D9D1185}"/>
+          </ac:graphicFrameMkLst>
+        </pc:graphicFrameChg>
+      </pc:sldChg>
+      <pc:sldChg chg="modSp mod">
+        <pc:chgData name="Mohammed Fasha" userId="cc64f42d-a1a6-4f08-b97b-0c37f877119f" providerId="ADAL" clId="{AA8E1541-7D85-4F75-963C-030DEE10BF8B}" dt="2025-04-22T07:56:23.220" v="84" actId="14734"/>
+        <pc:sldMkLst>
+          <pc:docMk/>
+          <pc:sldMk cId="880183050" sldId="558"/>
+        </pc:sldMkLst>
+        <pc:graphicFrameChg chg="modGraphic">
+          <ac:chgData name="Mohammed Fasha" userId="cc64f42d-a1a6-4f08-b97b-0c37f877119f" providerId="ADAL" clId="{AA8E1541-7D85-4F75-963C-030DEE10BF8B}" dt="2025-04-22T07:56:23.220" v="84" actId="14734"/>
+          <ac:graphicFrameMkLst>
+            <pc:docMk/>
+            <pc:sldMk cId="880183050" sldId="558"/>
+            <ac:graphicFrameMk id="4" creationId="{7BA51BA0-5C76-EDD2-6206-D20B9ECBEFC7}"/>
+          </ac:graphicFrameMkLst>
+        </pc:graphicFrameChg>
+      </pc:sldChg>
+      <pc:sldChg chg="modSp mod">
+        <pc:chgData name="Mohammed Fasha" userId="cc64f42d-a1a6-4f08-b97b-0c37f877119f" providerId="ADAL" clId="{AA8E1541-7D85-4F75-963C-030DEE10BF8B}" dt="2025-04-22T07:59:24.161" v="101" actId="14100"/>
+        <pc:sldMkLst>
+          <pc:docMk/>
+          <pc:sldMk cId="3113957299" sldId="559"/>
+        </pc:sldMkLst>
+        <pc:spChg chg="mod">
+          <ac:chgData name="Mohammed Fasha" userId="cc64f42d-a1a6-4f08-b97b-0c37f877119f" providerId="ADAL" clId="{AA8E1541-7D85-4F75-963C-030DEE10BF8B}" dt="2025-04-22T07:59:24.161" v="101" actId="14100"/>
+          <ac:spMkLst>
+            <pc:docMk/>
+            <pc:sldMk cId="3113957299" sldId="559"/>
+            <ac:spMk id="3" creationId="{1A56C2B4-2D7E-D580-361E-CAF6480A3BAB}"/>
+          </ac:spMkLst>
+        </pc:spChg>
+      </pc:sldChg>
+      <pc:sldChg chg="modSp mod">
+        <pc:chgData name="Mohammed Fasha" userId="cc64f42d-a1a6-4f08-b97b-0c37f877119f" providerId="ADAL" clId="{AA8E1541-7D85-4F75-963C-030DEE10BF8B}" dt="2025-04-22T07:58:15.052" v="90"/>
+        <pc:sldMkLst>
+          <pc:docMk/>
+          <pc:sldMk cId="1318437956" sldId="560"/>
+        </pc:sldMkLst>
+        <pc:spChg chg="mod">
+          <ac:chgData name="Mohammed Fasha" userId="cc64f42d-a1a6-4f08-b97b-0c37f877119f" providerId="ADAL" clId="{AA8E1541-7D85-4F75-963C-030DEE10BF8B}" dt="2025-04-22T07:58:15.052" v="90"/>
+          <ac:spMkLst>
+            <pc:docMk/>
+            <pc:sldMk cId="1318437956" sldId="560"/>
+            <ac:spMk id="3" creationId="{673D1EE1-2197-35B0-A405-8D13FBCC1244}"/>
+          </ac:spMkLst>
+        </pc:spChg>
+      </pc:sldChg>
+      <pc:sldChg chg="modSp mod">
+        <pc:chgData name="Mohammed Fasha" userId="cc64f42d-a1a6-4f08-b97b-0c37f877119f" providerId="ADAL" clId="{AA8E1541-7D85-4F75-963C-030DEE10BF8B}" dt="2025-04-22T08:00:24.116" v="102" actId="207"/>
+        <pc:sldMkLst>
+          <pc:docMk/>
+          <pc:sldMk cId="3428783325" sldId="561"/>
+        </pc:sldMkLst>
+        <pc:spChg chg="mod">
+          <ac:chgData name="Mohammed Fasha" userId="cc64f42d-a1a6-4f08-b97b-0c37f877119f" providerId="ADAL" clId="{AA8E1541-7D85-4F75-963C-030DEE10BF8B}" dt="2025-04-22T08:00:24.116" v="102" actId="207"/>
+          <ac:spMkLst>
+            <pc:docMk/>
+            <pc:sldMk cId="3428783325" sldId="561"/>
+            <ac:spMk id="3" creationId="{853D8809-DD8C-D409-4749-7973F58CB9F9}"/>
+          </ac:spMkLst>
+        </pc:spChg>
+      </pc:sldChg>
+      <pc:sldChg chg="modSp mod">
+        <pc:chgData name="Mohammed Fasha" userId="cc64f42d-a1a6-4f08-b97b-0c37f877119f" providerId="ADAL" clId="{AA8E1541-7D85-4F75-963C-030DEE10BF8B}" dt="2025-04-22T08:00:31.553" v="103" actId="207"/>
+        <pc:sldMkLst>
+          <pc:docMk/>
+          <pc:sldMk cId="2026840369" sldId="562"/>
+        </pc:sldMkLst>
+        <pc:spChg chg="mod">
+          <ac:chgData name="Mohammed Fasha" userId="cc64f42d-a1a6-4f08-b97b-0c37f877119f" providerId="ADAL" clId="{AA8E1541-7D85-4F75-963C-030DEE10BF8B}" dt="2025-04-22T08:00:31.553" v="103" actId="207"/>
+          <ac:spMkLst>
+            <pc:docMk/>
+            <pc:sldMk cId="2026840369" sldId="562"/>
+            <ac:spMk id="3" creationId="{0DFF4ABB-D621-AFCC-44B1-ADD467B27876}"/>
+          </ac:spMkLst>
+        </pc:spChg>
+      </pc:sldChg>
+      <pc:sldChg chg="modSp mod">
+        <pc:chgData name="Mohammed Fasha" userId="cc64f42d-a1a6-4f08-b97b-0c37f877119f" providerId="ADAL" clId="{AA8E1541-7D85-4F75-963C-030DEE10BF8B}" dt="2025-04-22T08:00:36.024" v="104" actId="14734"/>
+        <pc:sldMkLst>
+          <pc:docMk/>
+          <pc:sldMk cId="111678867" sldId="563"/>
+        </pc:sldMkLst>
+        <pc:graphicFrameChg chg="modGraphic">
+          <ac:chgData name="Mohammed Fasha" userId="cc64f42d-a1a6-4f08-b97b-0c37f877119f" providerId="ADAL" clId="{AA8E1541-7D85-4F75-963C-030DEE10BF8B}" dt="2025-04-22T08:00:36.024" v="104" actId="14734"/>
+          <ac:graphicFrameMkLst>
+            <pc:docMk/>
+            <pc:sldMk cId="111678867" sldId="563"/>
+            <ac:graphicFrameMk id="4" creationId="{F1DF050B-ABED-3F60-93D9-0CA27BFBA435}"/>
+          </ac:graphicFrameMkLst>
+        </pc:graphicFrameChg>
+      </pc:sldChg>
+      <pc:sldChg chg="modSp mod">
+        <pc:chgData name="Mohammed Fasha" userId="cc64f42d-a1a6-4f08-b97b-0c37f877119f" providerId="ADAL" clId="{AA8E1541-7D85-4F75-963C-030DEE10BF8B}" dt="2025-04-22T08:00:47.060" v="105" actId="207"/>
+        <pc:sldMkLst>
+          <pc:docMk/>
+          <pc:sldMk cId="488425355" sldId="568"/>
+        </pc:sldMkLst>
+        <pc:spChg chg="mod">
+          <ac:chgData name="Mohammed Fasha" userId="cc64f42d-a1a6-4f08-b97b-0c37f877119f" providerId="ADAL" clId="{AA8E1541-7D85-4F75-963C-030DEE10BF8B}" dt="2025-04-22T08:00:47.060" v="105" actId="207"/>
+          <ac:spMkLst>
+            <pc:docMk/>
+            <pc:sldMk cId="488425355" sldId="568"/>
+            <ac:spMk id="3" creationId="{6580A05C-C7C5-F3B9-BEA1-C2E51FBD2E9F}"/>
+          </ac:spMkLst>
+        </pc:spChg>
+      </pc:sldChg>
+      <pc:sldChg chg="modSp mod">
+        <pc:chgData name="Mohammed Fasha" userId="cc64f42d-a1a6-4f08-b97b-0c37f877119f" providerId="ADAL" clId="{AA8E1541-7D85-4F75-963C-030DEE10BF8B}" dt="2025-04-22T08:00:51.790" v="106" actId="207"/>
+        <pc:sldMkLst>
+          <pc:docMk/>
+          <pc:sldMk cId="2124297065" sldId="569"/>
+        </pc:sldMkLst>
+        <pc:spChg chg="mod">
+          <ac:chgData name="Mohammed Fasha" userId="cc64f42d-a1a6-4f08-b97b-0c37f877119f" providerId="ADAL" clId="{AA8E1541-7D85-4F75-963C-030DEE10BF8B}" dt="2025-04-22T08:00:51.790" v="106" actId="207"/>
+          <ac:spMkLst>
+            <pc:docMk/>
+            <pc:sldMk cId="2124297065" sldId="569"/>
+            <ac:spMk id="3" creationId="{4A54A31D-544D-A99D-641E-58D250801357}"/>
+          </ac:spMkLst>
+        </pc:spChg>
+      </pc:sldChg>
+      <pc:sldChg chg="modSp mod">
+        <pc:chgData name="Mohammed Fasha" userId="cc64f42d-a1a6-4f08-b97b-0c37f877119f" providerId="ADAL" clId="{AA8E1541-7D85-4F75-963C-030DEE10BF8B}" dt="2025-04-22T08:00:58.379" v="108" actId="207"/>
+        <pc:sldMkLst>
+          <pc:docMk/>
+          <pc:sldMk cId="344335387" sldId="570"/>
+        </pc:sldMkLst>
+        <pc:spChg chg="mod">
+          <ac:chgData name="Mohammed Fasha" userId="cc64f42d-a1a6-4f08-b97b-0c37f877119f" providerId="ADAL" clId="{AA8E1541-7D85-4F75-963C-030DEE10BF8B}" dt="2025-04-22T08:00:58.379" v="108" actId="207"/>
+          <ac:spMkLst>
+            <pc:docMk/>
+            <pc:sldMk cId="344335387" sldId="570"/>
+            <ac:spMk id="3" creationId="{37C60482-1B39-21CC-767E-C45C947FAAED}"/>
+          </ac:spMkLst>
+        </pc:spChg>
+      </pc:sldChg>
+      <pc:sldChg chg="modSp mod">
+        <pc:chgData name="Mohammed Fasha" userId="cc64f42d-a1a6-4f08-b97b-0c37f877119f" providerId="ADAL" clId="{AA8E1541-7D85-4F75-963C-030DEE10BF8B}" dt="2025-04-22T08:01:03.082" v="109" actId="207"/>
+        <pc:sldMkLst>
+          <pc:docMk/>
+          <pc:sldMk cId="1008267675" sldId="571"/>
+        </pc:sldMkLst>
+        <pc:spChg chg="mod">
+          <ac:chgData name="Mohammed Fasha" userId="cc64f42d-a1a6-4f08-b97b-0c37f877119f" providerId="ADAL" clId="{AA8E1541-7D85-4F75-963C-030DEE10BF8B}" dt="2025-04-22T08:01:03.082" v="109" actId="207"/>
+          <ac:spMkLst>
+            <pc:docMk/>
+            <pc:sldMk cId="1008267675" sldId="571"/>
+            <ac:spMk id="3" creationId="{68D40757-D97E-0281-CE26-E181AB48FEC5}"/>
+          </ac:spMkLst>
+        </pc:spChg>
+      </pc:sldChg>
+      <pc:sldChg chg="modSp mod">
+        <pc:chgData name="Mohammed Fasha" userId="cc64f42d-a1a6-4f08-b97b-0c37f877119f" providerId="ADAL" clId="{AA8E1541-7D85-4F75-963C-030DEE10BF8B}" dt="2025-04-22T08:01:10.568" v="111" actId="207"/>
+        <pc:sldMkLst>
+          <pc:docMk/>
+          <pc:sldMk cId="2977344403" sldId="572"/>
+        </pc:sldMkLst>
+        <pc:spChg chg="mod">
+          <ac:chgData name="Mohammed Fasha" userId="cc64f42d-a1a6-4f08-b97b-0c37f877119f" providerId="ADAL" clId="{AA8E1541-7D85-4F75-963C-030DEE10BF8B}" dt="2025-04-22T08:01:10.568" v="111" actId="207"/>
+          <ac:spMkLst>
+            <pc:docMk/>
+            <pc:sldMk cId="2977344403" sldId="572"/>
+            <ac:spMk id="3" creationId="{F63A4F31-921C-E625-7832-C25B5E62CB9E}"/>
+          </ac:spMkLst>
+        </pc:spChg>
+      </pc:sldChg>
+      <pc:sldChg chg="modSp mod">
+        <pc:chgData name="Mohammed Fasha" userId="cc64f42d-a1a6-4f08-b97b-0c37f877119f" providerId="ADAL" clId="{AA8E1541-7D85-4F75-963C-030DEE10BF8B}" dt="2025-04-22T08:01:27.087" v="114" actId="207"/>
+        <pc:sldMkLst>
+          <pc:docMk/>
+          <pc:sldMk cId="1176656988" sldId="575"/>
+        </pc:sldMkLst>
+        <pc:spChg chg="mod">
+          <ac:chgData name="Mohammed Fasha" userId="cc64f42d-a1a6-4f08-b97b-0c37f877119f" providerId="ADAL" clId="{AA8E1541-7D85-4F75-963C-030DEE10BF8B}" dt="2025-04-22T08:01:27.087" v="114" actId="207"/>
+          <ac:spMkLst>
+            <pc:docMk/>
+            <pc:sldMk cId="1176656988" sldId="575"/>
+            <ac:spMk id="3" creationId="{3A09DED4-E2C1-1400-4A70-68E68FEF0295}"/>
+          </ac:spMkLst>
+        </pc:spChg>
+      </pc:sldChg>
+      <pc:sldChg chg="modSp mod">
+        <pc:chgData name="Mohammed Fasha" userId="cc64f42d-a1a6-4f08-b97b-0c37f877119f" providerId="ADAL" clId="{AA8E1541-7D85-4F75-963C-030DEE10BF8B}" dt="2025-04-22T08:01:16.849" v="113" actId="179"/>
+        <pc:sldMkLst>
+          <pc:docMk/>
+          <pc:sldMk cId="1672592268" sldId="576"/>
+        </pc:sldMkLst>
+        <pc:spChg chg="mod">
+          <ac:chgData name="Mohammed Fasha" userId="cc64f42d-a1a6-4f08-b97b-0c37f877119f" providerId="ADAL" clId="{AA8E1541-7D85-4F75-963C-030DEE10BF8B}" dt="2025-04-22T08:01:16.849" v="113" actId="179"/>
+          <ac:spMkLst>
+            <pc:docMk/>
+            <pc:sldMk cId="1672592268" sldId="576"/>
+            <ac:spMk id="3" creationId="{7ADE36ED-35BC-1B75-8089-290FB1243629}"/>
+          </ac:spMkLst>
+        </pc:spChg>
+      </pc:sldChg>
+      <pc:sldChg chg="modSp mod">
+        <pc:chgData name="Mohammed Fasha" userId="cc64f42d-a1a6-4f08-b97b-0c37f877119f" providerId="ADAL" clId="{AA8E1541-7D85-4F75-963C-030DEE10BF8B}" dt="2025-04-22T08:01:30.446" v="115" actId="14734"/>
+        <pc:sldMkLst>
+          <pc:docMk/>
+          <pc:sldMk cId="3540067521" sldId="577"/>
+        </pc:sldMkLst>
+        <pc:graphicFrameChg chg="modGraphic">
+          <ac:chgData name="Mohammed Fasha" userId="cc64f42d-a1a6-4f08-b97b-0c37f877119f" providerId="ADAL" clId="{AA8E1541-7D85-4F75-963C-030DEE10BF8B}" dt="2025-04-22T08:01:30.446" v="115" actId="14734"/>
+          <ac:graphicFrameMkLst>
+            <pc:docMk/>
+            <pc:sldMk cId="3540067521" sldId="577"/>
+            <ac:graphicFrameMk id="4" creationId="{8CAAF197-B910-33E4-9D68-4372C6CA4E1C}"/>
+          </ac:graphicFrameMkLst>
+        </pc:graphicFrameChg>
+      </pc:sldChg>
+      <pc:sldChg chg="modSp mod">
+        <pc:chgData name="Mohammed Fasha" userId="cc64f42d-a1a6-4f08-b97b-0c37f877119f" providerId="ADAL" clId="{AA8E1541-7D85-4F75-963C-030DEE10BF8B}" dt="2025-04-22T08:01:34.088" v="116" actId="207"/>
+        <pc:sldMkLst>
+          <pc:docMk/>
+          <pc:sldMk cId="1268903903" sldId="578"/>
+        </pc:sldMkLst>
+        <pc:spChg chg="mod">
+          <ac:chgData name="Mohammed Fasha" userId="cc64f42d-a1a6-4f08-b97b-0c37f877119f" providerId="ADAL" clId="{AA8E1541-7D85-4F75-963C-030DEE10BF8B}" dt="2025-04-22T08:01:34.088" v="116" actId="207"/>
+          <ac:spMkLst>
+            <pc:docMk/>
+            <pc:sldMk cId="1268903903" sldId="578"/>
+            <ac:spMk id="3" creationId="{0F15A2FC-6496-2FF9-75EF-BBC4343E6164}"/>
+          </ac:spMkLst>
+        </pc:spChg>
+      </pc:sldChg>
+      <pc:sldChg chg="modSp mod">
+        <pc:chgData name="Mohammed Fasha" userId="cc64f42d-a1a6-4f08-b97b-0c37f877119f" providerId="ADAL" clId="{AA8E1541-7D85-4F75-963C-030DEE10BF8B}" dt="2025-04-22T08:01:38.262" v="117" actId="207"/>
+        <pc:sldMkLst>
+          <pc:docMk/>
+          <pc:sldMk cId="1025754460" sldId="579"/>
+        </pc:sldMkLst>
+        <pc:spChg chg="mod">
+          <ac:chgData name="Mohammed Fasha" userId="cc64f42d-a1a6-4f08-b97b-0c37f877119f" providerId="ADAL" clId="{AA8E1541-7D85-4F75-963C-030DEE10BF8B}" dt="2025-04-22T08:01:38.262" v="117" actId="207"/>
+          <ac:spMkLst>
+            <pc:docMk/>
+            <pc:sldMk cId="1025754460" sldId="579"/>
+            <ac:spMk id="3" creationId="{2236DE9C-4D85-E3DC-43C8-8B131CBE840C}"/>
+          </ac:spMkLst>
+        </pc:spChg>
+      </pc:sldChg>
+      <pc:sldChg chg="modSp mod">
+        <pc:chgData name="Mohammed Fasha" userId="cc64f42d-a1a6-4f08-b97b-0c37f877119f" providerId="ADAL" clId="{AA8E1541-7D85-4F75-963C-030DEE10BF8B}" dt="2025-04-22T08:01:41.670" v="118" actId="207"/>
+        <pc:sldMkLst>
+          <pc:docMk/>
+          <pc:sldMk cId="3611954685" sldId="580"/>
+        </pc:sldMkLst>
+        <pc:spChg chg="mod">
+          <ac:chgData name="Mohammed Fasha" userId="cc64f42d-a1a6-4f08-b97b-0c37f877119f" providerId="ADAL" clId="{AA8E1541-7D85-4F75-963C-030DEE10BF8B}" dt="2025-04-22T08:01:41.670" v="118" actId="207"/>
+          <ac:spMkLst>
+            <pc:docMk/>
+            <pc:sldMk cId="3611954685" sldId="580"/>
+            <ac:spMk id="3" creationId="{8A0620E7-825B-690B-7DD6-4C1E2083CEA6}"/>
+          </ac:spMkLst>
+        </pc:spChg>
+      </pc:sldChg>
+      <pc:sldChg chg="modSp mod">
+        <pc:chgData name="Mohammed Fasha" userId="cc64f42d-a1a6-4f08-b97b-0c37f877119f" providerId="ADAL" clId="{AA8E1541-7D85-4F75-963C-030DEE10BF8B}" dt="2025-04-22T08:01:45.542" v="119" actId="207"/>
+        <pc:sldMkLst>
+          <pc:docMk/>
+          <pc:sldMk cId="3913947880" sldId="581"/>
+        </pc:sldMkLst>
+        <pc:spChg chg="mod">
+          <ac:chgData name="Mohammed Fasha" userId="cc64f42d-a1a6-4f08-b97b-0c37f877119f" providerId="ADAL" clId="{AA8E1541-7D85-4F75-963C-030DEE10BF8B}" dt="2025-04-22T08:01:45.542" v="119" actId="207"/>
+          <ac:spMkLst>
+            <pc:docMk/>
+            <pc:sldMk cId="3913947880" sldId="581"/>
+            <ac:spMk id="3" creationId="{0FAFC4FB-8C13-BE21-B8AE-9333BA5E385E}"/>
+          </ac:spMkLst>
+        </pc:spChg>
+      </pc:sldChg>
+      <pc:sldChg chg="modSp mod">
+        <pc:chgData name="Mohammed Fasha" userId="cc64f42d-a1a6-4f08-b97b-0c37f877119f" providerId="ADAL" clId="{AA8E1541-7D85-4F75-963C-030DEE10BF8B}" dt="2025-04-22T08:01:49.131" v="120" actId="207"/>
+        <pc:sldMkLst>
+          <pc:docMk/>
+          <pc:sldMk cId="1910666289" sldId="582"/>
+        </pc:sldMkLst>
+        <pc:spChg chg="mod">
+          <ac:chgData name="Mohammed Fasha" userId="cc64f42d-a1a6-4f08-b97b-0c37f877119f" providerId="ADAL" clId="{AA8E1541-7D85-4F75-963C-030DEE10BF8B}" dt="2025-04-22T08:01:49.131" v="120" actId="207"/>
+          <ac:spMkLst>
+            <pc:docMk/>
+            <pc:sldMk cId="1910666289" sldId="582"/>
+            <ac:spMk id="3" creationId="{D76E880E-800D-79F6-2A8C-D0ADF36C921F}"/>
+          </ac:spMkLst>
+        </pc:spChg>
+      </pc:sldChg>
+      <pc:sldChg chg="modSp mod">
+        <pc:chgData name="Mohammed Fasha" userId="cc64f42d-a1a6-4f08-b97b-0c37f877119f" providerId="ADAL" clId="{AA8E1541-7D85-4F75-963C-030DEE10BF8B}" dt="2025-04-22T08:01:52.718" v="121" actId="14734"/>
+        <pc:sldMkLst>
+          <pc:docMk/>
+          <pc:sldMk cId="2077761126" sldId="583"/>
+        </pc:sldMkLst>
+        <pc:graphicFrameChg chg="modGraphic">
+          <ac:chgData name="Mohammed Fasha" userId="cc64f42d-a1a6-4f08-b97b-0c37f877119f" providerId="ADAL" clId="{AA8E1541-7D85-4F75-963C-030DEE10BF8B}" dt="2025-04-22T08:01:52.718" v="121" actId="14734"/>
+          <ac:graphicFrameMkLst>
+            <pc:docMk/>
+            <pc:sldMk cId="2077761126" sldId="583"/>
+            <ac:graphicFrameMk id="4" creationId="{F19070A2-3390-CFD9-BF80-E72F4A69E43C}"/>
+          </ac:graphicFrameMkLst>
+        </pc:graphicFrameChg>
+      </pc:sldChg>
+      <pc:sldChg chg="modSp mod">
+        <pc:chgData name="Mohammed Fasha" userId="cc64f42d-a1a6-4f08-b97b-0c37f877119f" providerId="ADAL" clId="{AA8E1541-7D85-4F75-963C-030DEE10BF8B}" dt="2025-04-22T08:01:58.911" v="122" actId="14734"/>
+        <pc:sldMkLst>
+          <pc:docMk/>
+          <pc:sldMk cId="1822846115" sldId="586"/>
+        </pc:sldMkLst>
+        <pc:graphicFrameChg chg="modGraphic">
+          <ac:chgData name="Mohammed Fasha" userId="cc64f42d-a1a6-4f08-b97b-0c37f877119f" providerId="ADAL" clId="{AA8E1541-7D85-4F75-963C-030DEE10BF8B}" dt="2025-04-22T08:01:58.911" v="122" actId="14734"/>
+          <ac:graphicFrameMkLst>
+            <pc:docMk/>
+            <pc:sldMk cId="1822846115" sldId="586"/>
+            <ac:graphicFrameMk id="4" creationId="{96711436-FA86-8F77-1D15-1949D7468A83}"/>
+          </ac:graphicFrameMkLst>
+        </pc:graphicFrameChg>
+      </pc:sldChg>
+      <pc:sldChg chg="modSp mod">
+        <pc:chgData name="Mohammed Fasha" userId="cc64f42d-a1a6-4f08-b97b-0c37f877119f" providerId="ADAL" clId="{AA8E1541-7D85-4F75-963C-030DEE10BF8B}" dt="2025-04-22T08:02:03.672" v="123" actId="207"/>
+        <pc:sldMkLst>
+          <pc:docMk/>
+          <pc:sldMk cId="1196054167" sldId="587"/>
+        </pc:sldMkLst>
+        <pc:spChg chg="mod">
+          <ac:chgData name="Mohammed Fasha" userId="cc64f42d-a1a6-4f08-b97b-0c37f877119f" providerId="ADAL" clId="{AA8E1541-7D85-4F75-963C-030DEE10BF8B}" dt="2025-04-22T08:02:03.672" v="123" actId="207"/>
+          <ac:spMkLst>
+            <pc:docMk/>
+            <pc:sldMk cId="1196054167" sldId="587"/>
+            <ac:spMk id="3" creationId="{FA755082-70DA-3D50-1613-A4A6723FED1F}"/>
+          </ac:spMkLst>
+        </pc:spChg>
+      </pc:sldChg>
+      <pc:sldChg chg="modSp mod">
+        <pc:chgData name="Mohammed Fasha" userId="cc64f42d-a1a6-4f08-b97b-0c37f877119f" providerId="ADAL" clId="{AA8E1541-7D85-4F75-963C-030DEE10BF8B}" dt="2025-04-22T08:02:06.739" v="124" actId="207"/>
+        <pc:sldMkLst>
+          <pc:docMk/>
+          <pc:sldMk cId="313857250" sldId="588"/>
+        </pc:sldMkLst>
+        <pc:spChg chg="mod">
+          <ac:chgData name="Mohammed Fasha" userId="cc64f42d-a1a6-4f08-b97b-0c37f877119f" providerId="ADAL" clId="{AA8E1541-7D85-4F75-963C-030DEE10BF8B}" dt="2025-04-22T08:02:06.739" v="124" actId="207"/>
+          <ac:spMkLst>
+            <pc:docMk/>
+            <pc:sldMk cId="313857250" sldId="588"/>
+            <ac:spMk id="3" creationId="{B6929E43-3F39-A0AB-4FE3-2DF99D72D64C}"/>
+          </ac:spMkLst>
+        </pc:spChg>
+      </pc:sldChg>
+      <pc:sldChg chg="modSp mod">
+        <pc:chgData name="Mohammed Fasha" userId="cc64f42d-a1a6-4f08-b97b-0c37f877119f" providerId="ADAL" clId="{AA8E1541-7D85-4F75-963C-030DEE10BF8B}" dt="2025-04-22T08:02:10.544" v="125" actId="207"/>
+        <pc:sldMkLst>
+          <pc:docMk/>
+          <pc:sldMk cId="3248123203" sldId="589"/>
+        </pc:sldMkLst>
+        <pc:spChg chg="mod">
+          <ac:chgData name="Mohammed Fasha" userId="cc64f42d-a1a6-4f08-b97b-0c37f877119f" providerId="ADAL" clId="{AA8E1541-7D85-4F75-963C-030DEE10BF8B}" dt="2025-04-22T08:02:10.544" v="125" actId="207"/>
+          <ac:spMkLst>
+            <pc:docMk/>
+            <pc:sldMk cId="3248123203" sldId="589"/>
+            <ac:spMk id="3" creationId="{417A66EB-C59D-A890-3002-548F60050969}"/>
+          </ac:spMkLst>
+        </pc:spChg>
+      </pc:sldChg>
+      <pc:sldChg chg="modSp mod">
+        <pc:chgData name="Mohammed Fasha" userId="cc64f42d-a1a6-4f08-b97b-0c37f877119f" providerId="ADAL" clId="{AA8E1541-7D85-4F75-963C-030DEE10BF8B}" dt="2025-04-22T08:02:13.290" v="126" actId="207"/>
+        <pc:sldMkLst>
+          <pc:docMk/>
+          <pc:sldMk cId="2710591063" sldId="590"/>
+        </pc:sldMkLst>
+        <pc:spChg chg="mod">
+          <ac:chgData name="Mohammed Fasha" userId="cc64f42d-a1a6-4f08-b97b-0c37f877119f" providerId="ADAL" clId="{AA8E1541-7D85-4F75-963C-030DEE10BF8B}" dt="2025-04-22T08:02:13.290" v="126" actId="207"/>
+          <ac:spMkLst>
+            <pc:docMk/>
+            <pc:sldMk cId="2710591063" sldId="590"/>
+            <ac:spMk id="3" creationId="{8F996441-E141-1F37-8FA5-3863828E7B82}"/>
+          </ac:spMkLst>
+        </pc:spChg>
+      </pc:sldChg>
+      <pc:sldChg chg="modSp mod">
+        <pc:chgData name="Mohammed Fasha" userId="cc64f42d-a1a6-4f08-b97b-0c37f877119f" providerId="ADAL" clId="{AA8E1541-7D85-4F75-963C-030DEE10BF8B}" dt="2025-04-22T08:02:16.539" v="127" actId="207"/>
+        <pc:sldMkLst>
+          <pc:docMk/>
+          <pc:sldMk cId="2099531688" sldId="591"/>
+        </pc:sldMkLst>
+        <pc:spChg chg="mod">
+          <ac:chgData name="Mohammed Fasha" userId="cc64f42d-a1a6-4f08-b97b-0c37f877119f" providerId="ADAL" clId="{AA8E1541-7D85-4F75-963C-030DEE10BF8B}" dt="2025-04-22T08:02:16.539" v="127" actId="207"/>
+          <ac:spMkLst>
+            <pc:docMk/>
+            <pc:sldMk cId="2099531688" sldId="591"/>
+            <ac:spMk id="3" creationId="{BB7BB5FE-ED4E-9B26-7BBE-4852DADEAE36}"/>
+          </ac:spMkLst>
+        </pc:spChg>
+      </pc:sldChg>
+      <pc:sldChg chg="modSp mod">
+        <pc:chgData name="Mohammed Fasha" userId="cc64f42d-a1a6-4f08-b97b-0c37f877119f" providerId="ADAL" clId="{AA8E1541-7D85-4F75-963C-030DEE10BF8B}" dt="2025-04-22T08:02:19.907" v="128" actId="207"/>
+        <pc:sldMkLst>
+          <pc:docMk/>
+          <pc:sldMk cId="679815193" sldId="592"/>
+        </pc:sldMkLst>
+        <pc:spChg chg="mod">
+          <ac:chgData name="Mohammed Fasha" userId="cc64f42d-a1a6-4f08-b97b-0c37f877119f" providerId="ADAL" clId="{AA8E1541-7D85-4F75-963C-030DEE10BF8B}" dt="2025-04-22T08:02:19.907" v="128" actId="207"/>
+          <ac:spMkLst>
+            <pc:docMk/>
+            <pc:sldMk cId="679815193" sldId="592"/>
+            <ac:spMk id="3" creationId="{46B39FA6-13CC-72C8-FC1F-C00F7B3A62FD}"/>
+          </ac:spMkLst>
+        </pc:spChg>
+      </pc:sldChg>
+      <pc:sldChg chg="modSp mod">
+        <pc:chgData name="Mohammed Fasha" userId="cc64f42d-a1a6-4f08-b97b-0c37f877119f" providerId="ADAL" clId="{AA8E1541-7D85-4F75-963C-030DEE10BF8B}" dt="2025-04-22T08:02:23.085" v="129" actId="207"/>
+        <pc:sldMkLst>
+          <pc:docMk/>
+          <pc:sldMk cId="3936032628" sldId="593"/>
+        </pc:sldMkLst>
+        <pc:spChg chg="mod">
+          <ac:chgData name="Mohammed Fasha" userId="cc64f42d-a1a6-4f08-b97b-0c37f877119f" providerId="ADAL" clId="{AA8E1541-7D85-4F75-963C-030DEE10BF8B}" dt="2025-04-22T08:02:23.085" v="129" actId="207"/>
+          <ac:spMkLst>
+            <pc:docMk/>
+            <pc:sldMk cId="3936032628" sldId="593"/>
+            <ac:spMk id="3" creationId="{2C6F57C9-D577-D8AE-D393-4F4E9CA7D761}"/>
+          </ac:spMkLst>
+        </pc:spChg>
+      </pc:sldChg>
+      <pc:sldChg chg="modSp mod">
+        <pc:chgData name="Mohammed Fasha" userId="cc64f42d-a1a6-4f08-b97b-0c37f877119f" providerId="ADAL" clId="{AA8E1541-7D85-4F75-963C-030DEE10BF8B}" dt="2025-04-22T08:02:28.562" v="130" actId="207"/>
+        <pc:sldMkLst>
+          <pc:docMk/>
+          <pc:sldMk cId="4127777656" sldId="594"/>
+        </pc:sldMkLst>
+        <pc:spChg chg="mod">
+          <ac:chgData name="Mohammed Fasha" userId="cc64f42d-a1a6-4f08-b97b-0c37f877119f" providerId="ADAL" clId="{AA8E1541-7D85-4F75-963C-030DEE10BF8B}" dt="2025-04-22T08:02:28.562" v="130" actId="207"/>
+          <ac:spMkLst>
+            <pc:docMk/>
+            <pc:sldMk cId="4127777656" sldId="594"/>
+            <ac:spMk id="3" creationId="{2B9D861C-1BF9-EC89-D5A5-874821596B9F}"/>
           </ac:spMkLst>
         </pc:spChg>
       </pc:sldChg>
@@ -5810,7 +6446,7 @@
           <a:p>
             <a:fld id="{13BA03A4-B9F1-404C-8A74-B1AFD6480953}" type="datetimeFigureOut">
               <a:rPr lang="en-US" smtClean="0"/>
-              <a:t>4/20/2025</a:t>
+              <a:t>4/22/2025</a:t>
             </a:fld>
             <a:endParaRPr lang="en-US"/>
           </a:p>
@@ -6348,7 +6984,7 @@
           <a:p>
             <a:fld id="{B4B52809-B5B7-4F41-8876-28A8C75C3ECB}" type="slidenum">
               <a:rPr lang="en-US" smtClean="0"/>
-              <a:t>109</a:t>
+              <a:t>107</a:t>
             </a:fld>
             <a:endParaRPr lang="en-US"/>
           </a:p>
@@ -6514,7 +7150,7 @@
           <a:p>
             <a:fld id="{0DB78E95-DE77-44D3-BDB9-E242948FB112}" type="datetimeFigureOut">
               <a:rPr lang="en-US" smtClean="0"/>
-              <a:t>4/20/2025</a:t>
+              <a:t>4/22/2025</a:t>
             </a:fld>
             <a:endParaRPr lang="en-US"/>
           </a:p>
@@ -6742,7 +7378,7 @@
           <a:p>
             <a:fld id="{0DB78E95-DE77-44D3-BDB9-E242948FB112}" type="datetimeFigureOut">
               <a:rPr lang="en-US" smtClean="0"/>
-              <a:t>4/20/2025</a:t>
+              <a:t>4/22/2025</a:t>
             </a:fld>
             <a:endParaRPr lang="en-US"/>
           </a:p>
@@ -6950,7 +7586,7 @@
           <a:p>
             <a:fld id="{0DB78E95-DE77-44D3-BDB9-E242948FB112}" type="datetimeFigureOut">
               <a:rPr lang="en-US" smtClean="0"/>
-              <a:t>4/20/2025</a:t>
+              <a:t>4/22/2025</a:t>
             </a:fld>
             <a:endParaRPr lang="en-US"/>
           </a:p>
@@ -7683,7 +8319,7 @@
           <a:p>
             <a:fld id="{0DB78E95-DE77-44D3-BDB9-E242948FB112}" type="datetimeFigureOut">
               <a:rPr lang="en-US" smtClean="0"/>
-              <a:t>4/20/2025</a:t>
+              <a:t>4/22/2025</a:t>
             </a:fld>
             <a:endParaRPr lang="en-US"/>
           </a:p>
@@ -8062,7 +8698,7 @@
           <a:p>
             <a:fld id="{0DB78E95-DE77-44D3-BDB9-E242948FB112}" type="datetimeFigureOut">
               <a:rPr lang="en-US" smtClean="0"/>
-              <a:t>4/20/2025</a:t>
+              <a:t>4/22/2025</a:t>
             </a:fld>
             <a:endParaRPr lang="en-US"/>
           </a:p>
@@ -8474,7 +9110,7 @@
           <a:p>
             <a:fld id="{0DB78E95-DE77-44D3-BDB9-E242948FB112}" type="datetimeFigureOut">
               <a:rPr lang="en-US" smtClean="0"/>
-              <a:t>4/20/2025</a:t>
+              <a:t>4/22/2025</a:t>
             </a:fld>
             <a:endParaRPr lang="en-US"/>
           </a:p>
@@ -8615,7 +9251,7 @@
           <a:p>
             <a:fld id="{0DB78E95-DE77-44D3-BDB9-E242948FB112}" type="datetimeFigureOut">
               <a:rPr lang="en-US" smtClean="0"/>
-              <a:t>4/20/2025</a:t>
+              <a:t>4/22/2025</a:t>
             </a:fld>
             <a:endParaRPr lang="en-US"/>
           </a:p>
@@ -8728,7 +9364,7 @@
           <a:p>
             <a:fld id="{0DB78E95-DE77-44D3-BDB9-E242948FB112}" type="datetimeFigureOut">
               <a:rPr lang="en-US" smtClean="0"/>
-              <a:t>4/20/2025</a:t>
+              <a:t>4/22/2025</a:t>
             </a:fld>
             <a:endParaRPr lang="en-US"/>
           </a:p>
@@ -9039,7 +9675,7 @@
           <a:p>
             <a:fld id="{0DB78E95-DE77-44D3-BDB9-E242948FB112}" type="datetimeFigureOut">
               <a:rPr lang="en-US" smtClean="0"/>
-              <a:t>4/20/2025</a:t>
+              <a:t>4/22/2025</a:t>
             </a:fld>
             <a:endParaRPr lang="en-US"/>
           </a:p>
@@ -9327,7 +9963,7 @@
           <a:p>
             <a:fld id="{0DB78E95-DE77-44D3-BDB9-E242948FB112}" type="datetimeFigureOut">
               <a:rPr lang="en-US" smtClean="0"/>
-              <a:t>4/20/2025</a:t>
+              <a:t>4/22/2025</a:t>
             </a:fld>
             <a:endParaRPr lang="en-US"/>
           </a:p>
@@ -9568,7 +10204,7 @@
           <a:p>
             <a:fld id="{0DB78E95-DE77-44D3-BDB9-E242948FB112}" type="datetimeFigureOut">
               <a:rPr lang="en-US" smtClean="0"/>
-              <a:t>4/20/2025</a:t>
+              <a:t>4/22/2025</a:t>
             </a:fld>
             <a:endParaRPr lang="en-US"/>
           </a:p>
@@ -10313,376 +10949,6 @@
         <p:cNvPr id="1" name="">
           <a:extLst>
             <a:ext uri="{FF2B5EF4-FFF2-40B4-BE49-F238E27FC236}">
-              <a16:creationId xmlns:a16="http://schemas.microsoft.com/office/drawing/2014/main" id="{548E8376-C143-34FC-D9D3-4CB00868105C}"/>
-            </a:ext>
-          </a:extLst>
-        </p:cNvPr>
-        <p:cNvGrpSpPr/>
-        <p:nvPr/>
-      </p:nvGrpSpPr>
-      <p:grpSpPr>
-        <a:xfrm>
-          <a:off x="0" y="0"/>
-          <a:ext cx="0" cy="0"/>
-          <a:chOff x="0" y="0"/>
-          <a:chExt cx="0" cy="0"/>
-        </a:xfrm>
-      </p:grpSpPr>
-      <p:sp>
-        <p:nvSpPr>
-          <p:cNvPr id="2" name="Title 1">
-            <a:extLst>
-              <a:ext uri="{FF2B5EF4-FFF2-40B4-BE49-F238E27FC236}">
-                <a16:creationId xmlns:a16="http://schemas.microsoft.com/office/drawing/2014/main" id="{AB4702C9-F54F-67EF-570B-C50D4D5D2380}"/>
-              </a:ext>
-            </a:extLst>
-          </p:cNvPr>
-          <p:cNvSpPr>
-            <a:spLocks noGrp="1"/>
-          </p:cNvSpPr>
-          <p:nvPr>
-            <p:ph type="title"/>
-          </p:nvPr>
-        </p:nvSpPr>
-        <p:spPr/>
-        <p:txBody>
-          <a:bodyPr/>
-          <a:lstStyle/>
-          <a:p>
-            <a:r>
-              <a:rPr lang="pt-BR" dirty="0"/>
-              <a:t>Amazon S3 as a Data Lake</a:t>
-            </a:r>
-            <a:endParaRPr lang="en-US" dirty="0"/>
-          </a:p>
-        </p:txBody>
-      </p:sp>
-      <p:sp>
-        <p:nvSpPr>
-          <p:cNvPr id="3" name="Content Placeholder 2">
-            <a:extLst>
-              <a:ext uri="{FF2B5EF4-FFF2-40B4-BE49-F238E27FC236}">
-                <a16:creationId xmlns:a16="http://schemas.microsoft.com/office/drawing/2014/main" id="{FA755082-70DA-3D50-1613-A4A6723FED1F}"/>
-              </a:ext>
-            </a:extLst>
-          </p:cNvPr>
-          <p:cNvSpPr>
-            <a:spLocks noGrp="1"/>
-          </p:cNvSpPr>
-          <p:nvPr>
-            <p:ph idx="1"/>
-          </p:nvPr>
-        </p:nvSpPr>
-        <p:spPr>
-          <a:xfrm>
-            <a:off x="838199" y="1706007"/>
-            <a:ext cx="10962503" cy="4991039"/>
-          </a:xfrm>
-        </p:spPr>
-        <p:txBody>
-          <a:bodyPr/>
-          <a:lstStyle/>
-          <a:p>
-            <a:pPr>
-              <a:buNone/>
-            </a:pPr>
-            <a:r>
-              <a:rPr lang="en-US" b="1" dirty="0"/>
-              <a:t>Amazon S3</a:t>
-            </a:r>
-            <a:r>
-              <a:rPr lang="en-US" dirty="0"/>
-              <a:t> is often used as a </a:t>
-            </a:r>
-            <a:r>
-              <a:rPr lang="en-US" b="1" dirty="0"/>
-              <a:t>data lake</a:t>
-            </a:r>
-            <a:r>
-              <a:rPr lang="en-US" dirty="0"/>
-              <a:t> for storing structured and unstructured data.</a:t>
-            </a:r>
-          </a:p>
-          <a:p>
-            <a:pPr>
-              <a:buNone/>
-            </a:pPr>
-            <a:r>
-              <a:rPr lang="en-US" b="1" dirty="0"/>
-              <a:t>Why?</a:t>
-            </a:r>
-            <a:endParaRPr lang="en-US" dirty="0"/>
-          </a:p>
-          <a:p>
-            <a:pPr>
-              <a:buFont typeface="Arial" panose="020B0604020202020204" pitchFamily="34" charset="0"/>
-              <a:buChar char="•"/>
-            </a:pPr>
-            <a:r>
-              <a:rPr lang="en-US" dirty="0"/>
-              <a:t>Unlimited scale</a:t>
-            </a:r>
-          </a:p>
-          <a:p>
-            <a:pPr>
-              <a:buFont typeface="Arial" panose="020B0604020202020204" pitchFamily="34" charset="0"/>
-              <a:buChar char="•"/>
-            </a:pPr>
-            <a:r>
-              <a:rPr lang="en-US" dirty="0"/>
-              <a:t>High durability and availability</a:t>
-            </a:r>
-          </a:p>
-          <a:p>
-            <a:pPr>
-              <a:buFont typeface="Arial" panose="020B0604020202020204" pitchFamily="34" charset="0"/>
-              <a:buChar char="•"/>
-            </a:pPr>
-            <a:r>
-              <a:rPr lang="en-US" dirty="0"/>
-              <a:t>Integration with analytics and ML tools</a:t>
-            </a:r>
-          </a:p>
-          <a:p>
-            <a:pPr marL="0" indent="0">
-              <a:buNone/>
-            </a:pPr>
-            <a:endParaRPr lang="en-US" b="1" dirty="0"/>
-          </a:p>
-          <a:p>
-            <a:pPr marL="0" indent="0">
-              <a:buNone/>
-            </a:pPr>
-            <a:r>
-              <a:rPr lang="en-US" b="1" dirty="0"/>
-              <a:t>Common Use:</a:t>
-            </a:r>
-            <a:r>
-              <a:rPr lang="en-US" dirty="0"/>
-              <a:t> Central repository for data before processing</a:t>
-            </a:r>
-          </a:p>
-          <a:p>
-            <a:endParaRPr lang="en-US" dirty="0"/>
-          </a:p>
-        </p:txBody>
-      </p:sp>
-    </p:spTree>
-    <p:extLst>
-      <p:ext uri="{BB962C8B-B14F-4D97-AF65-F5344CB8AC3E}">
-        <p14:creationId xmlns:p14="http://schemas.microsoft.com/office/powerpoint/2010/main" val="1196054167"/>
-      </p:ext>
-    </p:extLst>
-  </p:cSld>
-  <p:clrMapOvr>
-    <a:masterClrMapping/>
-  </p:clrMapOvr>
-</p:sld>
-</file>
-
-<file path=ppt/slides/slide101.xml><?xml version="1.0" encoding="utf-8"?>
-<p:sld xmlns:a="http://schemas.openxmlformats.org/drawingml/2006/main" xmlns:r="http://schemas.openxmlformats.org/officeDocument/2006/relationships" xmlns:p="http://schemas.openxmlformats.org/presentationml/2006/main">
-  <p:cSld>
-    <p:spTree>
-      <p:nvGrpSpPr>
-        <p:cNvPr id="1" name="">
-          <a:extLst>
-            <a:ext uri="{FF2B5EF4-FFF2-40B4-BE49-F238E27FC236}">
-              <a16:creationId xmlns:a16="http://schemas.microsoft.com/office/drawing/2014/main" id="{9CB9C995-32E8-5BA3-55B1-89146D8D265A}"/>
-            </a:ext>
-          </a:extLst>
-        </p:cNvPr>
-        <p:cNvGrpSpPr/>
-        <p:nvPr/>
-      </p:nvGrpSpPr>
-      <p:grpSpPr>
-        <a:xfrm>
-          <a:off x="0" y="0"/>
-          <a:ext cx="0" cy="0"/>
-          <a:chOff x="0" y="0"/>
-          <a:chExt cx="0" cy="0"/>
-        </a:xfrm>
-      </p:grpSpPr>
-      <p:sp>
-        <p:nvSpPr>
-          <p:cNvPr id="2" name="Title 1">
-            <a:extLst>
-              <a:ext uri="{FF2B5EF4-FFF2-40B4-BE49-F238E27FC236}">
-                <a16:creationId xmlns:a16="http://schemas.microsoft.com/office/drawing/2014/main" id="{640B72BD-2622-0BDA-1CEF-BAA04A5A39C5}"/>
-              </a:ext>
-            </a:extLst>
-          </p:cNvPr>
-          <p:cNvSpPr>
-            <a:spLocks noGrp="1"/>
-          </p:cNvSpPr>
-          <p:nvPr>
-            <p:ph type="title"/>
-          </p:nvPr>
-        </p:nvSpPr>
-        <p:spPr/>
-        <p:txBody>
-          <a:bodyPr>
-            <a:normAutofit/>
-          </a:bodyPr>
-          <a:lstStyle/>
-          <a:p>
-            <a:r>
-              <a:rPr lang="en-US" b="1" dirty="0"/>
-              <a:t>Amazon EMR – Big Data Frameworks</a:t>
-            </a:r>
-            <a:endParaRPr lang="en-US" dirty="0"/>
-          </a:p>
-        </p:txBody>
-      </p:sp>
-      <p:sp>
-        <p:nvSpPr>
-          <p:cNvPr id="3" name="Content Placeholder 2">
-            <a:extLst>
-              <a:ext uri="{FF2B5EF4-FFF2-40B4-BE49-F238E27FC236}">
-                <a16:creationId xmlns:a16="http://schemas.microsoft.com/office/drawing/2014/main" id="{B6929E43-3F39-A0AB-4FE3-2DF99D72D64C}"/>
-              </a:ext>
-            </a:extLst>
-          </p:cNvPr>
-          <p:cNvSpPr>
-            <a:spLocks noGrp="1"/>
-          </p:cNvSpPr>
-          <p:nvPr>
-            <p:ph idx="1"/>
-          </p:nvPr>
-        </p:nvSpPr>
-        <p:spPr/>
-        <p:txBody>
-          <a:bodyPr/>
-          <a:lstStyle/>
-          <a:p>
-            <a:pPr>
-              <a:buNone/>
-            </a:pPr>
-            <a:r>
-              <a:rPr lang="en-US" b="1" dirty="0"/>
-              <a:t>Amazon EMR</a:t>
-            </a:r>
-            <a:r>
-              <a:rPr lang="en-US" dirty="0"/>
-              <a:t> (Elastic MapReduce) runs big data frameworks like:</a:t>
-            </a:r>
-          </a:p>
-          <a:p>
-            <a:pPr>
-              <a:buFont typeface="Arial" panose="020B0604020202020204" pitchFamily="34" charset="0"/>
-              <a:buChar char="•"/>
-            </a:pPr>
-            <a:r>
-              <a:rPr lang="en-US" dirty="0"/>
-              <a:t>Apache Hadoop</a:t>
-            </a:r>
-          </a:p>
-          <a:p>
-            <a:pPr>
-              <a:buFont typeface="Arial" panose="020B0604020202020204" pitchFamily="34" charset="0"/>
-              <a:buChar char="•"/>
-            </a:pPr>
-            <a:r>
-              <a:rPr lang="en-US" dirty="0"/>
-              <a:t>Apache Spark</a:t>
-            </a:r>
-          </a:p>
-          <a:p>
-            <a:pPr>
-              <a:buFont typeface="Arial" panose="020B0604020202020204" pitchFamily="34" charset="0"/>
-              <a:buChar char="•"/>
-            </a:pPr>
-            <a:r>
-              <a:rPr lang="en-US" dirty="0"/>
-              <a:t>HBase</a:t>
-            </a:r>
-          </a:p>
-          <a:p>
-            <a:pPr>
-              <a:buFont typeface="Arial" panose="020B0604020202020204" pitchFamily="34" charset="0"/>
-              <a:buChar char="•"/>
-            </a:pPr>
-            <a:r>
-              <a:rPr lang="en-US" dirty="0"/>
-              <a:t>Hive</a:t>
-            </a:r>
-          </a:p>
-          <a:p>
-            <a:pPr>
-              <a:buNone/>
-            </a:pPr>
-            <a:r>
-              <a:rPr lang="en-US" b="1" dirty="0"/>
-              <a:t>Use Cases:</a:t>
-            </a:r>
-            <a:endParaRPr lang="en-US" dirty="0"/>
-          </a:p>
-          <a:p>
-            <a:pPr>
-              <a:buFont typeface="Arial" panose="020B0604020202020204" pitchFamily="34" charset="0"/>
-              <a:buChar char="•"/>
-            </a:pPr>
-            <a:r>
-              <a:rPr lang="en-US" dirty="0"/>
-              <a:t>Distributed data processing</a:t>
-            </a:r>
-          </a:p>
-          <a:p>
-            <a:pPr>
-              <a:buFont typeface="Arial" panose="020B0604020202020204" pitchFamily="34" charset="0"/>
-              <a:buChar char="•"/>
-            </a:pPr>
-            <a:r>
-              <a:rPr lang="en-US" dirty="0"/>
-              <a:t>ETL pipelines</a:t>
-            </a:r>
-          </a:p>
-          <a:p>
-            <a:pPr>
-              <a:buFont typeface="Arial" panose="020B0604020202020204" pitchFamily="34" charset="0"/>
-              <a:buChar char="•"/>
-            </a:pPr>
-            <a:r>
-              <a:rPr lang="en-US" dirty="0"/>
-              <a:t>Log analysis</a:t>
-            </a:r>
-          </a:p>
-          <a:p>
-            <a:pPr>
-              <a:buFont typeface="Arial" panose="020B0604020202020204" pitchFamily="34" charset="0"/>
-              <a:buChar char="•"/>
-            </a:pPr>
-            <a:r>
-              <a:rPr lang="en-US" dirty="0"/>
-              <a:t>Machine learning model training at scale</a:t>
-            </a:r>
-          </a:p>
-          <a:p>
-            <a:endParaRPr lang="en-US" dirty="0"/>
-          </a:p>
-        </p:txBody>
-      </p:sp>
-    </p:spTree>
-    <p:extLst>
-      <p:ext uri="{BB962C8B-B14F-4D97-AF65-F5344CB8AC3E}">
-        <p14:creationId xmlns:p14="http://schemas.microsoft.com/office/powerpoint/2010/main" val="313857250"/>
-      </p:ext>
-    </p:extLst>
-  </p:cSld>
-  <p:clrMapOvr>
-    <a:masterClrMapping/>
-  </p:clrMapOvr>
-</p:sld>
-</file>
-
-<file path=ppt/slides/slide102.xml><?xml version="1.0" encoding="utf-8"?>
-<p:sld xmlns:a="http://schemas.openxmlformats.org/drawingml/2006/main" xmlns:r="http://schemas.openxmlformats.org/officeDocument/2006/relationships" xmlns:p="http://schemas.openxmlformats.org/presentationml/2006/main">
-  <p:cSld>
-    <p:spTree>
-      <p:nvGrpSpPr>
-        <p:cNvPr id="1" name="">
-          <a:extLst>
-            <a:ext uri="{FF2B5EF4-FFF2-40B4-BE49-F238E27FC236}">
               <a16:creationId xmlns:a16="http://schemas.microsoft.com/office/drawing/2014/main" id="{C5EE17D2-99C6-F3A6-434B-759673D1835A}"/>
             </a:ext>
           </a:extLst>
@@ -10753,11 +11019,19 @@
               <a:buNone/>
             </a:pPr>
             <a:r>
-              <a:rPr lang="en-US" b="1" dirty="0"/>
+              <a:rPr lang="en-US" b="1" dirty="0">
+                <a:solidFill>
+                  <a:srgbClr val="00B050"/>
+                </a:solidFill>
+              </a:rPr>
               <a:t>Amazon Kinesis</a:t>
             </a:r>
             <a:r>
-              <a:rPr lang="en-US" dirty="0"/>
+              <a:rPr lang="en-US" dirty="0">
+                <a:solidFill>
+                  <a:srgbClr val="00B050"/>
+                </a:solidFill>
+              </a:rPr>
               <a:t> is designed for streaming data (e.g., website clicks, IoT events).</a:t>
             </a:r>
           </a:p>
@@ -10829,7 +11103,7 @@
 </p:sld>
 </file>
 
-<file path=ppt/slides/slide103.xml><?xml version="1.0" encoding="utf-8"?>
+<file path=ppt/slides/slide101.xml><?xml version="1.0" encoding="utf-8"?>
 <p:sld xmlns:a="http://schemas.openxmlformats.org/drawingml/2006/main" xmlns:r="http://schemas.openxmlformats.org/officeDocument/2006/relationships" xmlns:p="http://schemas.openxmlformats.org/presentationml/2006/main">
   <p:cSld>
     <p:spTree>
@@ -10907,19 +11181,35 @@
               <a:buNone/>
             </a:pPr>
             <a:r>
-              <a:rPr lang="en-US" b="1" dirty="0"/>
+              <a:rPr lang="en-US" b="1" dirty="0">
+                <a:solidFill>
+                  <a:srgbClr val="00B050"/>
+                </a:solidFill>
+              </a:rPr>
               <a:t>AWS Glue</a:t>
             </a:r>
             <a:r>
-              <a:rPr lang="en-US" dirty="0"/>
+              <a:rPr lang="en-US" dirty="0">
+                <a:solidFill>
+                  <a:srgbClr val="00B050"/>
+                </a:solidFill>
+              </a:rPr>
               <a:t> is a fully managed </a:t>
             </a:r>
             <a:r>
-              <a:rPr lang="en-US" b="1" dirty="0"/>
+              <a:rPr lang="en-US" b="1" dirty="0">
+                <a:solidFill>
+                  <a:srgbClr val="00B050"/>
+                </a:solidFill>
+              </a:rPr>
               <a:t>Extract, Transform, Load (ETL)</a:t>
             </a:r>
             <a:r>
-              <a:rPr lang="en-US" dirty="0"/>
+              <a:rPr lang="en-US" dirty="0">
+                <a:solidFill>
+                  <a:srgbClr val="00B050"/>
+                </a:solidFill>
+              </a:rPr>
               <a:t> service.</a:t>
             </a:r>
           </a:p>
@@ -10991,7 +11281,7 @@
 </p:sld>
 </file>
 
-<file path=ppt/slides/slide104.xml><?xml version="1.0" encoding="utf-8"?>
+<file path=ppt/slides/slide102.xml><?xml version="1.0" encoding="utf-8"?>
 <p:sld xmlns:a="http://schemas.openxmlformats.org/drawingml/2006/main" xmlns:r="http://schemas.openxmlformats.org/officeDocument/2006/relationships" xmlns:p="http://schemas.openxmlformats.org/presentationml/2006/main">
   <p:cSld>
     <p:spTree>
@@ -11069,11 +11359,19 @@
               <a:buNone/>
             </a:pPr>
             <a:r>
-              <a:rPr lang="en-US" b="1" dirty="0"/>
+              <a:rPr lang="en-US" b="1" dirty="0">
+                <a:solidFill>
+                  <a:srgbClr val="00B050"/>
+                </a:solidFill>
+              </a:rPr>
               <a:t>Amazon Redshift</a:t>
             </a:r>
             <a:r>
-              <a:rPr lang="en-US" dirty="0"/>
+              <a:rPr lang="en-US" dirty="0">
+                <a:solidFill>
+                  <a:srgbClr val="00B050"/>
+                </a:solidFill>
+              </a:rPr>
               <a:t> enables fast queries on petabyte-scale datasets.</a:t>
             </a:r>
           </a:p>
@@ -11145,7 +11443,7 @@
 </p:sld>
 </file>
 
-<file path=ppt/slides/slide105.xml><?xml version="1.0" encoding="utf-8"?>
+<file path=ppt/slides/slide103.xml><?xml version="1.0" encoding="utf-8"?>
 <p:sld xmlns:a="http://schemas.openxmlformats.org/drawingml/2006/main" xmlns:r="http://schemas.openxmlformats.org/officeDocument/2006/relationships" xmlns:p="http://schemas.openxmlformats.org/presentationml/2006/main">
   <p:cSld>
     <p:spTree>
@@ -11223,11 +11521,19 @@
               <a:buNone/>
             </a:pPr>
             <a:r>
-              <a:rPr lang="en-US" b="1" dirty="0"/>
+              <a:rPr lang="en-US" b="1" dirty="0">
+                <a:solidFill>
+                  <a:srgbClr val="00B050"/>
+                </a:solidFill>
+              </a:rPr>
               <a:t>Amazon Athena</a:t>
             </a:r>
             <a:r>
-              <a:rPr lang="en-US" dirty="0"/>
+              <a:rPr lang="en-US" dirty="0">
+                <a:solidFill>
+                  <a:srgbClr val="00B050"/>
+                </a:solidFill>
+              </a:rPr>
               <a:t> allows you to query S3 data using SQL.</a:t>
             </a:r>
           </a:p>
@@ -11289,7 +11595,7 @@
 </p:sld>
 </file>
 
-<file path=ppt/slides/slide106.xml><?xml version="1.0" encoding="utf-8"?>
+<file path=ppt/slides/slide104.xml><?xml version="1.0" encoding="utf-8"?>
 <p:sld xmlns:a="http://schemas.openxmlformats.org/drawingml/2006/main" xmlns:r="http://schemas.openxmlformats.org/officeDocument/2006/relationships" xmlns:p="http://schemas.openxmlformats.org/presentationml/2006/main">
   <p:cSld>
     <p:spTree>
@@ -11375,15 +11681,27 @@
               <a:buNone/>
             </a:pPr>
             <a:r>
-              <a:rPr lang="en-US" b="1" dirty="0"/>
+              <a:rPr lang="en-US" b="1" dirty="0">
+                <a:solidFill>
+                  <a:srgbClr val="00B050"/>
+                </a:solidFill>
+              </a:rPr>
               <a:t>Amazon </a:t>
             </a:r>
             <a:r>
-              <a:rPr lang="en-US" b="1" dirty="0" err="1"/>
+              <a:rPr lang="en-US" b="1" dirty="0" err="1">
+                <a:solidFill>
+                  <a:srgbClr val="00B050"/>
+                </a:solidFill>
+              </a:rPr>
               <a:t>QuickSight</a:t>
             </a:r>
             <a:r>
-              <a:rPr lang="en-US" dirty="0"/>
+              <a:rPr lang="en-US" dirty="0">
+                <a:solidFill>
+                  <a:srgbClr val="00B050"/>
+                </a:solidFill>
+              </a:rPr>
               <a:t> enables interactive dashboards and reports.</a:t>
             </a:r>
           </a:p>
@@ -11445,7 +11763,7 @@
 </p:sld>
 </file>
 
-<file path=ppt/slides/slide107.xml><?xml version="1.0" encoding="utf-8"?>
+<file path=ppt/slides/slide105.xml><?xml version="1.0" encoding="utf-8"?>
 <p:sld xmlns:a="http://schemas.openxmlformats.org/drawingml/2006/main" xmlns:r="http://schemas.openxmlformats.org/officeDocument/2006/relationships" xmlns:p="http://schemas.openxmlformats.org/presentationml/2006/main">
   <p:cSld>
     <p:spTree>
@@ -11534,11 +11852,19 @@
               <a:buNone/>
             </a:pPr>
             <a:r>
-              <a:rPr lang="en-US" dirty="0" err="1"/>
+              <a:rPr lang="en-US" dirty="0" err="1">
+                <a:solidFill>
+                  <a:srgbClr val="00B050"/>
+                </a:solidFill>
+              </a:rPr>
               <a:t>SageMaker</a:t>
             </a:r>
             <a:r>
-              <a:rPr lang="en-US" dirty="0"/>
+              <a:rPr lang="en-US" dirty="0">
+                <a:solidFill>
+                  <a:srgbClr val="00B050"/>
+                </a:solidFill>
+              </a:rPr>
               <a:t> is a fully managed service for the ML lifecycle:</a:t>
             </a:r>
           </a:p>
@@ -11825,7 +12151,7 @@
 </p:sld>
 </file>
 
-<file path=ppt/slides/slide108.xml><?xml version="1.0" encoding="utf-8"?>
+<file path=ppt/slides/slide106.xml><?xml version="1.0" encoding="utf-8"?>
 <p:sld xmlns:a="http://schemas.openxmlformats.org/drawingml/2006/main" xmlns:r="http://schemas.openxmlformats.org/officeDocument/2006/relationships" xmlns:p="http://schemas.openxmlformats.org/presentationml/2006/main">
   <p:cSld>
     <p:spTree>
@@ -12187,7 +12513,7 @@
 </p:sld>
 </file>
 
-<file path=ppt/slides/slide109.xml><?xml version="1.0" encoding="utf-8"?>
+<file path=ppt/slides/slide107.xml><?xml version="1.0" encoding="utf-8"?>
 <p:sld xmlns:a="http://schemas.openxmlformats.org/drawingml/2006/main" xmlns:r="http://schemas.openxmlformats.org/officeDocument/2006/relationships" xmlns:p="http://schemas.openxmlformats.org/presentationml/2006/main">
   <p:cSld>
     <p:spTree>
@@ -26124,9 +26450,9 @@
             </a:r>
           </a:p>
           <a:p>
-            <a:pPr>
-              <a:buFont typeface="Arial" panose="020B0604020202020204" pitchFamily="34" charset="0"/>
-              <a:buChar char="•"/>
+            <a:pPr marL="457200" indent="-457200">
+              <a:buFont typeface="+mj-lt"/>
+              <a:buAutoNum type="arabicPeriod"/>
             </a:pPr>
             <a:r>
               <a:rPr lang="en-US" dirty="0"/>
@@ -26134,9 +26460,9 @@
             </a:r>
           </a:p>
           <a:p>
-            <a:pPr>
-              <a:buFont typeface="Arial" panose="020B0604020202020204" pitchFamily="34" charset="0"/>
-              <a:buChar char="•"/>
+            <a:pPr marL="457200" indent="-457200">
+              <a:buFont typeface="+mj-lt"/>
+              <a:buAutoNum type="arabicPeriod"/>
             </a:pPr>
             <a:r>
               <a:rPr lang="en-US" dirty="0"/>
@@ -26144,9 +26470,9 @@
             </a:r>
           </a:p>
           <a:p>
-            <a:pPr>
-              <a:buFont typeface="Arial" panose="020B0604020202020204" pitchFamily="34" charset="0"/>
-              <a:buChar char="•"/>
+            <a:pPr marL="457200" indent="-457200">
+              <a:buFont typeface="+mj-lt"/>
+              <a:buAutoNum type="arabicPeriod"/>
             </a:pPr>
             <a:r>
               <a:rPr lang="en-US" dirty="0"/>
@@ -26154,9 +26480,9 @@
             </a:r>
           </a:p>
           <a:p>
-            <a:pPr>
-              <a:buFont typeface="Arial" panose="020B0604020202020204" pitchFamily="34" charset="0"/>
-              <a:buChar char="•"/>
+            <a:pPr marL="457200" indent="-457200">
+              <a:buFont typeface="+mj-lt"/>
+              <a:buAutoNum type="arabicPeriod"/>
             </a:pPr>
             <a:r>
               <a:rPr lang="en-US" dirty="0"/>
@@ -26247,23 +26573,39 @@
           <a:bodyPr/>
           <a:lstStyle/>
           <a:p>
-            <a:pPr>
+            <a:pPr marL="0" indent="0">
               <a:buNone/>
             </a:pPr>
             <a:r>
-              <a:rPr lang="en-US" b="1" dirty="0"/>
+              <a:rPr lang="en-US" b="1" dirty="0">
+                <a:solidFill>
+                  <a:srgbClr val="00B050"/>
+                </a:solidFill>
+              </a:rPr>
               <a:t>Amazon Elastic Compute Cloud (EC2)</a:t>
             </a:r>
             <a:r>
-              <a:rPr lang="en-US" dirty="0"/>
+              <a:rPr lang="en-US" dirty="0">
+                <a:solidFill>
+                  <a:srgbClr val="00B050"/>
+                </a:solidFill>
+              </a:rPr>
               <a:t> allows you to rent virtual servers (called </a:t>
             </a:r>
             <a:r>
-              <a:rPr lang="en-US" i="1" dirty="0"/>
+              <a:rPr lang="en-US" i="1" dirty="0">
+                <a:solidFill>
+                  <a:srgbClr val="00B050"/>
+                </a:solidFill>
+              </a:rPr>
               <a:t>instances</a:t>
             </a:r>
             <a:r>
-              <a:rPr lang="en-US" dirty="0"/>
+              <a:rPr lang="en-US" dirty="0">
+                <a:solidFill>
+                  <a:srgbClr val="00B050"/>
+                </a:solidFill>
+              </a:rPr>
               <a:t>) in the cloud.</a:t>
             </a:r>
           </a:p>
@@ -27795,26 +28137,44 @@
         </p:nvSpPr>
         <p:spPr/>
         <p:txBody>
-          <a:bodyPr/>
+          <a:bodyPr>
+            <a:normAutofit fontScale="85000" lnSpcReduction="20000"/>
+          </a:bodyPr>
           <a:lstStyle/>
           <a:p>
             <a:pPr>
               <a:buNone/>
             </a:pPr>
             <a:r>
-              <a:rPr lang="en-US" b="1" dirty="0"/>
+              <a:rPr lang="en-US" b="1" dirty="0">
+                <a:solidFill>
+                  <a:srgbClr val="00B050"/>
+                </a:solidFill>
+              </a:rPr>
               <a:t>Lambda</a:t>
             </a:r>
             <a:r>
-              <a:rPr lang="en-US" dirty="0"/>
+              <a:rPr lang="en-US" dirty="0">
+                <a:solidFill>
+                  <a:srgbClr val="00B050"/>
+                </a:solidFill>
+              </a:rPr>
               <a:t> lets you run code </a:t>
             </a:r>
             <a:r>
-              <a:rPr lang="en-US" i="1" dirty="0"/>
+              <a:rPr lang="en-US" i="1" dirty="0">
+                <a:solidFill>
+                  <a:srgbClr val="00B050"/>
+                </a:solidFill>
+              </a:rPr>
               <a:t>without provisioning or managing servers</a:t>
             </a:r>
             <a:r>
-              <a:rPr lang="en-US" dirty="0"/>
+              <a:rPr lang="en-US" dirty="0">
+                <a:solidFill>
+                  <a:srgbClr val="00B050"/>
+                </a:solidFill>
+              </a:rPr>
               <a:t>.</a:t>
             </a:r>
           </a:p>
@@ -27897,6 +28257,62 @@
               <a:rPr lang="en-US" dirty="0"/>
               <a:t>Supports multiple programming languages (Python, Node.js, Java, etc.)</a:t>
             </a:r>
+          </a:p>
+          <a:p>
+            <a:pPr marL="0" indent="0">
+              <a:buNone/>
+            </a:pPr>
+            <a:r>
+              <a:rPr lang="en-US" b="1" dirty="0"/>
+              <a:t>Common Lambda Use Cases</a:t>
+            </a:r>
+          </a:p>
+          <a:p>
+            <a:pPr>
+              <a:buFont typeface="Arial" panose="020B0604020202020204" pitchFamily="34" charset="0"/>
+              <a:buChar char="•"/>
+            </a:pPr>
+            <a:r>
+              <a:rPr lang="en-US" dirty="0"/>
+              <a:t>Real-time file processing (e.g., generate image thumbnails)</a:t>
+            </a:r>
+          </a:p>
+          <a:p>
+            <a:pPr>
+              <a:buFont typeface="Arial" panose="020B0604020202020204" pitchFamily="34" charset="0"/>
+              <a:buChar char="•"/>
+            </a:pPr>
+            <a:r>
+              <a:rPr lang="en-US" dirty="0"/>
+              <a:t>Scheduled tasks (e.g., backup at midnight)</a:t>
+            </a:r>
+          </a:p>
+          <a:p>
+            <a:pPr>
+              <a:buFont typeface="Arial" panose="020B0604020202020204" pitchFamily="34" charset="0"/>
+              <a:buChar char="•"/>
+            </a:pPr>
+            <a:r>
+              <a:rPr lang="en-US" dirty="0"/>
+              <a:t>Backend services for APIs</a:t>
+            </a:r>
+          </a:p>
+          <a:p>
+            <a:pPr>
+              <a:buFont typeface="Arial" panose="020B0604020202020204" pitchFamily="34" charset="0"/>
+              <a:buChar char="•"/>
+            </a:pPr>
+            <a:r>
+              <a:rPr lang="en-US" dirty="0"/>
+              <a:t>Real-time stream processing (e.g., Kinesis, DynamoDB Streams)</a:t>
+            </a:r>
+          </a:p>
+          <a:p>
+            <a:pPr>
+              <a:buFont typeface="Arial" panose="020B0604020202020204" pitchFamily="34" charset="0"/>
+              <a:buChar char="•"/>
+            </a:pPr>
+            <a:endParaRPr lang="en-US" dirty="0"/>
           </a:p>
           <a:p>
             <a:endParaRPr lang="en-US" dirty="0"/>
@@ -27917,131 +28333,6 @@
 </file>
 
 <file path=ppt/slides/slide55.xml><?xml version="1.0" encoding="utf-8"?>
-<p:sld xmlns:a="http://schemas.openxmlformats.org/drawingml/2006/main" xmlns:r="http://schemas.openxmlformats.org/officeDocument/2006/relationships" xmlns:p="http://schemas.openxmlformats.org/presentationml/2006/main">
-  <p:cSld>
-    <p:spTree>
-      <p:nvGrpSpPr>
-        <p:cNvPr id="1" name=""/>
-        <p:cNvGrpSpPr/>
-        <p:nvPr/>
-      </p:nvGrpSpPr>
-      <p:grpSpPr>
-        <a:xfrm>
-          <a:off x="0" y="0"/>
-          <a:ext cx="0" cy="0"/>
-          <a:chOff x="0" y="0"/>
-          <a:chExt cx="0" cy="0"/>
-        </a:xfrm>
-      </p:grpSpPr>
-      <p:sp>
-        <p:nvSpPr>
-          <p:cNvPr id="2" name="Title 1">
-            <a:extLst>
-              <a:ext uri="{FF2B5EF4-FFF2-40B4-BE49-F238E27FC236}">
-                <a16:creationId xmlns:a16="http://schemas.microsoft.com/office/drawing/2014/main" id="{15D16548-3A68-BC45-1F76-06ADF2939DE7}"/>
-              </a:ext>
-            </a:extLst>
-          </p:cNvPr>
-          <p:cNvSpPr>
-            <a:spLocks noGrp="1"/>
-          </p:cNvSpPr>
-          <p:nvPr>
-            <p:ph type="title"/>
-          </p:nvPr>
-        </p:nvSpPr>
-        <p:spPr/>
-        <p:txBody>
-          <a:bodyPr>
-            <a:normAutofit/>
-          </a:bodyPr>
-          <a:lstStyle/>
-          <a:p>
-            <a:r>
-              <a:rPr lang="en-US" dirty="0"/>
-              <a:t>Common Lambda Use Cases</a:t>
-            </a:r>
-          </a:p>
-        </p:txBody>
-      </p:sp>
-      <p:sp>
-        <p:nvSpPr>
-          <p:cNvPr id="3" name="Content Placeholder 2">
-            <a:extLst>
-              <a:ext uri="{FF2B5EF4-FFF2-40B4-BE49-F238E27FC236}">
-                <a16:creationId xmlns:a16="http://schemas.microsoft.com/office/drawing/2014/main" id="{2977F580-A6AA-F5BD-3BB9-ED7F2E2DA031}"/>
-              </a:ext>
-            </a:extLst>
-          </p:cNvPr>
-          <p:cNvSpPr>
-            <a:spLocks noGrp="1"/>
-          </p:cNvSpPr>
-          <p:nvPr>
-            <p:ph idx="1"/>
-          </p:nvPr>
-        </p:nvSpPr>
-        <p:spPr/>
-        <p:txBody>
-          <a:bodyPr/>
-          <a:lstStyle/>
-          <a:p>
-            <a:pPr>
-              <a:buFont typeface="Arial" panose="020B0604020202020204" pitchFamily="34" charset="0"/>
-              <a:buChar char="•"/>
-            </a:pPr>
-            <a:r>
-              <a:rPr lang="en-US" dirty="0"/>
-              <a:t>Real-time file processing (e.g., generate image thumbnails)</a:t>
-            </a:r>
-          </a:p>
-          <a:p>
-            <a:pPr>
-              <a:buFont typeface="Arial" panose="020B0604020202020204" pitchFamily="34" charset="0"/>
-              <a:buChar char="•"/>
-            </a:pPr>
-            <a:r>
-              <a:rPr lang="en-US" dirty="0"/>
-              <a:t>Scheduled tasks (e.g., backup at midnight)</a:t>
-            </a:r>
-          </a:p>
-          <a:p>
-            <a:pPr>
-              <a:buFont typeface="Arial" panose="020B0604020202020204" pitchFamily="34" charset="0"/>
-              <a:buChar char="•"/>
-            </a:pPr>
-            <a:r>
-              <a:rPr lang="en-US" dirty="0"/>
-              <a:t>Backend services for APIs</a:t>
-            </a:r>
-          </a:p>
-          <a:p>
-            <a:pPr>
-              <a:buFont typeface="Arial" panose="020B0604020202020204" pitchFamily="34" charset="0"/>
-              <a:buChar char="•"/>
-            </a:pPr>
-            <a:r>
-              <a:rPr lang="en-US" dirty="0"/>
-              <a:t>Real-time stream processing (e.g., Kinesis, DynamoDB Streams)</a:t>
-            </a:r>
-          </a:p>
-          <a:p>
-            <a:endParaRPr lang="en-US" dirty="0"/>
-          </a:p>
-        </p:txBody>
-      </p:sp>
-    </p:spTree>
-    <p:extLst>
-      <p:ext uri="{BB962C8B-B14F-4D97-AF65-F5344CB8AC3E}">
-        <p14:creationId xmlns:p14="http://schemas.microsoft.com/office/powerpoint/2010/main" val="3049387189"/>
-      </p:ext>
-    </p:extLst>
-  </p:cSld>
-  <p:clrMapOvr>
-    <a:masterClrMapping/>
-  </p:clrMapOvr>
-</p:sld>
-</file>
-
-<file path=ppt/slides/slide56.xml><?xml version="1.0" encoding="utf-8"?>
 <p:sld xmlns:a="http://schemas.openxmlformats.org/drawingml/2006/main" xmlns:r="http://schemas.openxmlformats.org/officeDocument/2006/relationships" xmlns:p="http://schemas.openxmlformats.org/presentationml/2006/main">
   <p:cSld>
     <p:spTree>
@@ -28115,15 +28406,26 @@
           <a:bodyPr/>
           <a:lstStyle/>
           <a:p>
-            <a:pPr>
+            <a:pPr marL="0" indent="0">
               <a:buNone/>
+              <a:tabLst>
+                <a:tab pos="61913" algn="l"/>
+              </a:tabLst>
             </a:pPr>
             <a:r>
-              <a:rPr lang="en-US" b="1" dirty="0"/>
+              <a:rPr lang="en-US" b="1" dirty="0">
+                <a:solidFill>
+                  <a:srgbClr val="00B050"/>
+                </a:solidFill>
+              </a:rPr>
               <a:t>Containers</a:t>
             </a:r>
             <a:r>
-              <a:rPr lang="en-US" dirty="0"/>
+              <a:rPr lang="en-US" dirty="0">
+                <a:solidFill>
+                  <a:srgbClr val="00B050"/>
+                </a:solidFill>
+              </a:rPr>
               <a:t> are lightweight, portable packages of software that include everything needed to run an application.</a:t>
             </a:r>
           </a:p>
@@ -28177,9 +28479,9 @@
             </a:r>
           </a:p>
           <a:p>
-            <a:pPr>
-              <a:buFont typeface="Arial" panose="020B0604020202020204" pitchFamily="34" charset="0"/>
-              <a:buChar char="•"/>
+            <a:pPr marL="457200" indent="-457200">
+              <a:buFont typeface="+mj-lt"/>
+              <a:buAutoNum type="arabicPeriod"/>
             </a:pPr>
             <a:r>
               <a:rPr lang="en-US" b="1" dirty="0"/>
@@ -28191,9 +28493,9 @@
             </a:r>
           </a:p>
           <a:p>
-            <a:pPr>
-              <a:buFont typeface="Arial" panose="020B0604020202020204" pitchFamily="34" charset="0"/>
-              <a:buChar char="•"/>
+            <a:pPr marL="457200" indent="-457200">
+              <a:buFont typeface="+mj-lt"/>
+              <a:buAutoNum type="arabicPeriod"/>
             </a:pPr>
             <a:r>
               <a:rPr lang="en-US" b="1" dirty="0"/>
@@ -28205,9 +28507,9 @@
             </a:r>
           </a:p>
           <a:p>
-            <a:pPr>
-              <a:buFont typeface="Arial" panose="020B0604020202020204" pitchFamily="34" charset="0"/>
-              <a:buChar char="•"/>
+            <a:pPr marL="457200" indent="-457200">
+              <a:buFont typeface="+mj-lt"/>
+              <a:buAutoNum type="arabicPeriod"/>
             </a:pPr>
             <a:r>
               <a:rPr lang="en-US" b="1" dirty="0"/>
@@ -28244,305 +28546,7 @@
 </p:sld>
 </file>
 
-<file path=ppt/slides/slide57.xml><?xml version="1.0" encoding="utf-8"?>
-<p:sld xmlns:a="http://schemas.openxmlformats.org/drawingml/2006/main" xmlns:r="http://schemas.openxmlformats.org/officeDocument/2006/relationships" xmlns:p="http://schemas.openxmlformats.org/presentationml/2006/main">
-  <p:cSld>
-    <p:spTree>
-      <p:nvGrpSpPr>
-        <p:cNvPr id="1" name="">
-          <a:extLst>
-            <a:ext uri="{FF2B5EF4-FFF2-40B4-BE49-F238E27FC236}">
-              <a16:creationId xmlns:a16="http://schemas.microsoft.com/office/drawing/2014/main" id="{BAE60928-35B4-EA45-A598-2B6F8A3F69B1}"/>
-            </a:ext>
-          </a:extLst>
-        </p:cNvPr>
-        <p:cNvGrpSpPr/>
-        <p:nvPr/>
-      </p:nvGrpSpPr>
-      <p:grpSpPr>
-        <a:xfrm>
-          <a:off x="0" y="0"/>
-          <a:ext cx="0" cy="0"/>
-          <a:chOff x="0" y="0"/>
-          <a:chExt cx="0" cy="0"/>
-        </a:xfrm>
-      </p:grpSpPr>
-      <p:sp>
-        <p:nvSpPr>
-          <p:cNvPr id="2" name="Title 1">
-            <a:extLst>
-              <a:ext uri="{FF2B5EF4-FFF2-40B4-BE49-F238E27FC236}">
-                <a16:creationId xmlns:a16="http://schemas.microsoft.com/office/drawing/2014/main" id="{1C521581-832D-5D64-20CB-A7296B01421F}"/>
-              </a:ext>
-            </a:extLst>
-          </p:cNvPr>
-          <p:cNvSpPr>
-            <a:spLocks noGrp="1"/>
-          </p:cNvSpPr>
-          <p:nvPr>
-            <p:ph type="title"/>
-          </p:nvPr>
-        </p:nvSpPr>
-        <p:spPr/>
-        <p:txBody>
-          <a:bodyPr/>
-          <a:lstStyle/>
-          <a:p>
-            <a:r>
-              <a:rPr lang="en-US" dirty="0"/>
-              <a:t>Amazon ECS and EKS</a:t>
-            </a:r>
-          </a:p>
-        </p:txBody>
-      </p:sp>
-      <p:sp>
-        <p:nvSpPr>
-          <p:cNvPr id="3" name="Content Placeholder 2">
-            <a:extLst>
-              <a:ext uri="{FF2B5EF4-FFF2-40B4-BE49-F238E27FC236}">
-                <a16:creationId xmlns:a16="http://schemas.microsoft.com/office/drawing/2014/main" id="{48E9C026-DB1E-42F4-1684-5619B346975D}"/>
-              </a:ext>
-            </a:extLst>
-          </p:cNvPr>
-          <p:cNvSpPr>
-            <a:spLocks noGrp="1"/>
-          </p:cNvSpPr>
-          <p:nvPr>
-            <p:ph idx="1"/>
-          </p:nvPr>
-        </p:nvSpPr>
-        <p:spPr>
-          <a:xfrm>
-            <a:off x="838200" y="3429000"/>
-            <a:ext cx="10515600" cy="1858917"/>
-          </a:xfrm>
-        </p:spPr>
-        <p:txBody>
-          <a:bodyPr/>
-          <a:lstStyle/>
-          <a:p>
-            <a:pPr>
-              <a:buNone/>
-            </a:pPr>
-            <a:r>
-              <a:rPr lang="en-US" dirty="0"/>
-              <a:t>Both can be integrated with:</a:t>
-            </a:r>
-          </a:p>
-          <a:p>
-            <a:pPr>
-              <a:buFont typeface="Arial" panose="020B0604020202020204" pitchFamily="34" charset="0"/>
-              <a:buChar char="•"/>
-            </a:pPr>
-            <a:r>
-              <a:rPr lang="en-US" dirty="0"/>
-              <a:t>Load balancers</a:t>
-            </a:r>
-          </a:p>
-          <a:p>
-            <a:pPr>
-              <a:buFont typeface="Arial" panose="020B0604020202020204" pitchFamily="34" charset="0"/>
-              <a:buChar char="•"/>
-            </a:pPr>
-            <a:r>
-              <a:rPr lang="en-US" dirty="0"/>
-              <a:t>IAM for secure access</a:t>
-            </a:r>
-          </a:p>
-          <a:p>
-            <a:pPr>
-              <a:buFont typeface="Arial" panose="020B0604020202020204" pitchFamily="34" charset="0"/>
-              <a:buChar char="•"/>
-            </a:pPr>
-            <a:r>
-              <a:rPr lang="en-US" dirty="0"/>
-              <a:t>CloudWatch for logging/monitoring</a:t>
-            </a:r>
-          </a:p>
-          <a:p>
-            <a:endParaRPr lang="en-US" dirty="0"/>
-          </a:p>
-        </p:txBody>
-      </p:sp>
-      <p:graphicFrame>
-        <p:nvGraphicFramePr>
-          <p:cNvPr id="6" name="Table 5">
-            <a:extLst>
-              <a:ext uri="{FF2B5EF4-FFF2-40B4-BE49-F238E27FC236}">
-                <a16:creationId xmlns:a16="http://schemas.microsoft.com/office/drawing/2014/main" id="{4772F095-620F-FC98-CF30-AFF62F3FF96A}"/>
-              </a:ext>
-            </a:extLst>
-          </p:cNvPr>
-          <p:cNvGraphicFramePr>
-            <a:graphicFrameLocks noGrp="1"/>
-          </p:cNvGraphicFramePr>
-          <p:nvPr>
-            <p:extLst>
-              <p:ext uri="{D42A27DB-BD31-4B8C-83A1-F6EECF244321}">
-                <p14:modId xmlns:p14="http://schemas.microsoft.com/office/powerpoint/2010/main" val="2328547365"/>
-              </p:ext>
-            </p:extLst>
-          </p:nvPr>
-        </p:nvGraphicFramePr>
-        <p:xfrm>
-          <a:off x="838200" y="1940471"/>
-          <a:ext cx="10515600" cy="1097280"/>
-        </p:xfrm>
-        <a:graphic>
-          <a:graphicData uri="http://schemas.openxmlformats.org/drawingml/2006/table">
-            <a:tbl>
-              <a:tblPr>
-                <a:tableStyleId>{616DA210-FB5B-4158-B5E0-FEB733F419BA}</a:tableStyleId>
-              </a:tblPr>
-              <a:tblGrid>
-                <a:gridCol w="3117427">
-                  <a:extLst>
-                    <a:ext uri="{9D8B030D-6E8A-4147-A177-3AD203B41FA5}">
-                      <a16:colId xmlns:a16="http://schemas.microsoft.com/office/drawing/2014/main" val="181702088"/>
-                    </a:ext>
-                  </a:extLst>
-                </a:gridCol>
-                <a:gridCol w="7398173">
-                  <a:extLst>
-                    <a:ext uri="{9D8B030D-6E8A-4147-A177-3AD203B41FA5}">
-                      <a16:colId xmlns:a16="http://schemas.microsoft.com/office/drawing/2014/main" val="2632012337"/>
-                    </a:ext>
-                  </a:extLst>
-                </a:gridCol>
-              </a:tblGrid>
-              <a:tr h="0">
-                <a:tc>
-                  <a:txBody>
-                    <a:bodyPr/>
-                    <a:lstStyle/>
-                    <a:p>
-                      <a:pPr algn="ctr"/>
-                      <a:r>
-                        <a:rPr lang="en-US" b="1"/>
-                        <a:t>Service</a:t>
-                      </a:r>
-                    </a:p>
-                  </a:txBody>
-                  <a:tcPr anchor="ctr">
-                    <a:solidFill>
-                      <a:schemeClr val="bg1">
-                        <a:lumMod val="85000"/>
-                      </a:schemeClr>
-                    </a:solidFill>
-                  </a:tcPr>
-                </a:tc>
-                <a:tc>
-                  <a:txBody>
-                    <a:bodyPr/>
-                    <a:lstStyle/>
-                    <a:p>
-                      <a:pPr algn="ctr"/>
-                      <a:r>
-                        <a:rPr lang="en-US" b="1" dirty="0"/>
-                        <a:t>Description</a:t>
-                      </a:r>
-                    </a:p>
-                  </a:txBody>
-                  <a:tcPr anchor="ctr">
-                    <a:solidFill>
-                      <a:schemeClr val="bg1">
-                        <a:lumMod val="85000"/>
-                      </a:schemeClr>
-                    </a:solidFill>
-                  </a:tcPr>
-                </a:tc>
-                <a:extLst>
-                  <a:ext uri="{0D108BD9-81ED-4DB2-BD59-A6C34878D82A}">
-                    <a16:rowId xmlns:a16="http://schemas.microsoft.com/office/drawing/2014/main" val="218371871"/>
-                  </a:ext>
-                </a:extLst>
-              </a:tr>
-              <a:tr h="0">
-                <a:tc>
-                  <a:txBody>
-                    <a:bodyPr/>
-                    <a:lstStyle/>
-                    <a:p>
-                      <a:r>
-                        <a:rPr lang="en-US" b="1"/>
-                        <a:t>ECS</a:t>
-                      </a:r>
-                      <a:endParaRPr lang="en-US"/>
-                    </a:p>
-                  </a:txBody>
-                  <a:tcPr anchor="ctr"/>
-                </a:tc>
-                <a:tc>
-                  <a:txBody>
-                    <a:bodyPr/>
-                    <a:lstStyle/>
-                    <a:p>
-                      <a:r>
-                        <a:rPr lang="en-US"/>
-                        <a:t>Runs Docker containers with tight AWS integration</a:t>
-                      </a:r>
-                    </a:p>
-                  </a:txBody>
-                  <a:tcPr anchor="ctr"/>
-                </a:tc>
-                <a:extLst>
-                  <a:ext uri="{0D108BD9-81ED-4DB2-BD59-A6C34878D82A}">
-                    <a16:rowId xmlns:a16="http://schemas.microsoft.com/office/drawing/2014/main" val="776018573"/>
-                  </a:ext>
-                </a:extLst>
-              </a:tr>
-              <a:tr h="0">
-                <a:tc>
-                  <a:txBody>
-                    <a:bodyPr/>
-                    <a:lstStyle/>
-                    <a:p>
-                      <a:r>
-                        <a:rPr lang="en-US" b="1"/>
-                        <a:t>EKS</a:t>
-                      </a:r>
-                      <a:endParaRPr lang="en-US"/>
-                    </a:p>
-                  </a:txBody>
-                  <a:tcPr anchor="ctr"/>
-                </a:tc>
-                <a:tc>
-                  <a:txBody>
-                    <a:bodyPr/>
-                    <a:lstStyle/>
-                    <a:p>
-                      <a:r>
-                        <a:rPr lang="en-US" dirty="0"/>
-                        <a:t>Runs Kubernetes workloads on AWS infrastructure</a:t>
-                      </a:r>
-                    </a:p>
-                  </a:txBody>
-                  <a:tcPr anchor="ctr"/>
-                </a:tc>
-                <a:extLst>
-                  <a:ext uri="{0D108BD9-81ED-4DB2-BD59-A6C34878D82A}">
-                    <a16:rowId xmlns:a16="http://schemas.microsoft.com/office/drawing/2014/main" val="260445932"/>
-                  </a:ext>
-                </a:extLst>
-              </a:tr>
-            </a:tbl>
-          </a:graphicData>
-        </a:graphic>
-      </p:graphicFrame>
-    </p:spTree>
-    <p:extLst>
-      <p:ext uri="{BB962C8B-B14F-4D97-AF65-F5344CB8AC3E}">
-        <p14:creationId xmlns:p14="http://schemas.microsoft.com/office/powerpoint/2010/main" val="1046126438"/>
-      </p:ext>
-    </p:extLst>
-  </p:cSld>
-  <p:clrMapOvr>
-    <a:masterClrMapping/>
-  </p:clrMapOvr>
-</p:sld>
-</file>
-
-<file path=ppt/slides/slide58.xml><?xml version="1.0" encoding="utf-8"?>
+<file path=ppt/slides/slide56.xml><?xml version="1.0" encoding="utf-8"?>
 <p:sld xmlns:a="http://schemas.openxmlformats.org/drawingml/2006/main" xmlns:r="http://schemas.openxmlformats.org/officeDocument/2006/relationships" xmlns:p="http://schemas.openxmlformats.org/presentationml/2006/main">
   <p:cSld>
     <p:spTree>
@@ -28624,6 +28628,76 @@
           <a:bodyPr/>
           <a:lstStyle/>
           <a:p>
+            <a:pPr marL="0" indent="0">
+              <a:buNone/>
+            </a:pPr>
+            <a:r>
+              <a:rPr lang="en-US" dirty="0">
+                <a:solidFill>
+                  <a:srgbClr val="00B050"/>
+                </a:solidFill>
+              </a:rPr>
+              <a:t>AWS </a:t>
+            </a:r>
+            <a:r>
+              <a:rPr lang="en-US" dirty="0" err="1">
+                <a:solidFill>
+                  <a:srgbClr val="00B050"/>
+                </a:solidFill>
+              </a:rPr>
+              <a:t>Fargate</a:t>
+            </a:r>
+            <a:r>
+              <a:rPr lang="en-US" dirty="0">
+                <a:solidFill>
+                  <a:srgbClr val="00B050"/>
+                </a:solidFill>
+              </a:rPr>
+              <a:t> is a fully managed </a:t>
+            </a:r>
+            <a:r>
+              <a:rPr lang="en-US" b="1" dirty="0">
+                <a:solidFill>
+                  <a:srgbClr val="00B050"/>
+                </a:solidFill>
+              </a:rPr>
+              <a:t>serverless compute engine</a:t>
+            </a:r>
+            <a:r>
+              <a:rPr lang="en-US" dirty="0">
+                <a:solidFill>
+                  <a:srgbClr val="00B050"/>
+                </a:solidFill>
+              </a:rPr>
+              <a:t> for containers offered by </a:t>
+            </a:r>
+            <a:r>
+              <a:rPr lang="en-US" b="1" dirty="0">
+                <a:solidFill>
+                  <a:srgbClr val="00B050"/>
+                </a:solidFill>
+              </a:rPr>
+              <a:t>Amazon Web Services (AWS)</a:t>
+            </a:r>
+            <a:r>
+              <a:rPr lang="en-US" dirty="0">
+                <a:solidFill>
+                  <a:srgbClr val="00B050"/>
+                </a:solidFill>
+              </a:rPr>
+              <a:t>. </a:t>
+            </a:r>
+          </a:p>
+          <a:p>
+            <a:pPr marL="0" indent="0">
+              <a:buNone/>
+            </a:pPr>
+            <a:r>
+              <a:rPr lang="en-US" dirty="0"/>
+              <a:t>It lets you run containers without having to manage the underlying servers or clusters.</a:t>
+            </a:r>
+          </a:p>
+          <a:p>
             <a:pPr>
               <a:buNone/>
             </a:pPr>
@@ -28698,7 +28772,7 @@
 </p:sld>
 </file>
 
-<file path=ppt/slides/slide59.xml><?xml version="1.0" encoding="utf-8"?>
+<file path=ppt/slides/slide57.xml><?xml version="1.0" encoding="utf-8"?>
 <p:sld xmlns:a="http://schemas.openxmlformats.org/drawingml/2006/main" xmlns:r="http://schemas.openxmlformats.org/officeDocument/2006/relationships" xmlns:p="http://schemas.openxmlformats.org/presentationml/2006/main">
   <p:cSld>
     <p:spTree>
@@ -28776,11 +28850,19 @@
               <a:buNone/>
             </a:pPr>
             <a:r>
-              <a:rPr lang="en-US" b="1" dirty="0"/>
+              <a:rPr lang="en-US" b="1" dirty="0">
+                <a:solidFill>
+                  <a:srgbClr val="00B050"/>
+                </a:solidFill>
+              </a:rPr>
               <a:t>Elastic Beanstalk</a:t>
             </a:r>
             <a:r>
-              <a:rPr lang="en-US" dirty="0"/>
+              <a:rPr lang="en-US" dirty="0">
+                <a:solidFill>
+                  <a:srgbClr val="00B050"/>
+                </a:solidFill>
+              </a:rPr>
               <a:t> allows you to deploy applications without managing the underlying infrastructure.</a:t>
             </a:r>
           </a:p>
@@ -28853,6 +28935,383 @@
     <p:extLst>
       <p:ext uri="{BB962C8B-B14F-4D97-AF65-F5344CB8AC3E}">
         <p14:creationId xmlns:p14="http://schemas.microsoft.com/office/powerpoint/2010/main" val="2873219672"/>
+      </p:ext>
+    </p:extLst>
+  </p:cSld>
+  <p:clrMapOvr>
+    <a:masterClrMapping/>
+  </p:clrMapOvr>
+</p:sld>
+</file>
+
+<file path=ppt/slides/slide58.xml><?xml version="1.0" encoding="utf-8"?>
+<p:sld xmlns:a="http://schemas.openxmlformats.org/drawingml/2006/main" xmlns:r="http://schemas.openxmlformats.org/officeDocument/2006/relationships" xmlns:p="http://schemas.openxmlformats.org/presentationml/2006/main">
+  <p:cSld>
+    <p:spTree>
+      <p:nvGrpSpPr>
+        <p:cNvPr id="1" name="">
+          <a:extLst>
+            <a:ext uri="{FF2B5EF4-FFF2-40B4-BE49-F238E27FC236}">
+              <a16:creationId xmlns:a16="http://schemas.microsoft.com/office/drawing/2014/main" id="{F8DF18F1-CCC7-CDB4-D0E7-E00182D6C99A}"/>
+            </a:ext>
+          </a:extLst>
+        </p:cNvPr>
+        <p:cNvGrpSpPr/>
+        <p:nvPr/>
+      </p:nvGrpSpPr>
+      <p:grpSpPr>
+        <a:xfrm>
+          <a:off x="0" y="0"/>
+          <a:ext cx="0" cy="0"/>
+          <a:chOff x="0" y="0"/>
+          <a:chExt cx="0" cy="0"/>
+        </a:xfrm>
+      </p:grpSpPr>
+      <p:sp>
+        <p:nvSpPr>
+          <p:cNvPr id="2" name="Title 1">
+            <a:extLst>
+              <a:ext uri="{FF2B5EF4-FFF2-40B4-BE49-F238E27FC236}">
+                <a16:creationId xmlns:a16="http://schemas.microsoft.com/office/drawing/2014/main" id="{00B56891-AA74-F48F-1FC4-667A2169FCEE}"/>
+              </a:ext>
+            </a:extLst>
+          </p:cNvPr>
+          <p:cNvSpPr>
+            <a:spLocks noGrp="1"/>
+          </p:cNvSpPr>
+          <p:nvPr>
+            <p:ph type="title"/>
+          </p:nvPr>
+        </p:nvSpPr>
+        <p:spPr/>
+        <p:txBody>
+          <a:bodyPr/>
+          <a:lstStyle/>
+          <a:p>
+            <a:r>
+              <a:rPr lang="en-US" dirty="0"/>
+              <a:t>Choosing the Right Compute Service</a:t>
+            </a:r>
+          </a:p>
+        </p:txBody>
+      </p:sp>
+      <p:graphicFrame>
+        <p:nvGraphicFramePr>
+          <p:cNvPr id="4" name="Content Placeholder 3">
+            <a:extLst>
+              <a:ext uri="{FF2B5EF4-FFF2-40B4-BE49-F238E27FC236}">
+                <a16:creationId xmlns:a16="http://schemas.microsoft.com/office/drawing/2014/main" id="{09D2270A-56BB-6025-22B0-054C374A88CB}"/>
+              </a:ext>
+            </a:extLst>
+          </p:cNvPr>
+          <p:cNvGraphicFramePr>
+            <a:graphicFrameLocks noGrp="1"/>
+          </p:cNvGraphicFramePr>
+          <p:nvPr>
+            <p:ph idx="1"/>
+            <p:extLst>
+              <p:ext uri="{D42A27DB-BD31-4B8C-83A1-F6EECF244321}">
+                <p14:modId xmlns:p14="http://schemas.microsoft.com/office/powerpoint/2010/main" val="3362313320"/>
+              </p:ext>
+            </p:extLst>
+          </p:nvPr>
+        </p:nvGraphicFramePr>
+        <p:xfrm>
+          <a:off x="838200" y="1736940"/>
+          <a:ext cx="10515600" cy="1828800"/>
+        </p:xfrm>
+        <a:graphic>
+          <a:graphicData uri="http://schemas.openxmlformats.org/drawingml/2006/table">
+            <a:tbl>
+              <a:tblPr>
+                <a:tableStyleId>{5940675A-B579-460E-94D1-54222C63F5DA}</a:tableStyleId>
+              </a:tblPr>
+              <a:tblGrid>
+                <a:gridCol w="5257800">
+                  <a:extLst>
+                    <a:ext uri="{9D8B030D-6E8A-4147-A177-3AD203B41FA5}">
+                      <a16:colId xmlns:a16="http://schemas.microsoft.com/office/drawing/2014/main" val="845952524"/>
+                    </a:ext>
+                  </a:extLst>
+                </a:gridCol>
+                <a:gridCol w="5257800">
+                  <a:extLst>
+                    <a:ext uri="{9D8B030D-6E8A-4147-A177-3AD203B41FA5}">
+                      <a16:colId xmlns:a16="http://schemas.microsoft.com/office/drawing/2014/main" val="3616047850"/>
+                    </a:ext>
+                  </a:extLst>
+                </a:gridCol>
+              </a:tblGrid>
+              <a:tr h="0">
+                <a:tc>
+                  <a:txBody>
+                    <a:bodyPr/>
+                    <a:lstStyle/>
+                    <a:p>
+                      <a:pPr algn="ctr"/>
+                      <a:r>
+                        <a:rPr lang="en-US" b="1"/>
+                        <a:t>Scenario</a:t>
+                      </a:r>
+                    </a:p>
+                  </a:txBody>
+                  <a:tcPr anchor="ctr">
+                    <a:solidFill>
+                      <a:schemeClr val="bg1">
+                        <a:lumMod val="85000"/>
+                      </a:schemeClr>
+                    </a:solidFill>
+                  </a:tcPr>
+                </a:tc>
+                <a:tc>
+                  <a:txBody>
+                    <a:bodyPr/>
+                    <a:lstStyle/>
+                    <a:p>
+                      <a:pPr algn="ctr"/>
+                      <a:r>
+                        <a:rPr lang="en-US" b="1" dirty="0"/>
+                        <a:t>Recommended Service</a:t>
+                      </a:r>
+                    </a:p>
+                  </a:txBody>
+                  <a:tcPr anchor="ctr">
+                    <a:solidFill>
+                      <a:schemeClr val="bg1">
+                        <a:lumMod val="85000"/>
+                      </a:schemeClr>
+                    </a:solidFill>
+                  </a:tcPr>
+                </a:tc>
+                <a:extLst>
+                  <a:ext uri="{0D108BD9-81ED-4DB2-BD59-A6C34878D82A}">
+                    <a16:rowId xmlns:a16="http://schemas.microsoft.com/office/drawing/2014/main" val="1775167292"/>
+                  </a:ext>
+                </a:extLst>
+              </a:tr>
+              <a:tr h="0">
+                <a:tc>
+                  <a:txBody>
+                    <a:bodyPr/>
+                    <a:lstStyle/>
+                    <a:p>
+                      <a:r>
+                        <a:rPr lang="en-US"/>
+                        <a:t>Full control of server environment</a:t>
+                      </a:r>
+                    </a:p>
+                  </a:txBody>
+                  <a:tcPr anchor="ctr"/>
+                </a:tc>
+                <a:tc>
+                  <a:txBody>
+                    <a:bodyPr/>
+                    <a:lstStyle/>
+                    <a:p>
+                      <a:r>
+                        <a:rPr lang="en-US"/>
+                        <a:t>EC2</a:t>
+                      </a:r>
+                    </a:p>
+                  </a:txBody>
+                  <a:tcPr anchor="ctr"/>
+                </a:tc>
+                <a:extLst>
+                  <a:ext uri="{0D108BD9-81ED-4DB2-BD59-A6C34878D82A}">
+                    <a16:rowId xmlns:a16="http://schemas.microsoft.com/office/drawing/2014/main" val="1576351958"/>
+                  </a:ext>
+                </a:extLst>
+              </a:tr>
+              <a:tr h="0">
+                <a:tc>
+                  <a:txBody>
+                    <a:bodyPr/>
+                    <a:lstStyle/>
+                    <a:p>
+                      <a:r>
+                        <a:rPr lang="en-US"/>
+                        <a:t>Event-driven, serverless execution</a:t>
+                      </a:r>
+                    </a:p>
+                  </a:txBody>
+                  <a:tcPr anchor="ctr"/>
+                </a:tc>
+                <a:tc>
+                  <a:txBody>
+                    <a:bodyPr/>
+                    <a:lstStyle/>
+                    <a:p>
+                      <a:r>
+                        <a:rPr lang="en-US"/>
+                        <a:t>Lambda</a:t>
+                      </a:r>
+                    </a:p>
+                  </a:txBody>
+                  <a:tcPr anchor="ctr"/>
+                </a:tc>
+                <a:extLst>
+                  <a:ext uri="{0D108BD9-81ED-4DB2-BD59-A6C34878D82A}">
+                    <a16:rowId xmlns:a16="http://schemas.microsoft.com/office/drawing/2014/main" val="2996343622"/>
+                  </a:ext>
+                </a:extLst>
+              </a:tr>
+              <a:tr h="0">
+                <a:tc>
+                  <a:txBody>
+                    <a:bodyPr/>
+                    <a:lstStyle/>
+                    <a:p>
+                      <a:r>
+                        <a:rPr lang="en-US"/>
+                        <a:t>Microservices with Docker/Kubernetes</a:t>
+                      </a:r>
+                    </a:p>
+                  </a:txBody>
+                  <a:tcPr anchor="ctr"/>
+                </a:tc>
+                <a:tc>
+                  <a:txBody>
+                    <a:bodyPr/>
+                    <a:lstStyle/>
+                    <a:p>
+                      <a:r>
+                        <a:rPr lang="en-US"/>
+                        <a:t>ECS / EKS</a:t>
+                      </a:r>
+                    </a:p>
+                  </a:txBody>
+                  <a:tcPr anchor="ctr"/>
+                </a:tc>
+                <a:extLst>
+                  <a:ext uri="{0D108BD9-81ED-4DB2-BD59-A6C34878D82A}">
+                    <a16:rowId xmlns:a16="http://schemas.microsoft.com/office/drawing/2014/main" val="2843689802"/>
+                  </a:ext>
+                </a:extLst>
+              </a:tr>
+              <a:tr h="0">
+                <a:tc>
+                  <a:txBody>
+                    <a:bodyPr/>
+                    <a:lstStyle/>
+                    <a:p>
+                      <a:r>
+                        <a:rPr lang="en-US"/>
+                        <a:t>Managed deployment of web apps</a:t>
+                      </a:r>
+                    </a:p>
+                  </a:txBody>
+                  <a:tcPr anchor="ctr"/>
+                </a:tc>
+                <a:tc>
+                  <a:txBody>
+                    <a:bodyPr/>
+                    <a:lstStyle/>
+                    <a:p>
+                      <a:r>
+                        <a:rPr lang="en-US" dirty="0"/>
+                        <a:t>Elastic Beanstalk</a:t>
+                      </a:r>
+                    </a:p>
+                  </a:txBody>
+                  <a:tcPr anchor="ctr"/>
+                </a:tc>
+                <a:extLst>
+                  <a:ext uri="{0D108BD9-81ED-4DB2-BD59-A6C34878D82A}">
+                    <a16:rowId xmlns:a16="http://schemas.microsoft.com/office/drawing/2014/main" val="2408190899"/>
+                  </a:ext>
+                </a:extLst>
+              </a:tr>
+            </a:tbl>
+          </a:graphicData>
+        </a:graphic>
+      </p:graphicFrame>
+    </p:spTree>
+    <p:extLst>
+      <p:ext uri="{BB962C8B-B14F-4D97-AF65-F5344CB8AC3E}">
+        <p14:creationId xmlns:p14="http://schemas.microsoft.com/office/powerpoint/2010/main" val="3251816614"/>
+      </p:ext>
+    </p:extLst>
+  </p:cSld>
+  <p:clrMapOvr>
+    <a:masterClrMapping/>
+  </p:clrMapOvr>
+</p:sld>
+</file>
+
+<file path=ppt/slides/slide59.xml><?xml version="1.0" encoding="utf-8"?>
+<p:sld xmlns:a="http://schemas.openxmlformats.org/drawingml/2006/main" xmlns:r="http://schemas.openxmlformats.org/officeDocument/2006/relationships" xmlns:p="http://schemas.openxmlformats.org/presentationml/2006/main">
+  <p:cSld>
+    <p:spTree>
+      <p:nvGrpSpPr>
+        <p:cNvPr id="1" name=""/>
+        <p:cNvGrpSpPr/>
+        <p:nvPr/>
+      </p:nvGrpSpPr>
+      <p:grpSpPr>
+        <a:xfrm>
+          <a:off x="0" y="0"/>
+          <a:ext cx="0" cy="0"/>
+          <a:chOff x="0" y="0"/>
+          <a:chExt cx="0" cy="0"/>
+        </a:xfrm>
+      </p:grpSpPr>
+      <p:sp>
+        <p:nvSpPr>
+          <p:cNvPr id="4" name="Title 3">
+            <a:extLst>
+              <a:ext uri="{FF2B5EF4-FFF2-40B4-BE49-F238E27FC236}">
+                <a16:creationId xmlns:a16="http://schemas.microsoft.com/office/drawing/2014/main" id="{1CC20D07-049B-3CA8-2024-7EFEE66520CC}"/>
+              </a:ext>
+            </a:extLst>
+          </p:cNvPr>
+          <p:cNvSpPr>
+            <a:spLocks noGrp="1"/>
+          </p:cNvSpPr>
+          <p:nvPr>
+            <p:ph type="title"/>
+          </p:nvPr>
+        </p:nvSpPr>
+        <p:spPr/>
+        <p:txBody>
+          <a:bodyPr/>
+          <a:lstStyle/>
+          <a:p>
+            <a:r>
+              <a:rPr lang="en-US" dirty="0"/>
+              <a:t>AWS Storage Services</a:t>
+            </a:r>
+          </a:p>
+        </p:txBody>
+      </p:sp>
+      <p:sp>
+        <p:nvSpPr>
+          <p:cNvPr id="5" name="Text Placeholder 4">
+            <a:extLst>
+              <a:ext uri="{FF2B5EF4-FFF2-40B4-BE49-F238E27FC236}">
+                <a16:creationId xmlns:a16="http://schemas.microsoft.com/office/drawing/2014/main" id="{E28F8395-4487-BB5E-260B-942B3E07EE44}"/>
+              </a:ext>
+            </a:extLst>
+          </p:cNvPr>
+          <p:cNvSpPr>
+            <a:spLocks noGrp="1"/>
+          </p:cNvSpPr>
+          <p:nvPr>
+            <p:ph type="body" idx="1"/>
+          </p:nvPr>
+        </p:nvSpPr>
+        <p:spPr/>
+        <p:txBody>
+          <a:bodyPr/>
+          <a:lstStyle/>
+          <a:p>
+            <a:endParaRPr lang="en-US"/>
+          </a:p>
+        </p:txBody>
+      </p:sp>
+    </p:spTree>
+    <p:extLst>
+      <p:ext uri="{BB962C8B-B14F-4D97-AF65-F5344CB8AC3E}">
+        <p14:creationId xmlns:p14="http://schemas.microsoft.com/office/powerpoint/2010/main" val="4271525347"/>
       </p:ext>
     </p:extLst>
   </p:cSld>
@@ -29565,14 +30024,14 @@
             </a:ln>
             <a:extLst>
               <a:ext uri="{909E8E84-426E-40dd-AFC4-6F175D3DCCD1}">
-                <a14:hiddenFill xmlns="" xmlns:a14="http://schemas.microsoft.com/office/drawing/2010/main">
+                <a14:hiddenFill xmlns:a14="http://schemas.microsoft.com/office/drawing/2010/main" xmlns="">
                   <a:solidFill>
                     <a:srgbClr val="FFFFFF"/>
                   </a:solidFill>
                 </a14:hiddenFill>
               </a:ext>
               <a:ext uri="{91240B29-F687-4f45-9708-019B960494DF}">
-                <a14:hiddenLine xmlns="" xmlns:a14="http://schemas.microsoft.com/office/drawing/2010/main" w="9525">
+                <a14:hiddenLine xmlns:a14="http://schemas.microsoft.com/office/drawing/2010/main" xmlns="" w="9525">
                   <a:solidFill>
                     <a:srgbClr val="000000"/>
                   </a:solidFill>
@@ -29612,14 +30071,14 @@
             </a:ln>
             <a:extLst>
               <a:ext uri="{909E8E84-426E-40dd-AFC4-6F175D3DCCD1}">
-                <a14:hiddenFill xmlns="" xmlns:a14="http://schemas.microsoft.com/office/drawing/2010/main">
+                <a14:hiddenFill xmlns:a14="http://schemas.microsoft.com/office/drawing/2010/main" xmlns="">
                   <a:solidFill>
                     <a:srgbClr val="FFFFFF"/>
                   </a:solidFill>
                 </a14:hiddenFill>
               </a:ext>
               <a:ext uri="{91240B29-F687-4f45-9708-019B960494DF}">
-                <a14:hiddenLine xmlns="" xmlns:a14="http://schemas.microsoft.com/office/drawing/2010/main" w="9525">
+                <a14:hiddenLine xmlns:a14="http://schemas.microsoft.com/office/drawing/2010/main" xmlns="" w="9525">
                   <a:solidFill>
                     <a:srgbClr val="000000"/>
                   </a:solidFill>
@@ -29799,14 +30258,14 @@
             </a:ln>
             <a:extLst>
               <a:ext uri="{909E8E84-426E-40dd-AFC4-6F175D3DCCD1}">
-                <a14:hiddenFill xmlns="" xmlns:a14="http://schemas.microsoft.com/office/drawing/2010/main">
+                <a14:hiddenFill xmlns:a14="http://schemas.microsoft.com/office/drawing/2010/main" xmlns="">
                   <a:solidFill>
                     <a:srgbClr val="FFFFFF"/>
                   </a:solidFill>
                 </a14:hiddenFill>
               </a:ext>
               <a:ext uri="{91240B29-F687-4f45-9708-019B960494DF}">
-                <a14:hiddenLine xmlns="" xmlns:a14="http://schemas.microsoft.com/office/drawing/2010/main" w="9525">
+                <a14:hiddenLine xmlns:a14="http://schemas.microsoft.com/office/drawing/2010/main" xmlns="" w="9525">
                   <a:solidFill>
                     <a:srgbClr val="000000"/>
                   </a:solidFill>
@@ -29846,14 +30305,14 @@
             </a:ln>
             <a:extLst>
               <a:ext uri="{909E8E84-426E-40dd-AFC4-6F175D3DCCD1}">
-                <a14:hiddenFill xmlns="" xmlns:a14="http://schemas.microsoft.com/office/drawing/2010/main">
+                <a14:hiddenFill xmlns:a14="http://schemas.microsoft.com/office/drawing/2010/main" xmlns="">
                   <a:solidFill>
                     <a:srgbClr val="FFFFFF"/>
                   </a:solidFill>
                 </a14:hiddenFill>
               </a:ext>
               <a:ext uri="{91240B29-F687-4f45-9708-019B960494DF}">
-                <a14:hiddenLine xmlns="" xmlns:a14="http://schemas.microsoft.com/office/drawing/2010/main" w="9525">
+                <a14:hiddenLine xmlns:a14="http://schemas.microsoft.com/office/drawing/2010/main" xmlns="" w="9525">
                   <a:solidFill>
                     <a:srgbClr val="000000"/>
                   </a:solidFill>
@@ -30017,14 +30476,14 @@
             </a:ln>
             <a:extLst>
               <a:ext uri="{909E8E84-426E-40dd-AFC4-6F175D3DCCD1}">
-                <a14:hiddenFill xmlns="" xmlns:a14="http://schemas.microsoft.com/office/drawing/2010/main">
+                <a14:hiddenFill xmlns:a14="http://schemas.microsoft.com/office/drawing/2010/main" xmlns="">
                   <a:solidFill>
                     <a:srgbClr val="FFFFFF"/>
                   </a:solidFill>
                 </a14:hiddenFill>
               </a:ext>
               <a:ext uri="{91240B29-F687-4f45-9708-019B960494DF}">
-                <a14:hiddenLine xmlns="" xmlns:a14="http://schemas.microsoft.com/office/drawing/2010/main" w="9525">
+                <a14:hiddenLine xmlns:a14="http://schemas.microsoft.com/office/drawing/2010/main" xmlns="" w="9525">
                   <a:solidFill>
                     <a:srgbClr val="000000"/>
                   </a:solidFill>
@@ -30253,14 +30712,14 @@
             </a:ln>
             <a:extLst>
               <a:ext uri="{909E8E84-426E-40dd-AFC4-6F175D3DCCD1}">
-                <a14:hiddenFill xmlns="" xmlns:a14="http://schemas.microsoft.com/office/drawing/2010/main">
+                <a14:hiddenFill xmlns:a14="http://schemas.microsoft.com/office/drawing/2010/main" xmlns="">
                   <a:solidFill>
                     <a:srgbClr val="FFFFFF"/>
                   </a:solidFill>
                 </a14:hiddenFill>
               </a:ext>
               <a:ext uri="{91240B29-F687-4f45-9708-019B960494DF}">
-                <a14:hiddenLine xmlns="" xmlns:a14="http://schemas.microsoft.com/office/drawing/2010/main" w="9525">
+                <a14:hiddenLine xmlns:a14="http://schemas.microsoft.com/office/drawing/2010/main" xmlns="" w="9525">
                   <a:solidFill>
                     <a:srgbClr val="000000"/>
                   </a:solidFill>
@@ -30567,14 +31026,14 @@
             </a:ln>
             <a:extLst>
               <a:ext uri="{909E8E84-426E-40dd-AFC4-6F175D3DCCD1}">
-                <a14:hiddenFill xmlns="" xmlns:a14="http://schemas.microsoft.com/office/drawing/2010/main">
+                <a14:hiddenFill xmlns:a14="http://schemas.microsoft.com/office/drawing/2010/main" xmlns="">
                   <a:solidFill>
                     <a:srgbClr val="FFFFFF"/>
                   </a:solidFill>
                 </a14:hiddenFill>
               </a:ext>
               <a:ext uri="{91240B29-F687-4f45-9708-019B960494DF}">
-                <a14:hiddenLine xmlns="" xmlns:a14="http://schemas.microsoft.com/office/drawing/2010/main" w="9525">
+                <a14:hiddenLine xmlns:a14="http://schemas.microsoft.com/office/drawing/2010/main" xmlns="" w="9525">
                   <a:solidFill>
                     <a:srgbClr val="000000"/>
                   </a:solidFill>
@@ -30754,14 +31213,14 @@
             </a:ln>
             <a:extLst>
               <a:ext uri="{909E8E84-426E-40dd-AFC4-6F175D3DCCD1}">
-                <a14:hiddenFill xmlns="" xmlns:a14="http://schemas.microsoft.com/office/drawing/2010/main">
+                <a14:hiddenFill xmlns:a14="http://schemas.microsoft.com/office/drawing/2010/main" xmlns="">
                   <a:solidFill>
                     <a:srgbClr val="FFFFFF"/>
                   </a:solidFill>
                 </a14:hiddenFill>
               </a:ext>
               <a:ext uri="{91240B29-F687-4f45-9708-019B960494DF}">
-                <a14:hiddenLine xmlns="" xmlns:a14="http://schemas.microsoft.com/office/drawing/2010/main" w="9525">
+                <a14:hiddenLine xmlns:a14="http://schemas.microsoft.com/office/drawing/2010/main" xmlns="" w="9525">
                   <a:solidFill>
                     <a:srgbClr val="000000"/>
                   </a:solidFill>
@@ -30801,14 +31260,14 @@
             </a:ln>
             <a:extLst>
               <a:ext uri="{909E8E84-426E-40dd-AFC4-6F175D3DCCD1}">
-                <a14:hiddenFill xmlns="" xmlns:a14="http://schemas.microsoft.com/office/drawing/2010/main">
+                <a14:hiddenFill xmlns:a14="http://schemas.microsoft.com/office/drawing/2010/main" xmlns="">
                   <a:solidFill>
                     <a:srgbClr val="FFFFFF"/>
                   </a:solidFill>
                 </a14:hiddenFill>
               </a:ext>
               <a:ext uri="{91240B29-F687-4f45-9708-019B960494DF}">
-                <a14:hiddenLine xmlns="" xmlns:a14="http://schemas.microsoft.com/office/drawing/2010/main" w="9525">
+                <a14:hiddenLine xmlns:a14="http://schemas.microsoft.com/office/drawing/2010/main" xmlns="" w="9525">
                   <a:solidFill>
                     <a:srgbClr val="000000"/>
                   </a:solidFill>
@@ -30988,14 +31447,14 @@
             </a:ln>
             <a:extLst>
               <a:ext uri="{909E8E84-426E-40dd-AFC4-6F175D3DCCD1}">
-                <a14:hiddenFill xmlns="" xmlns:a14="http://schemas.microsoft.com/office/drawing/2010/main">
+                <a14:hiddenFill xmlns:a14="http://schemas.microsoft.com/office/drawing/2010/main" xmlns="">
                   <a:solidFill>
                     <a:srgbClr val="FFFFFF"/>
                   </a:solidFill>
                 </a14:hiddenFill>
               </a:ext>
               <a:ext uri="{91240B29-F687-4f45-9708-019B960494DF}">
-                <a14:hiddenLine xmlns="" xmlns:a14="http://schemas.microsoft.com/office/drawing/2010/main" w="9525">
+                <a14:hiddenLine xmlns:a14="http://schemas.microsoft.com/office/drawing/2010/main" xmlns="" w="9525">
                   <a:solidFill>
                     <a:srgbClr val="000000"/>
                   </a:solidFill>
@@ -31035,14 +31494,14 @@
             </a:ln>
             <a:extLst>
               <a:ext uri="{909E8E84-426E-40dd-AFC4-6F175D3DCCD1}">
-                <a14:hiddenFill xmlns="" xmlns:a14="http://schemas.microsoft.com/office/drawing/2010/main">
+                <a14:hiddenFill xmlns:a14="http://schemas.microsoft.com/office/drawing/2010/main" xmlns="">
                   <a:solidFill>
                     <a:srgbClr val="FFFFFF"/>
                   </a:solidFill>
                 </a14:hiddenFill>
               </a:ext>
               <a:ext uri="{91240B29-F687-4f45-9708-019B960494DF}">
-                <a14:hiddenLine xmlns="" xmlns:a14="http://schemas.microsoft.com/office/drawing/2010/main" w="9525">
+                <a14:hiddenLine xmlns:a14="http://schemas.microsoft.com/office/drawing/2010/main" xmlns="" w="9525">
                   <a:solidFill>
                     <a:srgbClr val="000000"/>
                   </a:solidFill>
@@ -31496,14 +31955,14 @@
             </a:ln>
             <a:extLst>
               <a:ext uri="{909E8E84-426E-40dd-AFC4-6F175D3DCCD1}">
-                <a14:hiddenFill xmlns="" xmlns:a14="http://schemas.microsoft.com/office/drawing/2010/main">
+                <a14:hiddenFill xmlns:a14="http://schemas.microsoft.com/office/drawing/2010/main" xmlns="">
                   <a:solidFill>
                     <a:srgbClr val="FFFFFF"/>
                   </a:solidFill>
                 </a14:hiddenFill>
               </a:ext>
               <a:ext uri="{91240B29-F687-4f45-9708-019B960494DF}">
-                <a14:hiddenLine xmlns="" xmlns:a14="http://schemas.microsoft.com/office/drawing/2010/main" w="9525">
+                <a14:hiddenLine xmlns:a14="http://schemas.microsoft.com/office/drawing/2010/main" xmlns="" w="9525">
                   <a:solidFill>
                     <a:srgbClr val="000000"/>
                   </a:solidFill>
@@ -33829,383 +34288,6 @@
         <p:cNvPr id="1" name="">
           <a:extLst>
             <a:ext uri="{FF2B5EF4-FFF2-40B4-BE49-F238E27FC236}">
-              <a16:creationId xmlns:a16="http://schemas.microsoft.com/office/drawing/2014/main" id="{F8DF18F1-CCC7-CDB4-D0E7-E00182D6C99A}"/>
-            </a:ext>
-          </a:extLst>
-        </p:cNvPr>
-        <p:cNvGrpSpPr/>
-        <p:nvPr/>
-      </p:nvGrpSpPr>
-      <p:grpSpPr>
-        <a:xfrm>
-          <a:off x="0" y="0"/>
-          <a:ext cx="0" cy="0"/>
-          <a:chOff x="0" y="0"/>
-          <a:chExt cx="0" cy="0"/>
-        </a:xfrm>
-      </p:grpSpPr>
-      <p:sp>
-        <p:nvSpPr>
-          <p:cNvPr id="2" name="Title 1">
-            <a:extLst>
-              <a:ext uri="{FF2B5EF4-FFF2-40B4-BE49-F238E27FC236}">
-                <a16:creationId xmlns:a16="http://schemas.microsoft.com/office/drawing/2014/main" id="{00B56891-AA74-F48F-1FC4-667A2169FCEE}"/>
-              </a:ext>
-            </a:extLst>
-          </p:cNvPr>
-          <p:cNvSpPr>
-            <a:spLocks noGrp="1"/>
-          </p:cNvSpPr>
-          <p:nvPr>
-            <p:ph type="title"/>
-          </p:nvPr>
-        </p:nvSpPr>
-        <p:spPr/>
-        <p:txBody>
-          <a:bodyPr/>
-          <a:lstStyle/>
-          <a:p>
-            <a:r>
-              <a:rPr lang="en-US" dirty="0"/>
-              <a:t>Choosing the Right Compute Service</a:t>
-            </a:r>
-          </a:p>
-        </p:txBody>
-      </p:sp>
-      <p:graphicFrame>
-        <p:nvGraphicFramePr>
-          <p:cNvPr id="4" name="Content Placeholder 3">
-            <a:extLst>
-              <a:ext uri="{FF2B5EF4-FFF2-40B4-BE49-F238E27FC236}">
-                <a16:creationId xmlns:a16="http://schemas.microsoft.com/office/drawing/2014/main" id="{09D2270A-56BB-6025-22B0-054C374A88CB}"/>
-              </a:ext>
-            </a:extLst>
-          </p:cNvPr>
-          <p:cNvGraphicFramePr>
-            <a:graphicFrameLocks noGrp="1"/>
-          </p:cNvGraphicFramePr>
-          <p:nvPr>
-            <p:ph idx="1"/>
-            <p:extLst>
-              <p:ext uri="{D42A27DB-BD31-4B8C-83A1-F6EECF244321}">
-                <p14:modId xmlns:p14="http://schemas.microsoft.com/office/powerpoint/2010/main" val="3362313320"/>
-              </p:ext>
-            </p:extLst>
-          </p:nvPr>
-        </p:nvGraphicFramePr>
-        <p:xfrm>
-          <a:off x="838200" y="1736940"/>
-          <a:ext cx="10515600" cy="1828800"/>
-        </p:xfrm>
-        <a:graphic>
-          <a:graphicData uri="http://schemas.openxmlformats.org/drawingml/2006/table">
-            <a:tbl>
-              <a:tblPr>
-                <a:tableStyleId>{5940675A-B579-460E-94D1-54222C63F5DA}</a:tableStyleId>
-              </a:tblPr>
-              <a:tblGrid>
-                <a:gridCol w="5257800">
-                  <a:extLst>
-                    <a:ext uri="{9D8B030D-6E8A-4147-A177-3AD203B41FA5}">
-                      <a16:colId xmlns:a16="http://schemas.microsoft.com/office/drawing/2014/main" val="845952524"/>
-                    </a:ext>
-                  </a:extLst>
-                </a:gridCol>
-                <a:gridCol w="5257800">
-                  <a:extLst>
-                    <a:ext uri="{9D8B030D-6E8A-4147-A177-3AD203B41FA5}">
-                      <a16:colId xmlns:a16="http://schemas.microsoft.com/office/drawing/2014/main" val="3616047850"/>
-                    </a:ext>
-                  </a:extLst>
-                </a:gridCol>
-              </a:tblGrid>
-              <a:tr h="0">
-                <a:tc>
-                  <a:txBody>
-                    <a:bodyPr/>
-                    <a:lstStyle/>
-                    <a:p>
-                      <a:pPr algn="ctr"/>
-                      <a:r>
-                        <a:rPr lang="en-US" b="1"/>
-                        <a:t>Scenario</a:t>
-                      </a:r>
-                    </a:p>
-                  </a:txBody>
-                  <a:tcPr anchor="ctr">
-                    <a:solidFill>
-                      <a:schemeClr val="bg1">
-                        <a:lumMod val="85000"/>
-                      </a:schemeClr>
-                    </a:solidFill>
-                  </a:tcPr>
-                </a:tc>
-                <a:tc>
-                  <a:txBody>
-                    <a:bodyPr/>
-                    <a:lstStyle/>
-                    <a:p>
-                      <a:pPr algn="ctr"/>
-                      <a:r>
-                        <a:rPr lang="en-US" b="1" dirty="0"/>
-                        <a:t>Recommended Service</a:t>
-                      </a:r>
-                    </a:p>
-                  </a:txBody>
-                  <a:tcPr anchor="ctr">
-                    <a:solidFill>
-                      <a:schemeClr val="bg1">
-                        <a:lumMod val="85000"/>
-                      </a:schemeClr>
-                    </a:solidFill>
-                  </a:tcPr>
-                </a:tc>
-                <a:extLst>
-                  <a:ext uri="{0D108BD9-81ED-4DB2-BD59-A6C34878D82A}">
-                    <a16:rowId xmlns:a16="http://schemas.microsoft.com/office/drawing/2014/main" val="1775167292"/>
-                  </a:ext>
-                </a:extLst>
-              </a:tr>
-              <a:tr h="0">
-                <a:tc>
-                  <a:txBody>
-                    <a:bodyPr/>
-                    <a:lstStyle/>
-                    <a:p>
-                      <a:r>
-                        <a:rPr lang="en-US"/>
-                        <a:t>Full control of server environment</a:t>
-                      </a:r>
-                    </a:p>
-                  </a:txBody>
-                  <a:tcPr anchor="ctr"/>
-                </a:tc>
-                <a:tc>
-                  <a:txBody>
-                    <a:bodyPr/>
-                    <a:lstStyle/>
-                    <a:p>
-                      <a:r>
-                        <a:rPr lang="en-US"/>
-                        <a:t>EC2</a:t>
-                      </a:r>
-                    </a:p>
-                  </a:txBody>
-                  <a:tcPr anchor="ctr"/>
-                </a:tc>
-                <a:extLst>
-                  <a:ext uri="{0D108BD9-81ED-4DB2-BD59-A6C34878D82A}">
-                    <a16:rowId xmlns:a16="http://schemas.microsoft.com/office/drawing/2014/main" val="1576351958"/>
-                  </a:ext>
-                </a:extLst>
-              </a:tr>
-              <a:tr h="0">
-                <a:tc>
-                  <a:txBody>
-                    <a:bodyPr/>
-                    <a:lstStyle/>
-                    <a:p>
-                      <a:r>
-                        <a:rPr lang="en-US"/>
-                        <a:t>Event-driven, serverless execution</a:t>
-                      </a:r>
-                    </a:p>
-                  </a:txBody>
-                  <a:tcPr anchor="ctr"/>
-                </a:tc>
-                <a:tc>
-                  <a:txBody>
-                    <a:bodyPr/>
-                    <a:lstStyle/>
-                    <a:p>
-                      <a:r>
-                        <a:rPr lang="en-US"/>
-                        <a:t>Lambda</a:t>
-                      </a:r>
-                    </a:p>
-                  </a:txBody>
-                  <a:tcPr anchor="ctr"/>
-                </a:tc>
-                <a:extLst>
-                  <a:ext uri="{0D108BD9-81ED-4DB2-BD59-A6C34878D82A}">
-                    <a16:rowId xmlns:a16="http://schemas.microsoft.com/office/drawing/2014/main" val="2996343622"/>
-                  </a:ext>
-                </a:extLst>
-              </a:tr>
-              <a:tr h="0">
-                <a:tc>
-                  <a:txBody>
-                    <a:bodyPr/>
-                    <a:lstStyle/>
-                    <a:p>
-                      <a:r>
-                        <a:rPr lang="en-US"/>
-                        <a:t>Microservices with Docker/Kubernetes</a:t>
-                      </a:r>
-                    </a:p>
-                  </a:txBody>
-                  <a:tcPr anchor="ctr"/>
-                </a:tc>
-                <a:tc>
-                  <a:txBody>
-                    <a:bodyPr/>
-                    <a:lstStyle/>
-                    <a:p>
-                      <a:r>
-                        <a:rPr lang="en-US"/>
-                        <a:t>ECS / EKS</a:t>
-                      </a:r>
-                    </a:p>
-                  </a:txBody>
-                  <a:tcPr anchor="ctr"/>
-                </a:tc>
-                <a:extLst>
-                  <a:ext uri="{0D108BD9-81ED-4DB2-BD59-A6C34878D82A}">
-                    <a16:rowId xmlns:a16="http://schemas.microsoft.com/office/drawing/2014/main" val="2843689802"/>
-                  </a:ext>
-                </a:extLst>
-              </a:tr>
-              <a:tr h="0">
-                <a:tc>
-                  <a:txBody>
-                    <a:bodyPr/>
-                    <a:lstStyle/>
-                    <a:p>
-                      <a:r>
-                        <a:rPr lang="en-US"/>
-                        <a:t>Managed deployment of web apps</a:t>
-                      </a:r>
-                    </a:p>
-                  </a:txBody>
-                  <a:tcPr anchor="ctr"/>
-                </a:tc>
-                <a:tc>
-                  <a:txBody>
-                    <a:bodyPr/>
-                    <a:lstStyle/>
-                    <a:p>
-                      <a:r>
-                        <a:rPr lang="en-US" dirty="0"/>
-                        <a:t>Elastic Beanstalk</a:t>
-                      </a:r>
-                    </a:p>
-                  </a:txBody>
-                  <a:tcPr anchor="ctr"/>
-                </a:tc>
-                <a:extLst>
-                  <a:ext uri="{0D108BD9-81ED-4DB2-BD59-A6C34878D82A}">
-                    <a16:rowId xmlns:a16="http://schemas.microsoft.com/office/drawing/2014/main" val="2408190899"/>
-                  </a:ext>
-                </a:extLst>
-              </a:tr>
-            </a:tbl>
-          </a:graphicData>
-        </a:graphic>
-      </p:graphicFrame>
-    </p:spTree>
-    <p:extLst>
-      <p:ext uri="{BB962C8B-B14F-4D97-AF65-F5344CB8AC3E}">
-        <p14:creationId xmlns:p14="http://schemas.microsoft.com/office/powerpoint/2010/main" val="3251816614"/>
-      </p:ext>
-    </p:extLst>
-  </p:cSld>
-  <p:clrMapOvr>
-    <a:masterClrMapping/>
-  </p:clrMapOvr>
-</p:sld>
-</file>
-
-<file path=ppt/slides/slide61.xml><?xml version="1.0" encoding="utf-8"?>
-<p:sld xmlns:a="http://schemas.openxmlformats.org/drawingml/2006/main" xmlns:r="http://schemas.openxmlformats.org/officeDocument/2006/relationships" xmlns:p="http://schemas.openxmlformats.org/presentationml/2006/main">
-  <p:cSld>
-    <p:spTree>
-      <p:nvGrpSpPr>
-        <p:cNvPr id="1" name=""/>
-        <p:cNvGrpSpPr/>
-        <p:nvPr/>
-      </p:nvGrpSpPr>
-      <p:grpSpPr>
-        <a:xfrm>
-          <a:off x="0" y="0"/>
-          <a:ext cx="0" cy="0"/>
-          <a:chOff x="0" y="0"/>
-          <a:chExt cx="0" cy="0"/>
-        </a:xfrm>
-      </p:grpSpPr>
-      <p:sp>
-        <p:nvSpPr>
-          <p:cNvPr id="4" name="Title 3">
-            <a:extLst>
-              <a:ext uri="{FF2B5EF4-FFF2-40B4-BE49-F238E27FC236}">
-                <a16:creationId xmlns:a16="http://schemas.microsoft.com/office/drawing/2014/main" id="{1CC20D07-049B-3CA8-2024-7EFEE66520CC}"/>
-              </a:ext>
-            </a:extLst>
-          </p:cNvPr>
-          <p:cNvSpPr>
-            <a:spLocks noGrp="1"/>
-          </p:cNvSpPr>
-          <p:nvPr>
-            <p:ph type="title"/>
-          </p:nvPr>
-        </p:nvSpPr>
-        <p:spPr/>
-        <p:txBody>
-          <a:bodyPr/>
-          <a:lstStyle/>
-          <a:p>
-            <a:r>
-              <a:rPr lang="en-US" dirty="0"/>
-              <a:t>AWS Storage Services</a:t>
-            </a:r>
-          </a:p>
-        </p:txBody>
-      </p:sp>
-      <p:sp>
-        <p:nvSpPr>
-          <p:cNvPr id="5" name="Text Placeholder 4">
-            <a:extLst>
-              <a:ext uri="{FF2B5EF4-FFF2-40B4-BE49-F238E27FC236}">
-                <a16:creationId xmlns:a16="http://schemas.microsoft.com/office/drawing/2014/main" id="{E28F8395-4487-BB5E-260B-942B3E07EE44}"/>
-              </a:ext>
-            </a:extLst>
-          </p:cNvPr>
-          <p:cNvSpPr>
-            <a:spLocks noGrp="1"/>
-          </p:cNvSpPr>
-          <p:nvPr>
-            <p:ph type="body" idx="1"/>
-          </p:nvPr>
-        </p:nvSpPr>
-        <p:spPr/>
-        <p:txBody>
-          <a:bodyPr/>
-          <a:lstStyle/>
-          <a:p>
-            <a:endParaRPr lang="en-US"/>
-          </a:p>
-        </p:txBody>
-      </p:sp>
-    </p:spTree>
-    <p:extLst>
-      <p:ext uri="{BB962C8B-B14F-4D97-AF65-F5344CB8AC3E}">
-        <p14:creationId xmlns:p14="http://schemas.microsoft.com/office/powerpoint/2010/main" val="4271525347"/>
-      </p:ext>
-    </p:extLst>
-  </p:cSld>
-  <p:clrMapOvr>
-    <a:masterClrMapping/>
-  </p:clrMapOvr>
-</p:sld>
-</file>
-
-<file path=ppt/slides/slide62.xml><?xml version="1.0" encoding="utf-8"?>
-<p:sld xmlns:a="http://schemas.openxmlformats.org/drawingml/2006/main" xmlns:r="http://schemas.openxmlformats.org/officeDocument/2006/relationships" xmlns:p="http://schemas.openxmlformats.org/presentationml/2006/main">
-  <p:cSld>
-    <p:spTree>
-      <p:nvGrpSpPr>
-        <p:cNvPr id="1" name="">
-          <a:extLst>
-            <a:ext uri="{FF2B5EF4-FFF2-40B4-BE49-F238E27FC236}">
               <a16:creationId xmlns:a16="http://schemas.microsoft.com/office/drawing/2014/main" id="{F13FC89D-6053-BA0E-036B-C19FAAD8E556}"/>
             </a:ext>
           </a:extLst>
@@ -34348,7 +34430,7 @@
 </p:sld>
 </file>
 
-<file path=ppt/slides/slide63.xml><?xml version="1.0" encoding="utf-8"?>
+<file path=ppt/slides/slide61.xml><?xml version="1.0" encoding="utf-8"?>
 <p:sld xmlns:a="http://schemas.openxmlformats.org/drawingml/2006/main" xmlns:r="http://schemas.openxmlformats.org/officeDocument/2006/relationships" xmlns:p="http://schemas.openxmlformats.org/presentationml/2006/main">
   <p:cSld>
     <p:spTree>
@@ -34409,14 +34491,14 @@
             <p:ph idx="1"/>
             <p:extLst>
               <p:ext uri="{D42A27DB-BD31-4B8C-83A1-F6EECF244321}">
-                <p14:modId xmlns:p14="http://schemas.microsoft.com/office/powerpoint/2010/main" val="2388727247"/>
+                <p14:modId xmlns:p14="http://schemas.microsoft.com/office/powerpoint/2010/main" val="759163131"/>
               </p:ext>
             </p:extLst>
           </p:nvPr>
         </p:nvGraphicFramePr>
         <p:xfrm>
           <a:off x="838200" y="1782660"/>
-          <a:ext cx="10515600" cy="2651760"/>
+          <a:ext cx="10515600" cy="1828800"/>
         </p:xfrm>
         <a:graphic>
           <a:graphicData uri="http://schemas.openxmlformats.org/drawingml/2006/table">
@@ -34425,21 +34507,21 @@
                 <a:tableStyleId>{616DA210-FB5B-4158-B5E0-FEB733F419BA}</a:tableStyleId>
               </a:tblPr>
               <a:tblGrid>
-                <a:gridCol w="3505200">
+                <a:gridCol w="2687515">
                   <a:extLst>
                     <a:ext uri="{9D8B030D-6E8A-4147-A177-3AD203B41FA5}">
                       <a16:colId xmlns:a16="http://schemas.microsoft.com/office/drawing/2014/main" val="1238720545"/>
                     </a:ext>
                   </a:extLst>
                 </a:gridCol>
-                <a:gridCol w="3505200">
+                <a:gridCol w="3842239">
                   <a:extLst>
                     <a:ext uri="{9D8B030D-6E8A-4147-A177-3AD203B41FA5}">
                       <a16:colId xmlns:a16="http://schemas.microsoft.com/office/drawing/2014/main" val="3538510407"/>
                     </a:ext>
                   </a:extLst>
                 </a:gridCol>
-                <a:gridCol w="3505200">
+                <a:gridCol w="3985846">
                   <a:extLst>
                     <a:ext uri="{9D8B030D-6E8A-4147-A177-3AD203B41FA5}">
                       <a16:colId xmlns:a16="http://schemas.microsoft.com/office/drawing/2014/main" val="655437045"/>
@@ -34719,7 +34801,7 @@
 </p:sld>
 </file>
 
-<file path=ppt/slides/slide64.xml><?xml version="1.0" encoding="utf-8"?>
+<file path=ppt/slides/slide62.xml><?xml version="1.0" encoding="utf-8"?>
 <p:sld xmlns:a="http://schemas.openxmlformats.org/drawingml/2006/main" xmlns:r="http://schemas.openxmlformats.org/officeDocument/2006/relationships" xmlns:p="http://schemas.openxmlformats.org/presentationml/2006/main">
   <p:cSld>
     <p:spTree>
@@ -34789,11 +34871,19 @@
               <a:buNone/>
             </a:pPr>
             <a:r>
-              <a:rPr lang="en-US" b="1" dirty="0"/>
+              <a:rPr lang="en-US" b="1" dirty="0">
+                <a:solidFill>
+                  <a:srgbClr val="00B050"/>
+                </a:solidFill>
+              </a:rPr>
               <a:t>Amazon Simple Storage Service (S3)</a:t>
             </a:r>
             <a:r>
-              <a:rPr lang="en-US" dirty="0"/>
+              <a:rPr lang="en-US" dirty="0">
+                <a:solidFill>
+                  <a:srgbClr val="00B050"/>
+                </a:solidFill>
+              </a:rPr>
               <a:t> is AWS’s core object storage service.</a:t>
             </a:r>
           </a:p>
@@ -34885,7 +34975,7 @@
 </p:sld>
 </file>
 
-<file path=ppt/slides/slide65.xml><?xml version="1.0" encoding="utf-8"?>
+<file path=ppt/slides/slide63.xml><?xml version="1.0" encoding="utf-8"?>
 <p:sld xmlns:a="http://schemas.openxmlformats.org/drawingml/2006/main" xmlns:r="http://schemas.openxmlformats.org/officeDocument/2006/relationships" xmlns:p="http://schemas.openxmlformats.org/presentationml/2006/main">
   <p:cSld>
     <p:spTree>
@@ -34955,11 +35045,19 @@
               <a:buNone/>
             </a:pPr>
             <a:r>
-              <a:rPr lang="en-US" b="1" dirty="0"/>
+              <a:rPr lang="en-US" b="1" dirty="0">
+                <a:solidFill>
+                  <a:srgbClr val="00B050"/>
+                </a:solidFill>
+              </a:rPr>
               <a:t>Amazon Elastic Block Store (EBS)</a:t>
             </a:r>
             <a:r>
-              <a:rPr lang="en-US" dirty="0"/>
+              <a:rPr lang="en-US" dirty="0">
+                <a:solidFill>
+                  <a:srgbClr val="00B050"/>
+                </a:solidFill>
+              </a:rPr>
               <a:t> provides persistent block storage for EC2.</a:t>
             </a:r>
           </a:p>
@@ -35061,7 +35159,7 @@
 </p:sld>
 </file>
 
-<file path=ppt/slides/slide66.xml><?xml version="1.0" encoding="utf-8"?>
+<file path=ppt/slides/slide64.xml><?xml version="1.0" encoding="utf-8"?>
 <p:sld xmlns:a="http://schemas.openxmlformats.org/drawingml/2006/main" xmlns:r="http://schemas.openxmlformats.org/officeDocument/2006/relationships" xmlns:p="http://schemas.openxmlformats.org/presentationml/2006/main">
   <p:cSld>
     <p:spTree>
@@ -35138,11 +35236,19 @@
               <a:buNone/>
             </a:pPr>
             <a:r>
-              <a:rPr lang="en-US" b="1" dirty="0"/>
+              <a:rPr lang="en-US" b="1" dirty="0">
+                <a:solidFill>
+                  <a:srgbClr val="00B050"/>
+                </a:solidFill>
+              </a:rPr>
               <a:t>Amazon Elastic File System (EFS)</a:t>
             </a:r>
             <a:r>
-              <a:rPr lang="en-US" dirty="0"/>
+              <a:rPr lang="en-US" dirty="0">
+                <a:solidFill>
+                  <a:srgbClr val="00B050"/>
+                </a:solidFill>
+              </a:rPr>
               <a:t> provides a scalable and elastic network file system.</a:t>
             </a:r>
           </a:p>
@@ -35234,7 +35340,7 @@
 </p:sld>
 </file>
 
-<file path=ppt/slides/slide67.xml><?xml version="1.0" encoding="utf-8"?>
+<file path=ppt/slides/slide65.xml><?xml version="1.0" encoding="utf-8"?>
 <p:sld xmlns:a="http://schemas.openxmlformats.org/drawingml/2006/main" xmlns:r="http://schemas.openxmlformats.org/officeDocument/2006/relationships" xmlns:p="http://schemas.openxmlformats.org/presentationml/2006/main">
   <p:cSld>
     <p:spTree>
@@ -35306,11 +35412,19 @@
               <a:buNone/>
             </a:pPr>
             <a:r>
-              <a:rPr lang="en-US" b="1" dirty="0"/>
+              <a:rPr lang="en-US" b="1" dirty="0">
+                <a:solidFill>
+                  <a:srgbClr val="00B050"/>
+                </a:solidFill>
+              </a:rPr>
               <a:t>S3 Glacier</a:t>
             </a:r>
             <a:r>
-              <a:rPr lang="en-US" dirty="0"/>
+              <a:rPr lang="en-US" dirty="0">
+                <a:solidFill>
+                  <a:srgbClr val="00B050"/>
+                </a:solidFill>
+              </a:rPr>
               <a:t> is designed for long-term, infrequently accessed data.</a:t>
             </a:r>
           </a:p>
@@ -35412,7 +35526,7 @@
 </p:sld>
 </file>
 
-<file path=ppt/slides/slide68.xml><?xml version="1.0" encoding="utf-8"?>
+<file path=ppt/slides/slide66.xml><?xml version="1.0" encoding="utf-8"?>
 <p:sld xmlns:a="http://schemas.openxmlformats.org/drawingml/2006/main" xmlns:r="http://schemas.openxmlformats.org/officeDocument/2006/relationships" xmlns:p="http://schemas.openxmlformats.org/presentationml/2006/main">
   <p:cSld>
     <p:spTree>
@@ -35473,7 +35587,7 @@
             <p:ph idx="1"/>
             <p:extLst>
               <p:ext uri="{D42A27DB-BD31-4B8C-83A1-F6EECF244321}">
-                <p14:modId xmlns:p14="http://schemas.microsoft.com/office/powerpoint/2010/main" val="3382228129"/>
+                <p14:modId xmlns:p14="http://schemas.microsoft.com/office/powerpoint/2010/main" val="1535958735"/>
               </p:ext>
             </p:extLst>
           </p:nvPr>
@@ -35489,14 +35603,14 @@
                 <a:tableStyleId>{616DA210-FB5B-4158-B5E0-FEB733F419BA}</a:tableStyleId>
               </a:tblPr>
               <a:tblGrid>
-                <a:gridCol w="3505200">
+                <a:gridCol w="3144715">
                   <a:extLst>
                     <a:ext uri="{9D8B030D-6E8A-4147-A177-3AD203B41FA5}">
                       <a16:colId xmlns:a16="http://schemas.microsoft.com/office/drawing/2014/main" val="2110713711"/>
                     </a:ext>
                   </a:extLst>
                 </a:gridCol>
-                <a:gridCol w="3505200">
+                <a:gridCol w="3865685">
                   <a:extLst>
                     <a:ext uri="{9D8B030D-6E8A-4147-A177-3AD203B41FA5}">
                       <a16:colId xmlns:a16="http://schemas.microsoft.com/office/drawing/2014/main" val="3536290999"/>
@@ -35825,7 +35939,7 @@
 </p:sld>
 </file>
 
-<file path=ppt/slides/slide69.xml><?xml version="1.0" encoding="utf-8"?>
+<file path=ppt/slides/slide67.xml><?xml version="1.0" encoding="utf-8"?>
 <p:sld xmlns:a="http://schemas.openxmlformats.org/drawingml/2006/main" xmlns:r="http://schemas.openxmlformats.org/officeDocument/2006/relationships" xmlns:p="http://schemas.openxmlformats.org/presentationml/2006/main">
   <p:cSld>
     <p:spTree>
@@ -35943,6 +36057,223 @@
     <p:extLst>
       <p:ext uri="{BB962C8B-B14F-4D97-AF65-F5344CB8AC3E}">
         <p14:creationId xmlns:p14="http://schemas.microsoft.com/office/powerpoint/2010/main" val="2123342641"/>
+      </p:ext>
+    </p:extLst>
+  </p:cSld>
+  <p:clrMapOvr>
+    <a:masterClrMapping/>
+  </p:clrMapOvr>
+</p:sld>
+</file>
+
+<file path=ppt/slides/slide68.xml><?xml version="1.0" encoding="utf-8"?>
+<p:sld xmlns:a="http://schemas.openxmlformats.org/drawingml/2006/main" xmlns:r="http://schemas.openxmlformats.org/officeDocument/2006/relationships" xmlns:p="http://schemas.openxmlformats.org/presentationml/2006/main">
+  <p:cSld>
+    <p:spTree>
+      <p:nvGrpSpPr>
+        <p:cNvPr id="1" name=""/>
+        <p:cNvGrpSpPr/>
+        <p:nvPr/>
+      </p:nvGrpSpPr>
+      <p:grpSpPr>
+        <a:xfrm>
+          <a:off x="0" y="0"/>
+          <a:ext cx="0" cy="0"/>
+          <a:chOff x="0" y="0"/>
+          <a:chExt cx="0" cy="0"/>
+        </a:xfrm>
+      </p:grpSpPr>
+      <p:sp>
+        <p:nvSpPr>
+          <p:cNvPr id="4" name="Title 3">
+            <a:extLst>
+              <a:ext uri="{FF2B5EF4-FFF2-40B4-BE49-F238E27FC236}">
+                <a16:creationId xmlns:a16="http://schemas.microsoft.com/office/drawing/2014/main" id="{B6361DCE-9F98-18A5-0475-F8810E47C24B}"/>
+              </a:ext>
+            </a:extLst>
+          </p:cNvPr>
+          <p:cNvSpPr>
+            <a:spLocks noGrp="1"/>
+          </p:cNvSpPr>
+          <p:nvPr>
+            <p:ph type="title"/>
+          </p:nvPr>
+        </p:nvSpPr>
+        <p:spPr/>
+        <p:txBody>
+          <a:bodyPr/>
+          <a:lstStyle/>
+          <a:p>
+            <a:r>
+              <a:rPr lang="en-US" dirty="0"/>
+              <a:t>AWS Database Services</a:t>
+            </a:r>
+          </a:p>
+        </p:txBody>
+      </p:sp>
+      <p:sp>
+        <p:nvSpPr>
+          <p:cNvPr id="5" name="Text Placeholder 4">
+            <a:extLst>
+              <a:ext uri="{FF2B5EF4-FFF2-40B4-BE49-F238E27FC236}">
+                <a16:creationId xmlns:a16="http://schemas.microsoft.com/office/drawing/2014/main" id="{76A40532-959C-3105-EFD7-0C54F8096952}"/>
+              </a:ext>
+            </a:extLst>
+          </p:cNvPr>
+          <p:cNvSpPr>
+            <a:spLocks noGrp="1"/>
+          </p:cNvSpPr>
+          <p:nvPr>
+            <p:ph type="body" idx="1"/>
+          </p:nvPr>
+        </p:nvSpPr>
+        <p:spPr/>
+        <p:txBody>
+          <a:bodyPr/>
+          <a:lstStyle/>
+          <a:p>
+            <a:endParaRPr lang="en-US"/>
+          </a:p>
+        </p:txBody>
+      </p:sp>
+    </p:spTree>
+    <p:extLst>
+      <p:ext uri="{BB962C8B-B14F-4D97-AF65-F5344CB8AC3E}">
+        <p14:creationId xmlns:p14="http://schemas.microsoft.com/office/powerpoint/2010/main" val="2278083572"/>
+      </p:ext>
+    </p:extLst>
+  </p:cSld>
+  <p:clrMapOvr>
+    <a:masterClrMapping/>
+  </p:clrMapOvr>
+</p:sld>
+</file>
+
+<file path=ppt/slides/slide69.xml><?xml version="1.0" encoding="utf-8"?>
+<p:sld xmlns:a="http://schemas.openxmlformats.org/drawingml/2006/main" xmlns:r="http://schemas.openxmlformats.org/officeDocument/2006/relationships" xmlns:p="http://schemas.openxmlformats.org/presentationml/2006/main">
+  <p:cSld>
+    <p:spTree>
+      <p:nvGrpSpPr>
+        <p:cNvPr id="1" name=""/>
+        <p:cNvGrpSpPr/>
+        <p:nvPr/>
+      </p:nvGrpSpPr>
+      <p:grpSpPr>
+        <a:xfrm>
+          <a:off x="0" y="0"/>
+          <a:ext cx="0" cy="0"/>
+          <a:chOff x="0" y="0"/>
+          <a:chExt cx="0" cy="0"/>
+        </a:xfrm>
+      </p:grpSpPr>
+      <p:sp>
+        <p:nvSpPr>
+          <p:cNvPr id="2" name="Title 1">
+            <a:extLst>
+              <a:ext uri="{FF2B5EF4-FFF2-40B4-BE49-F238E27FC236}">
+                <a16:creationId xmlns:a16="http://schemas.microsoft.com/office/drawing/2014/main" id="{E51B2151-8E09-9592-09BB-503F7F53054F}"/>
+              </a:ext>
+            </a:extLst>
+          </p:cNvPr>
+          <p:cNvSpPr>
+            <a:spLocks noGrp="1"/>
+          </p:cNvSpPr>
+          <p:nvPr>
+            <p:ph type="title"/>
+          </p:nvPr>
+        </p:nvSpPr>
+        <p:spPr/>
+        <p:txBody>
+          <a:bodyPr>
+            <a:normAutofit/>
+          </a:bodyPr>
+          <a:lstStyle/>
+          <a:p>
+            <a:r>
+              <a:rPr lang="en-US" dirty="0"/>
+              <a:t>Why Use Managed Databases?</a:t>
+            </a:r>
+          </a:p>
+        </p:txBody>
+      </p:sp>
+      <p:sp>
+        <p:nvSpPr>
+          <p:cNvPr id="3" name="Content Placeholder 2">
+            <a:extLst>
+              <a:ext uri="{FF2B5EF4-FFF2-40B4-BE49-F238E27FC236}">
+                <a16:creationId xmlns:a16="http://schemas.microsoft.com/office/drawing/2014/main" id="{5D4B651C-37BB-C62F-4859-7737D4128910}"/>
+              </a:ext>
+            </a:extLst>
+          </p:cNvPr>
+          <p:cNvSpPr>
+            <a:spLocks noGrp="1"/>
+          </p:cNvSpPr>
+          <p:nvPr>
+            <p:ph idx="1"/>
+          </p:nvPr>
+        </p:nvSpPr>
+        <p:spPr/>
+        <p:txBody>
+          <a:bodyPr/>
+          <a:lstStyle/>
+          <a:p>
+            <a:pPr>
+              <a:buNone/>
+            </a:pPr>
+            <a:r>
+              <a:rPr lang="en-US" dirty="0"/>
+              <a:t>Traditional database management involves:</a:t>
+            </a:r>
+          </a:p>
+          <a:p>
+            <a:pPr>
+              <a:buFont typeface="Arial" panose="020B0604020202020204" pitchFamily="34" charset="0"/>
+              <a:buChar char="•"/>
+            </a:pPr>
+            <a:r>
+              <a:rPr lang="en-US" dirty="0"/>
+              <a:t>Provisioning hardware</a:t>
+            </a:r>
+          </a:p>
+          <a:p>
+            <a:pPr>
+              <a:buFont typeface="Arial" panose="020B0604020202020204" pitchFamily="34" charset="0"/>
+              <a:buChar char="•"/>
+            </a:pPr>
+            <a:r>
+              <a:rPr lang="en-US" dirty="0"/>
+              <a:t>Installing software</a:t>
+            </a:r>
+          </a:p>
+          <a:p>
+            <a:pPr>
+              <a:buFont typeface="Arial" panose="020B0604020202020204" pitchFamily="34" charset="0"/>
+              <a:buChar char="•"/>
+            </a:pPr>
+            <a:r>
+              <a:rPr lang="en-US" dirty="0"/>
+              <a:t>Applying patches</a:t>
+            </a:r>
+          </a:p>
+          <a:p>
+            <a:pPr>
+              <a:buFont typeface="Arial" panose="020B0604020202020204" pitchFamily="34" charset="0"/>
+              <a:buChar char="•"/>
+            </a:pPr>
+            <a:r>
+              <a:rPr lang="en-US" dirty="0"/>
+              <a:t>Performing backups and scaling manually</a:t>
+            </a:r>
+          </a:p>
+          <a:p>
+            <a:endParaRPr lang="en-US" dirty="0"/>
+          </a:p>
+        </p:txBody>
+      </p:sp>
+    </p:spTree>
+    <p:extLst>
+      <p:ext uri="{BB962C8B-B14F-4D97-AF65-F5344CB8AC3E}">
+        <p14:creationId xmlns:p14="http://schemas.microsoft.com/office/powerpoint/2010/main" val="369462326"/>
       </p:ext>
     </p:extLst>
   </p:cSld>
@@ -36123,223 +36454,6 @@
       </p:grpSpPr>
       <p:sp>
         <p:nvSpPr>
-          <p:cNvPr id="4" name="Title 3">
-            <a:extLst>
-              <a:ext uri="{FF2B5EF4-FFF2-40B4-BE49-F238E27FC236}">
-                <a16:creationId xmlns:a16="http://schemas.microsoft.com/office/drawing/2014/main" id="{B6361DCE-9F98-18A5-0475-F8810E47C24B}"/>
-              </a:ext>
-            </a:extLst>
-          </p:cNvPr>
-          <p:cNvSpPr>
-            <a:spLocks noGrp="1"/>
-          </p:cNvSpPr>
-          <p:nvPr>
-            <p:ph type="title"/>
-          </p:nvPr>
-        </p:nvSpPr>
-        <p:spPr/>
-        <p:txBody>
-          <a:bodyPr/>
-          <a:lstStyle/>
-          <a:p>
-            <a:r>
-              <a:rPr lang="en-US" dirty="0"/>
-              <a:t>AWS Database Services</a:t>
-            </a:r>
-          </a:p>
-        </p:txBody>
-      </p:sp>
-      <p:sp>
-        <p:nvSpPr>
-          <p:cNvPr id="5" name="Text Placeholder 4">
-            <a:extLst>
-              <a:ext uri="{FF2B5EF4-FFF2-40B4-BE49-F238E27FC236}">
-                <a16:creationId xmlns:a16="http://schemas.microsoft.com/office/drawing/2014/main" id="{76A40532-959C-3105-EFD7-0C54F8096952}"/>
-              </a:ext>
-            </a:extLst>
-          </p:cNvPr>
-          <p:cNvSpPr>
-            <a:spLocks noGrp="1"/>
-          </p:cNvSpPr>
-          <p:nvPr>
-            <p:ph type="body" idx="1"/>
-          </p:nvPr>
-        </p:nvSpPr>
-        <p:spPr/>
-        <p:txBody>
-          <a:bodyPr/>
-          <a:lstStyle/>
-          <a:p>
-            <a:endParaRPr lang="en-US"/>
-          </a:p>
-        </p:txBody>
-      </p:sp>
-    </p:spTree>
-    <p:extLst>
-      <p:ext uri="{BB962C8B-B14F-4D97-AF65-F5344CB8AC3E}">
-        <p14:creationId xmlns:p14="http://schemas.microsoft.com/office/powerpoint/2010/main" val="2278083572"/>
-      </p:ext>
-    </p:extLst>
-  </p:cSld>
-  <p:clrMapOvr>
-    <a:masterClrMapping/>
-  </p:clrMapOvr>
-</p:sld>
-</file>
-
-<file path=ppt/slides/slide71.xml><?xml version="1.0" encoding="utf-8"?>
-<p:sld xmlns:a="http://schemas.openxmlformats.org/drawingml/2006/main" xmlns:r="http://schemas.openxmlformats.org/officeDocument/2006/relationships" xmlns:p="http://schemas.openxmlformats.org/presentationml/2006/main">
-  <p:cSld>
-    <p:spTree>
-      <p:nvGrpSpPr>
-        <p:cNvPr id="1" name=""/>
-        <p:cNvGrpSpPr/>
-        <p:nvPr/>
-      </p:nvGrpSpPr>
-      <p:grpSpPr>
-        <a:xfrm>
-          <a:off x="0" y="0"/>
-          <a:ext cx="0" cy="0"/>
-          <a:chOff x="0" y="0"/>
-          <a:chExt cx="0" cy="0"/>
-        </a:xfrm>
-      </p:grpSpPr>
-      <p:sp>
-        <p:nvSpPr>
-          <p:cNvPr id="2" name="Title 1">
-            <a:extLst>
-              <a:ext uri="{FF2B5EF4-FFF2-40B4-BE49-F238E27FC236}">
-                <a16:creationId xmlns:a16="http://schemas.microsoft.com/office/drawing/2014/main" id="{E51B2151-8E09-9592-09BB-503F7F53054F}"/>
-              </a:ext>
-            </a:extLst>
-          </p:cNvPr>
-          <p:cNvSpPr>
-            <a:spLocks noGrp="1"/>
-          </p:cNvSpPr>
-          <p:nvPr>
-            <p:ph type="title"/>
-          </p:nvPr>
-        </p:nvSpPr>
-        <p:spPr/>
-        <p:txBody>
-          <a:bodyPr>
-            <a:normAutofit/>
-          </a:bodyPr>
-          <a:lstStyle/>
-          <a:p>
-            <a:r>
-              <a:rPr lang="en-US" dirty="0"/>
-              <a:t>Why Use Managed Databases?</a:t>
-            </a:r>
-          </a:p>
-        </p:txBody>
-      </p:sp>
-      <p:sp>
-        <p:nvSpPr>
-          <p:cNvPr id="3" name="Content Placeholder 2">
-            <a:extLst>
-              <a:ext uri="{FF2B5EF4-FFF2-40B4-BE49-F238E27FC236}">
-                <a16:creationId xmlns:a16="http://schemas.microsoft.com/office/drawing/2014/main" id="{5D4B651C-37BB-C62F-4859-7737D4128910}"/>
-              </a:ext>
-            </a:extLst>
-          </p:cNvPr>
-          <p:cNvSpPr>
-            <a:spLocks noGrp="1"/>
-          </p:cNvSpPr>
-          <p:nvPr>
-            <p:ph idx="1"/>
-          </p:nvPr>
-        </p:nvSpPr>
-        <p:spPr/>
-        <p:txBody>
-          <a:bodyPr/>
-          <a:lstStyle/>
-          <a:p>
-            <a:pPr>
-              <a:buNone/>
-            </a:pPr>
-            <a:r>
-              <a:rPr lang="en-US" dirty="0"/>
-              <a:t>Traditional database management involves:</a:t>
-            </a:r>
-          </a:p>
-          <a:p>
-            <a:pPr>
-              <a:buFont typeface="Arial" panose="020B0604020202020204" pitchFamily="34" charset="0"/>
-              <a:buChar char="•"/>
-            </a:pPr>
-            <a:r>
-              <a:rPr lang="en-US" dirty="0"/>
-              <a:t>Provisioning hardware</a:t>
-            </a:r>
-          </a:p>
-          <a:p>
-            <a:pPr>
-              <a:buFont typeface="Arial" panose="020B0604020202020204" pitchFamily="34" charset="0"/>
-              <a:buChar char="•"/>
-            </a:pPr>
-            <a:r>
-              <a:rPr lang="en-US" dirty="0"/>
-              <a:t>Installing software</a:t>
-            </a:r>
-          </a:p>
-          <a:p>
-            <a:pPr>
-              <a:buFont typeface="Arial" panose="020B0604020202020204" pitchFamily="34" charset="0"/>
-              <a:buChar char="•"/>
-            </a:pPr>
-            <a:r>
-              <a:rPr lang="en-US" dirty="0"/>
-              <a:t>Applying patches</a:t>
-            </a:r>
-          </a:p>
-          <a:p>
-            <a:pPr>
-              <a:buFont typeface="Arial" panose="020B0604020202020204" pitchFamily="34" charset="0"/>
-              <a:buChar char="•"/>
-            </a:pPr>
-            <a:r>
-              <a:rPr lang="en-US" dirty="0"/>
-              <a:t>Performing backups and scaling manually</a:t>
-            </a:r>
-          </a:p>
-          <a:p>
-            <a:endParaRPr lang="en-US" dirty="0"/>
-          </a:p>
-        </p:txBody>
-      </p:sp>
-    </p:spTree>
-    <p:extLst>
-      <p:ext uri="{BB962C8B-B14F-4D97-AF65-F5344CB8AC3E}">
-        <p14:creationId xmlns:p14="http://schemas.microsoft.com/office/powerpoint/2010/main" val="369462326"/>
-      </p:ext>
-    </p:extLst>
-  </p:cSld>
-  <p:clrMapOvr>
-    <a:masterClrMapping/>
-  </p:clrMapOvr>
-</p:sld>
-</file>
-
-<file path=ppt/slides/slide72.xml><?xml version="1.0" encoding="utf-8"?>
-<p:sld xmlns:a="http://schemas.openxmlformats.org/drawingml/2006/main" xmlns:r="http://schemas.openxmlformats.org/officeDocument/2006/relationships" xmlns:p="http://schemas.openxmlformats.org/presentationml/2006/main">
-  <p:cSld>
-    <p:spTree>
-      <p:nvGrpSpPr>
-        <p:cNvPr id="1" name=""/>
-        <p:cNvGrpSpPr/>
-        <p:nvPr/>
-      </p:nvGrpSpPr>
-      <p:grpSpPr>
-        <a:xfrm>
-          <a:off x="0" y="0"/>
-          <a:ext cx="0" cy="0"/>
-          <a:chOff x="0" y="0"/>
-          <a:chExt cx="0" cy="0"/>
-        </a:xfrm>
-      </p:grpSpPr>
-      <p:sp>
-        <p:nvSpPr>
           <p:cNvPr id="2" name="Title 1">
             <a:extLst>
               <a:ext uri="{FF2B5EF4-FFF2-40B4-BE49-F238E27FC236}">
@@ -36462,7 +36576,7 @@
 </p:sld>
 </file>
 
-<file path=ppt/slides/slide73.xml><?xml version="1.0" encoding="utf-8"?>
+<file path=ppt/slides/slide71.xml><?xml version="1.0" encoding="utf-8"?>
 <p:sld xmlns:a="http://schemas.openxmlformats.org/drawingml/2006/main" xmlns:r="http://schemas.openxmlformats.org/officeDocument/2006/relationships" xmlns:p="http://schemas.openxmlformats.org/presentationml/2006/main">
   <p:cSld>
     <p:spTree>
@@ -36523,14 +36637,14 @@
             <p:ph idx="1"/>
             <p:extLst>
               <p:ext uri="{D42A27DB-BD31-4B8C-83A1-F6EECF244321}">
-                <p14:modId xmlns:p14="http://schemas.microsoft.com/office/powerpoint/2010/main" val="1930059589"/>
+                <p14:modId xmlns:p14="http://schemas.microsoft.com/office/powerpoint/2010/main" val="164735187"/>
               </p:ext>
             </p:extLst>
           </p:nvPr>
         </p:nvGraphicFramePr>
         <p:xfrm>
           <a:off x="838200" y="1840737"/>
-          <a:ext cx="10515600" cy="1645920"/>
+          <a:ext cx="10515600" cy="1371600"/>
         </p:xfrm>
         <a:graphic>
           <a:graphicData uri="http://schemas.openxmlformats.org/drawingml/2006/table">
@@ -36539,14 +36653,14 @@
                 <a:tableStyleId>{616DA210-FB5B-4158-B5E0-FEB733F419BA}</a:tableStyleId>
               </a:tblPr>
               <a:tblGrid>
-                <a:gridCol w="3505200">
+                <a:gridCol w="2801815">
                   <a:extLst>
                     <a:ext uri="{9D8B030D-6E8A-4147-A177-3AD203B41FA5}">
                       <a16:colId xmlns:a16="http://schemas.microsoft.com/office/drawing/2014/main" val="4068295187"/>
                     </a:ext>
                   </a:extLst>
                 </a:gridCol>
-                <a:gridCol w="3505200">
+                <a:gridCol w="4208585">
                   <a:extLst>
                     <a:ext uri="{9D8B030D-6E8A-4147-A177-3AD203B41FA5}">
                       <a16:colId xmlns:a16="http://schemas.microsoft.com/office/drawing/2014/main" val="4166630576"/>
@@ -36662,7 +36776,11 @@
                     <a:lstStyle/>
                     <a:p>
                       <a:r>
-                        <a:rPr lang="en-US"/>
+                        <a:rPr lang="en-US" dirty="0">
+                          <a:solidFill>
+                            <a:srgbClr val="00B050"/>
+                          </a:solidFill>
+                        </a:rPr>
                         <a:t>Amazon RDS, Amazon Aurora</a:t>
                       </a:r>
                     </a:p>
@@ -36709,7 +36827,11 @@
                     <a:lstStyle/>
                     <a:p>
                       <a:r>
-                        <a:rPr lang="en-US" dirty="0"/>
+                        <a:rPr lang="en-US" dirty="0">
+                          <a:solidFill>
+                            <a:srgbClr val="00B050"/>
+                          </a:solidFill>
+                        </a:rPr>
                         <a:t>Amazon DynamoDB</a:t>
                       </a:r>
                     </a:p>
@@ -36739,7 +36861,7 @@
 </p:sld>
 </file>
 
-<file path=ppt/slides/slide74.xml><?xml version="1.0" encoding="utf-8"?>
+<file path=ppt/slides/slide72.xml><?xml version="1.0" encoding="utf-8"?>
 <p:sld xmlns:a="http://schemas.openxmlformats.org/drawingml/2006/main" xmlns:r="http://schemas.openxmlformats.org/officeDocument/2006/relationships" xmlns:p="http://schemas.openxmlformats.org/presentationml/2006/main">
   <p:cSld>
     <p:spTree>
@@ -36800,25 +36922,36 @@
             <p:ph idx="1"/>
           </p:nvPr>
         </p:nvSpPr>
-        <p:spPr/>
+        <p:spPr>
+          <a:xfrm>
+            <a:off x="838200" y="1706007"/>
+            <a:ext cx="10767646" cy="4991039"/>
+          </a:xfrm>
+        </p:spPr>
         <p:txBody>
-          <a:bodyPr/>
+          <a:bodyPr>
+            <a:normAutofit/>
+          </a:bodyPr>
           <a:lstStyle/>
           <a:p>
-            <a:pPr>
+            <a:pPr marL="0" indent="0">
               <a:buNone/>
             </a:pPr>
             <a:r>
-              <a:rPr lang="en-US" dirty="0"/>
-              <a:t>Amazon RDS makes it easy to set up, operate, and scale a </a:t>
-            </a:r>
-            <a:r>
-              <a:rPr lang="en-US" b="1" dirty="0"/>
-              <a:t>relational database</a:t>
-            </a:r>
-            <a:r>
-              <a:rPr lang="en-US" dirty="0"/>
-              <a:t>.</a:t>
+              <a:rPr lang="en-US" b="1" dirty="0">
+                <a:solidFill>
+                  <a:srgbClr val="00B050"/>
+                </a:solidFill>
+              </a:rPr>
+              <a:t>Amazon RDS is a managed service that runs traditional relational databases</a:t>
+            </a:r>
+            <a:r>
+              <a:rPr lang="en-US" dirty="0">
+                <a:solidFill>
+                  <a:srgbClr val="00B050"/>
+                </a:solidFill>
+              </a:rPr>
+              <a:t> (like MySQL, PostgreSQL, SQL Server, etc.) for you — but on AWS infrastructure. You don’t need to install or maintain the database software yourself — AWS does that part.</a:t>
             </a:r>
           </a:p>
           <a:p>
@@ -36902,7 +37035,7 @@
 </p:sld>
 </file>
 
-<file path=ppt/slides/slide75.xml><?xml version="1.0" encoding="utf-8"?>
+<file path=ppt/slides/slide73.xml><?xml version="1.0" encoding="utf-8"?>
 <p:sld xmlns:a="http://schemas.openxmlformats.org/drawingml/2006/main" xmlns:r="http://schemas.openxmlformats.org/officeDocument/2006/relationships" xmlns:p="http://schemas.openxmlformats.org/presentationml/2006/main">
   <p:cSld>
     <p:spTree>
@@ -36963,24 +37096,41 @@
             <p:ph idx="1"/>
           </p:nvPr>
         </p:nvSpPr>
-        <p:spPr/>
+        <p:spPr>
+          <a:xfrm>
+            <a:off x="838200" y="1706007"/>
+            <a:ext cx="11163300" cy="4991039"/>
+          </a:xfrm>
+        </p:spPr>
         <p:txBody>
           <a:bodyPr/>
           <a:lstStyle/>
           <a:p>
-            <a:pPr>
+            <a:pPr marL="0" indent="0">
               <a:buNone/>
             </a:pPr>
             <a:r>
-              <a:rPr lang="en-US" dirty="0"/>
+              <a:rPr lang="en-US" dirty="0">
+                <a:solidFill>
+                  <a:srgbClr val="00B050"/>
+                </a:solidFill>
+              </a:rPr>
               <a:t>Aurora is a </a:t>
             </a:r>
             <a:r>
-              <a:rPr lang="en-US" b="1" dirty="0"/>
+              <a:rPr lang="en-US" b="1" dirty="0">
+                <a:solidFill>
+                  <a:srgbClr val="00B050"/>
+                </a:solidFill>
+              </a:rPr>
               <a:t>MySQL and PostgreSQL-compatible</a:t>
             </a:r>
             <a:r>
-              <a:rPr lang="en-US" dirty="0"/>
+              <a:rPr lang="en-US" dirty="0">
+                <a:solidFill>
+                  <a:srgbClr val="00B050"/>
+                </a:solidFill>
+              </a:rPr>
               <a:t> relational database built for the cloud.</a:t>
             </a:r>
           </a:p>
@@ -37062,7 +37212,7 @@
 </p:sld>
 </file>
 
-<file path=ppt/slides/slide76.xml><?xml version="1.0" encoding="utf-8"?>
+<file path=ppt/slides/slide74.xml><?xml version="1.0" encoding="utf-8"?>
 <p:sld xmlns:a="http://schemas.openxmlformats.org/drawingml/2006/main" xmlns:r="http://schemas.openxmlformats.org/officeDocument/2006/relationships" xmlns:p="http://schemas.openxmlformats.org/presentationml/2006/main">
   <p:cSld>
     <p:spTree>
@@ -37132,19 +37282,35 @@
               <a:buNone/>
             </a:pPr>
             <a:r>
-              <a:rPr lang="en-US" b="1" dirty="0"/>
+              <a:rPr lang="en-US" b="1" dirty="0">
+                <a:solidFill>
+                  <a:srgbClr val="00B050"/>
+                </a:solidFill>
+              </a:rPr>
               <a:t>Amazon DynamoDB</a:t>
             </a:r>
             <a:r>
-              <a:rPr lang="en-US" dirty="0"/>
+              <a:rPr lang="en-US" dirty="0">
+                <a:solidFill>
+                  <a:srgbClr val="00B050"/>
+                </a:solidFill>
+              </a:rPr>
               <a:t> is a fully managed </a:t>
             </a:r>
             <a:r>
-              <a:rPr lang="en-US" b="1" dirty="0"/>
+              <a:rPr lang="en-US" b="1" dirty="0">
+                <a:solidFill>
+                  <a:srgbClr val="00B050"/>
+                </a:solidFill>
+              </a:rPr>
               <a:t>key-value and document</a:t>
             </a:r>
             <a:r>
-              <a:rPr lang="en-US" dirty="0"/>
+              <a:rPr lang="en-US" dirty="0">
+                <a:solidFill>
+                  <a:srgbClr val="00B050"/>
+                </a:solidFill>
+              </a:rPr>
               <a:t> database.</a:t>
             </a:r>
           </a:p>
@@ -37219,7 +37385,7 @@
 </p:sld>
 </file>
 
-<file path=ppt/slides/slide77.xml><?xml version="1.0" encoding="utf-8"?>
+<file path=ppt/slides/slide75.xml><?xml version="1.0" encoding="utf-8"?>
 <p:sld xmlns:a="http://schemas.openxmlformats.org/drawingml/2006/main" xmlns:r="http://schemas.openxmlformats.org/officeDocument/2006/relationships" xmlns:p="http://schemas.openxmlformats.org/presentationml/2006/main">
   <p:cSld>
     <p:spTree>
@@ -37289,19 +37455,35 @@
               <a:buNone/>
             </a:pPr>
             <a:r>
-              <a:rPr lang="en-US" b="1" dirty="0"/>
+              <a:rPr lang="en-US" b="1" dirty="0">
+                <a:solidFill>
+                  <a:srgbClr val="00B050"/>
+                </a:solidFill>
+              </a:rPr>
               <a:t>Amazon Redshift</a:t>
             </a:r>
             <a:r>
-              <a:rPr lang="en-US" dirty="0"/>
+              <a:rPr lang="en-US" dirty="0">
+                <a:solidFill>
+                  <a:srgbClr val="00B050"/>
+                </a:solidFill>
+              </a:rPr>
               <a:t> is a fully managed </a:t>
             </a:r>
             <a:r>
-              <a:rPr lang="en-US" b="1" dirty="0"/>
+              <a:rPr lang="en-US" b="1" dirty="0">
+                <a:solidFill>
+                  <a:srgbClr val="00B050"/>
+                </a:solidFill>
+              </a:rPr>
               <a:t>data warehouse</a:t>
             </a:r>
             <a:r>
-              <a:rPr lang="en-US" dirty="0"/>
+              <a:rPr lang="en-US" dirty="0">
+                <a:solidFill>
+                  <a:srgbClr val="00B050"/>
+                </a:solidFill>
+              </a:rPr>
               <a:t> optimized for analytics.</a:t>
             </a:r>
           </a:p>
@@ -37394,7 +37576,7 @@
 </p:sld>
 </file>
 
-<file path=ppt/slides/slide78.xml><?xml version="1.0" encoding="utf-8"?>
+<file path=ppt/slides/slide76.xml><?xml version="1.0" encoding="utf-8"?>
 <p:sld xmlns:a="http://schemas.openxmlformats.org/drawingml/2006/main" xmlns:r="http://schemas.openxmlformats.org/officeDocument/2006/relationships" xmlns:p="http://schemas.openxmlformats.org/presentationml/2006/main">
   <p:cSld>
     <p:spTree>
@@ -37455,7 +37637,7 @@
             <p:ph idx="1"/>
             <p:extLst>
               <p:ext uri="{D42A27DB-BD31-4B8C-83A1-F6EECF244321}">
-                <p14:modId xmlns:p14="http://schemas.microsoft.com/office/powerpoint/2010/main" val="1476060124"/>
+                <p14:modId xmlns:p14="http://schemas.microsoft.com/office/powerpoint/2010/main" val="648581578"/>
               </p:ext>
             </p:extLst>
           </p:nvPr>
@@ -37471,14 +37653,14 @@
                 <a:tableStyleId>{616DA210-FB5B-4158-B5E0-FEB733F419BA}</a:tableStyleId>
               </a:tblPr>
               <a:tblGrid>
-                <a:gridCol w="5257800">
+                <a:gridCol w="3909646">
                   <a:extLst>
                     <a:ext uri="{9D8B030D-6E8A-4147-A177-3AD203B41FA5}">
                       <a16:colId xmlns:a16="http://schemas.microsoft.com/office/drawing/2014/main" val="678336518"/>
                     </a:ext>
                   </a:extLst>
                 </a:gridCol>
-                <a:gridCol w="5257800">
+                <a:gridCol w="6605954">
                   <a:extLst>
                     <a:ext uri="{9D8B030D-6E8A-4147-A177-3AD203B41FA5}">
                       <a16:colId xmlns:a16="http://schemas.microsoft.com/office/drawing/2014/main" val="3554255603"/>
@@ -37682,7 +37864,7 @@
 </p:sld>
 </file>
 
-<file path=ppt/slides/slide79.xml><?xml version="1.0" encoding="utf-8"?>
+<file path=ppt/slides/slide77.xml><?xml version="1.0" encoding="utf-8"?>
 <p:sld xmlns:a="http://schemas.openxmlformats.org/drawingml/2006/main" xmlns:r="http://schemas.openxmlformats.org/officeDocument/2006/relationships" xmlns:p="http://schemas.openxmlformats.org/presentationml/2006/main">
   <p:cSld>
     <p:spTree>
@@ -37758,6 +37940,373 @@
     <p:extLst>
       <p:ext uri="{BB962C8B-B14F-4D97-AF65-F5344CB8AC3E}">
         <p14:creationId xmlns:p14="http://schemas.microsoft.com/office/powerpoint/2010/main" val="1207130840"/>
+      </p:ext>
+    </p:extLst>
+  </p:cSld>
+  <p:clrMapOvr>
+    <a:masterClrMapping/>
+  </p:clrMapOvr>
+</p:sld>
+</file>
+
+<file path=ppt/slides/slide78.xml><?xml version="1.0" encoding="utf-8"?>
+<p:sld xmlns:a="http://schemas.openxmlformats.org/drawingml/2006/main" xmlns:r="http://schemas.openxmlformats.org/officeDocument/2006/relationships" xmlns:p="http://schemas.openxmlformats.org/presentationml/2006/main">
+  <p:cSld>
+    <p:spTree>
+      <p:nvGrpSpPr>
+        <p:cNvPr id="1" name="">
+          <a:extLst>
+            <a:ext uri="{FF2B5EF4-FFF2-40B4-BE49-F238E27FC236}">
+              <a16:creationId xmlns:a16="http://schemas.microsoft.com/office/drawing/2014/main" id="{9BD68BD7-622F-2CC7-9800-91C2CE33578D}"/>
+            </a:ext>
+          </a:extLst>
+        </p:cNvPr>
+        <p:cNvGrpSpPr/>
+        <p:nvPr/>
+      </p:nvGrpSpPr>
+      <p:grpSpPr>
+        <a:xfrm>
+          <a:off x="0" y="0"/>
+          <a:ext cx="0" cy="0"/>
+          <a:chOff x="0" y="0"/>
+          <a:chExt cx="0" cy="0"/>
+        </a:xfrm>
+      </p:grpSpPr>
+      <p:sp>
+        <p:nvSpPr>
+          <p:cNvPr id="2" name="Title 1">
+            <a:extLst>
+              <a:ext uri="{FF2B5EF4-FFF2-40B4-BE49-F238E27FC236}">
+                <a16:creationId xmlns:a16="http://schemas.microsoft.com/office/drawing/2014/main" id="{C221DFDE-8679-38D5-70B8-8E842D2A58D9}"/>
+              </a:ext>
+            </a:extLst>
+          </p:cNvPr>
+          <p:cNvSpPr>
+            <a:spLocks noGrp="1"/>
+          </p:cNvSpPr>
+          <p:nvPr>
+            <p:ph type="title"/>
+          </p:nvPr>
+        </p:nvSpPr>
+        <p:spPr/>
+        <p:txBody>
+          <a:bodyPr/>
+          <a:lstStyle/>
+          <a:p>
+            <a:r>
+              <a:rPr lang="en-US" dirty="0"/>
+              <a:t>Why Networking in the Cloud Matters</a:t>
+            </a:r>
+          </a:p>
+        </p:txBody>
+      </p:sp>
+      <p:sp>
+        <p:nvSpPr>
+          <p:cNvPr id="3" name="Content Placeholder 2">
+            <a:extLst>
+              <a:ext uri="{FF2B5EF4-FFF2-40B4-BE49-F238E27FC236}">
+                <a16:creationId xmlns:a16="http://schemas.microsoft.com/office/drawing/2014/main" id="{D80862DA-A3F2-69F7-F792-08B24FABAF2F}"/>
+              </a:ext>
+            </a:extLst>
+          </p:cNvPr>
+          <p:cNvSpPr>
+            <a:spLocks noGrp="1"/>
+          </p:cNvSpPr>
+          <p:nvPr>
+            <p:ph idx="1"/>
+          </p:nvPr>
+        </p:nvSpPr>
+        <p:spPr/>
+        <p:txBody>
+          <a:bodyPr/>
+          <a:lstStyle/>
+          <a:p>
+            <a:pPr>
+              <a:buNone/>
+            </a:pPr>
+            <a:r>
+              <a:rPr lang="en-US" dirty="0"/>
+              <a:t>In AWS, networking controls:</a:t>
+            </a:r>
+          </a:p>
+          <a:p>
+            <a:pPr>
+              <a:buFont typeface="Arial" panose="020B0604020202020204" pitchFamily="34" charset="0"/>
+              <a:buChar char="•"/>
+            </a:pPr>
+            <a:r>
+              <a:rPr lang="en-US" dirty="0"/>
+              <a:t>How services communicate with each other</a:t>
+            </a:r>
+          </a:p>
+          <a:p>
+            <a:pPr>
+              <a:buFont typeface="Arial" panose="020B0604020202020204" pitchFamily="34" charset="0"/>
+              <a:buChar char="•"/>
+            </a:pPr>
+            <a:r>
+              <a:rPr lang="en-US" dirty="0"/>
+              <a:t>How traffic flows between your applications and users</a:t>
+            </a:r>
+          </a:p>
+          <a:p>
+            <a:pPr>
+              <a:buFont typeface="Arial" panose="020B0604020202020204" pitchFamily="34" charset="0"/>
+              <a:buChar char="•"/>
+            </a:pPr>
+            <a:r>
+              <a:rPr lang="en-US" dirty="0"/>
+              <a:t>Security boundaries and availability zones</a:t>
+            </a:r>
+          </a:p>
+          <a:p>
+            <a:pPr>
+              <a:buNone/>
+            </a:pPr>
+            <a:r>
+              <a:rPr lang="en-US" b="1" dirty="0"/>
+              <a:t>AWS provides tools to:</a:t>
+            </a:r>
+            <a:endParaRPr lang="en-US" dirty="0"/>
+          </a:p>
+          <a:p>
+            <a:pPr>
+              <a:buFont typeface="Arial" panose="020B0604020202020204" pitchFamily="34" charset="0"/>
+              <a:buChar char="•"/>
+            </a:pPr>
+            <a:r>
+              <a:rPr lang="en-US" dirty="0"/>
+              <a:t>Build private networks</a:t>
+            </a:r>
+          </a:p>
+          <a:p>
+            <a:pPr>
+              <a:buFont typeface="Arial" panose="020B0604020202020204" pitchFamily="34" charset="0"/>
+              <a:buChar char="•"/>
+            </a:pPr>
+            <a:r>
+              <a:rPr lang="en-US" dirty="0"/>
+              <a:t>Route global traffic</a:t>
+            </a:r>
+          </a:p>
+          <a:p>
+            <a:pPr>
+              <a:buFont typeface="Arial" panose="020B0604020202020204" pitchFamily="34" charset="0"/>
+              <a:buChar char="•"/>
+            </a:pPr>
+            <a:r>
+              <a:rPr lang="en-US" dirty="0"/>
+              <a:t>Deliver content efficiently</a:t>
+            </a:r>
+          </a:p>
+          <a:p>
+            <a:pPr>
+              <a:buFont typeface="Arial" panose="020B0604020202020204" pitchFamily="34" charset="0"/>
+              <a:buChar char="•"/>
+            </a:pPr>
+            <a:r>
+              <a:rPr lang="en-US" dirty="0"/>
+              <a:t>Secure communication</a:t>
+            </a:r>
+          </a:p>
+          <a:p>
+            <a:endParaRPr lang="en-US" b="1" dirty="0"/>
+          </a:p>
+        </p:txBody>
+      </p:sp>
+    </p:spTree>
+    <p:extLst>
+      <p:ext uri="{BB962C8B-B14F-4D97-AF65-F5344CB8AC3E}">
+        <p14:creationId xmlns:p14="http://schemas.microsoft.com/office/powerpoint/2010/main" val="1014027306"/>
+      </p:ext>
+    </p:extLst>
+  </p:cSld>
+  <p:clrMapOvr>
+    <a:masterClrMapping/>
+  </p:clrMapOvr>
+</p:sld>
+</file>
+
+<file path=ppt/slides/slide79.xml><?xml version="1.0" encoding="utf-8"?>
+<p:sld xmlns:a="http://schemas.openxmlformats.org/drawingml/2006/main" xmlns:r="http://schemas.openxmlformats.org/officeDocument/2006/relationships" xmlns:p="http://schemas.openxmlformats.org/presentationml/2006/main">
+  <p:cSld>
+    <p:spTree>
+      <p:nvGrpSpPr>
+        <p:cNvPr id="1" name="">
+          <a:extLst>
+            <a:ext uri="{FF2B5EF4-FFF2-40B4-BE49-F238E27FC236}">
+              <a16:creationId xmlns:a16="http://schemas.microsoft.com/office/drawing/2014/main" id="{84076F42-176A-130A-F7DA-F4EDA5B43144}"/>
+            </a:ext>
+          </a:extLst>
+        </p:cNvPr>
+        <p:cNvGrpSpPr/>
+        <p:nvPr/>
+      </p:nvGrpSpPr>
+      <p:grpSpPr>
+        <a:xfrm>
+          <a:off x="0" y="0"/>
+          <a:ext cx="0" cy="0"/>
+          <a:chOff x="0" y="0"/>
+          <a:chExt cx="0" cy="0"/>
+        </a:xfrm>
+      </p:grpSpPr>
+      <p:sp>
+        <p:nvSpPr>
+          <p:cNvPr id="2" name="Title 1">
+            <a:extLst>
+              <a:ext uri="{FF2B5EF4-FFF2-40B4-BE49-F238E27FC236}">
+                <a16:creationId xmlns:a16="http://schemas.microsoft.com/office/drawing/2014/main" id="{CA989DFE-B541-C2E0-6FFC-AEEBD6212A4B}"/>
+              </a:ext>
+            </a:extLst>
+          </p:cNvPr>
+          <p:cNvSpPr>
+            <a:spLocks noGrp="1"/>
+          </p:cNvSpPr>
+          <p:nvPr>
+            <p:ph type="title"/>
+          </p:nvPr>
+        </p:nvSpPr>
+        <p:spPr/>
+        <p:txBody>
+          <a:bodyPr/>
+          <a:lstStyle/>
+          <a:p>
+            <a:r>
+              <a:rPr lang="en-US" dirty="0"/>
+              <a:t>Amazon VPC – Virtual Private Cloud</a:t>
+            </a:r>
+          </a:p>
+        </p:txBody>
+      </p:sp>
+      <p:sp>
+        <p:nvSpPr>
+          <p:cNvPr id="3" name="Content Placeholder 2">
+            <a:extLst>
+              <a:ext uri="{FF2B5EF4-FFF2-40B4-BE49-F238E27FC236}">
+                <a16:creationId xmlns:a16="http://schemas.microsoft.com/office/drawing/2014/main" id="{6580A05C-C7C5-F3B9-BEA1-C2E51FBD2E9F}"/>
+              </a:ext>
+            </a:extLst>
+          </p:cNvPr>
+          <p:cNvSpPr>
+            <a:spLocks noGrp="1"/>
+          </p:cNvSpPr>
+          <p:nvPr>
+            <p:ph idx="1"/>
+          </p:nvPr>
+        </p:nvSpPr>
+        <p:spPr/>
+        <p:txBody>
+          <a:bodyPr/>
+          <a:lstStyle/>
+          <a:p>
+            <a:pPr>
+              <a:buNone/>
+            </a:pPr>
+            <a:r>
+              <a:rPr lang="en-US" b="1" dirty="0">
+                <a:solidFill>
+                  <a:srgbClr val="00B050"/>
+                </a:solidFill>
+              </a:rPr>
+              <a:t>Amazon VPC</a:t>
+            </a:r>
+            <a:r>
+              <a:rPr lang="en-US" dirty="0">
+                <a:solidFill>
+                  <a:srgbClr val="00B050"/>
+                </a:solidFill>
+              </a:rPr>
+              <a:t> allows you to provision a </a:t>
+            </a:r>
+            <a:r>
+              <a:rPr lang="en-US" b="1" dirty="0">
+                <a:solidFill>
+                  <a:srgbClr val="00B050"/>
+                </a:solidFill>
+              </a:rPr>
+              <a:t>logically isolated network</a:t>
+            </a:r>
+            <a:r>
+              <a:rPr lang="en-US" dirty="0">
+                <a:solidFill>
+                  <a:srgbClr val="00B050"/>
+                </a:solidFill>
+              </a:rPr>
+              <a:t> within AWS.</a:t>
+            </a:r>
+          </a:p>
+          <a:p>
+            <a:pPr>
+              <a:buNone/>
+            </a:pPr>
+            <a:r>
+              <a:rPr lang="en-US" b="1" dirty="0"/>
+              <a:t>Key Features:</a:t>
+            </a:r>
+            <a:endParaRPr lang="en-US" dirty="0"/>
+          </a:p>
+          <a:p>
+            <a:pPr>
+              <a:buFont typeface="Arial" panose="020B0604020202020204" pitchFamily="34" charset="0"/>
+              <a:buChar char="•"/>
+            </a:pPr>
+            <a:r>
+              <a:rPr lang="en-US" dirty="0"/>
+              <a:t>Define subnets, IP ranges, route tables</a:t>
+            </a:r>
+          </a:p>
+          <a:p>
+            <a:pPr>
+              <a:buFont typeface="Arial" panose="020B0604020202020204" pitchFamily="34" charset="0"/>
+              <a:buChar char="•"/>
+            </a:pPr>
+            <a:r>
+              <a:rPr lang="en-US" dirty="0"/>
+              <a:t>Configure security groups and network ACLs</a:t>
+            </a:r>
+          </a:p>
+          <a:p>
+            <a:pPr>
+              <a:buFont typeface="Arial" panose="020B0604020202020204" pitchFamily="34" charset="0"/>
+              <a:buChar char="•"/>
+            </a:pPr>
+            <a:r>
+              <a:rPr lang="en-US" dirty="0"/>
+              <a:t>Enable private and public subnets</a:t>
+            </a:r>
+          </a:p>
+          <a:p>
+            <a:pPr>
+              <a:buFont typeface="Arial" panose="020B0604020202020204" pitchFamily="34" charset="0"/>
+              <a:buChar char="•"/>
+            </a:pPr>
+            <a:r>
+              <a:rPr lang="en-US" dirty="0"/>
+              <a:t>Connect VPC to on-premises via VPN or Direct Connect</a:t>
+            </a:r>
+          </a:p>
+          <a:p>
+            <a:r>
+              <a:rPr lang="en-US" b="1" dirty="0"/>
+              <a:t>Use Case:</a:t>
+            </a:r>
+            <a:br>
+              <a:rPr lang="en-US" dirty="0"/>
+            </a:br>
+            <a:r>
+              <a:rPr lang="en-US" dirty="0"/>
+              <a:t>Run secure applications in a private environment</a:t>
+            </a:r>
+          </a:p>
+          <a:p>
+            <a:endParaRPr lang="en-US" dirty="0"/>
+          </a:p>
+        </p:txBody>
+      </p:sp>
+    </p:spTree>
+    <p:extLst>
+      <p:ext uri="{BB962C8B-B14F-4D97-AF65-F5344CB8AC3E}">
+        <p14:creationId xmlns:p14="http://schemas.microsoft.com/office/powerpoint/2010/main" val="488425355"/>
       </p:ext>
     </p:extLst>
   </p:cSld>
@@ -37936,357 +38485,6 @@
         <p:cNvPr id="1" name="">
           <a:extLst>
             <a:ext uri="{FF2B5EF4-FFF2-40B4-BE49-F238E27FC236}">
-              <a16:creationId xmlns:a16="http://schemas.microsoft.com/office/drawing/2014/main" id="{9BD68BD7-622F-2CC7-9800-91C2CE33578D}"/>
-            </a:ext>
-          </a:extLst>
-        </p:cNvPr>
-        <p:cNvGrpSpPr/>
-        <p:nvPr/>
-      </p:nvGrpSpPr>
-      <p:grpSpPr>
-        <a:xfrm>
-          <a:off x="0" y="0"/>
-          <a:ext cx="0" cy="0"/>
-          <a:chOff x="0" y="0"/>
-          <a:chExt cx="0" cy="0"/>
-        </a:xfrm>
-      </p:grpSpPr>
-      <p:sp>
-        <p:nvSpPr>
-          <p:cNvPr id="2" name="Title 1">
-            <a:extLst>
-              <a:ext uri="{FF2B5EF4-FFF2-40B4-BE49-F238E27FC236}">
-                <a16:creationId xmlns:a16="http://schemas.microsoft.com/office/drawing/2014/main" id="{C221DFDE-8679-38D5-70B8-8E842D2A58D9}"/>
-              </a:ext>
-            </a:extLst>
-          </p:cNvPr>
-          <p:cNvSpPr>
-            <a:spLocks noGrp="1"/>
-          </p:cNvSpPr>
-          <p:nvPr>
-            <p:ph type="title"/>
-          </p:nvPr>
-        </p:nvSpPr>
-        <p:spPr/>
-        <p:txBody>
-          <a:bodyPr/>
-          <a:lstStyle/>
-          <a:p>
-            <a:r>
-              <a:rPr lang="en-US" dirty="0"/>
-              <a:t>Why Networking in the Cloud Matters</a:t>
-            </a:r>
-          </a:p>
-        </p:txBody>
-      </p:sp>
-      <p:sp>
-        <p:nvSpPr>
-          <p:cNvPr id="3" name="Content Placeholder 2">
-            <a:extLst>
-              <a:ext uri="{FF2B5EF4-FFF2-40B4-BE49-F238E27FC236}">
-                <a16:creationId xmlns:a16="http://schemas.microsoft.com/office/drawing/2014/main" id="{D80862DA-A3F2-69F7-F792-08B24FABAF2F}"/>
-              </a:ext>
-            </a:extLst>
-          </p:cNvPr>
-          <p:cNvSpPr>
-            <a:spLocks noGrp="1"/>
-          </p:cNvSpPr>
-          <p:nvPr>
-            <p:ph idx="1"/>
-          </p:nvPr>
-        </p:nvSpPr>
-        <p:spPr/>
-        <p:txBody>
-          <a:bodyPr/>
-          <a:lstStyle/>
-          <a:p>
-            <a:pPr>
-              <a:buNone/>
-            </a:pPr>
-            <a:r>
-              <a:rPr lang="en-US" dirty="0"/>
-              <a:t>In AWS, networking controls:</a:t>
-            </a:r>
-          </a:p>
-          <a:p>
-            <a:pPr>
-              <a:buFont typeface="Arial" panose="020B0604020202020204" pitchFamily="34" charset="0"/>
-              <a:buChar char="•"/>
-            </a:pPr>
-            <a:r>
-              <a:rPr lang="en-US" dirty="0"/>
-              <a:t>How services communicate with each other</a:t>
-            </a:r>
-          </a:p>
-          <a:p>
-            <a:pPr>
-              <a:buFont typeface="Arial" panose="020B0604020202020204" pitchFamily="34" charset="0"/>
-              <a:buChar char="•"/>
-            </a:pPr>
-            <a:r>
-              <a:rPr lang="en-US" dirty="0"/>
-              <a:t>How traffic flows between your applications and users</a:t>
-            </a:r>
-          </a:p>
-          <a:p>
-            <a:pPr>
-              <a:buFont typeface="Arial" panose="020B0604020202020204" pitchFamily="34" charset="0"/>
-              <a:buChar char="•"/>
-            </a:pPr>
-            <a:r>
-              <a:rPr lang="en-US" dirty="0"/>
-              <a:t>Security boundaries and availability zones</a:t>
-            </a:r>
-          </a:p>
-          <a:p>
-            <a:pPr>
-              <a:buNone/>
-            </a:pPr>
-            <a:r>
-              <a:rPr lang="en-US" b="1" dirty="0"/>
-              <a:t>AWS provides tools to:</a:t>
-            </a:r>
-            <a:endParaRPr lang="en-US" dirty="0"/>
-          </a:p>
-          <a:p>
-            <a:pPr>
-              <a:buFont typeface="Arial" panose="020B0604020202020204" pitchFamily="34" charset="0"/>
-              <a:buChar char="•"/>
-            </a:pPr>
-            <a:r>
-              <a:rPr lang="en-US" dirty="0"/>
-              <a:t>Build private networks</a:t>
-            </a:r>
-          </a:p>
-          <a:p>
-            <a:pPr>
-              <a:buFont typeface="Arial" panose="020B0604020202020204" pitchFamily="34" charset="0"/>
-              <a:buChar char="•"/>
-            </a:pPr>
-            <a:r>
-              <a:rPr lang="en-US" dirty="0"/>
-              <a:t>Route global traffic</a:t>
-            </a:r>
-          </a:p>
-          <a:p>
-            <a:pPr>
-              <a:buFont typeface="Arial" panose="020B0604020202020204" pitchFamily="34" charset="0"/>
-              <a:buChar char="•"/>
-            </a:pPr>
-            <a:r>
-              <a:rPr lang="en-US" dirty="0"/>
-              <a:t>Deliver content efficiently</a:t>
-            </a:r>
-          </a:p>
-          <a:p>
-            <a:pPr>
-              <a:buFont typeface="Arial" panose="020B0604020202020204" pitchFamily="34" charset="0"/>
-              <a:buChar char="•"/>
-            </a:pPr>
-            <a:r>
-              <a:rPr lang="en-US" dirty="0"/>
-              <a:t>Secure communication</a:t>
-            </a:r>
-          </a:p>
-          <a:p>
-            <a:endParaRPr lang="en-US" b="1" dirty="0"/>
-          </a:p>
-        </p:txBody>
-      </p:sp>
-    </p:spTree>
-    <p:extLst>
-      <p:ext uri="{BB962C8B-B14F-4D97-AF65-F5344CB8AC3E}">
-        <p14:creationId xmlns:p14="http://schemas.microsoft.com/office/powerpoint/2010/main" val="1014027306"/>
-      </p:ext>
-    </p:extLst>
-  </p:cSld>
-  <p:clrMapOvr>
-    <a:masterClrMapping/>
-  </p:clrMapOvr>
-</p:sld>
-</file>
-
-<file path=ppt/slides/slide81.xml><?xml version="1.0" encoding="utf-8"?>
-<p:sld xmlns:a="http://schemas.openxmlformats.org/drawingml/2006/main" xmlns:r="http://schemas.openxmlformats.org/officeDocument/2006/relationships" xmlns:p="http://schemas.openxmlformats.org/presentationml/2006/main">
-  <p:cSld>
-    <p:spTree>
-      <p:nvGrpSpPr>
-        <p:cNvPr id="1" name="">
-          <a:extLst>
-            <a:ext uri="{FF2B5EF4-FFF2-40B4-BE49-F238E27FC236}">
-              <a16:creationId xmlns:a16="http://schemas.microsoft.com/office/drawing/2014/main" id="{84076F42-176A-130A-F7DA-F4EDA5B43144}"/>
-            </a:ext>
-          </a:extLst>
-        </p:cNvPr>
-        <p:cNvGrpSpPr/>
-        <p:nvPr/>
-      </p:nvGrpSpPr>
-      <p:grpSpPr>
-        <a:xfrm>
-          <a:off x="0" y="0"/>
-          <a:ext cx="0" cy="0"/>
-          <a:chOff x="0" y="0"/>
-          <a:chExt cx="0" cy="0"/>
-        </a:xfrm>
-      </p:grpSpPr>
-      <p:sp>
-        <p:nvSpPr>
-          <p:cNvPr id="2" name="Title 1">
-            <a:extLst>
-              <a:ext uri="{FF2B5EF4-FFF2-40B4-BE49-F238E27FC236}">
-                <a16:creationId xmlns:a16="http://schemas.microsoft.com/office/drawing/2014/main" id="{CA989DFE-B541-C2E0-6FFC-AEEBD6212A4B}"/>
-              </a:ext>
-            </a:extLst>
-          </p:cNvPr>
-          <p:cNvSpPr>
-            <a:spLocks noGrp="1"/>
-          </p:cNvSpPr>
-          <p:nvPr>
-            <p:ph type="title"/>
-          </p:nvPr>
-        </p:nvSpPr>
-        <p:spPr/>
-        <p:txBody>
-          <a:bodyPr/>
-          <a:lstStyle/>
-          <a:p>
-            <a:r>
-              <a:rPr lang="en-US" dirty="0"/>
-              <a:t>Amazon VPC – Virtual Private Cloud</a:t>
-            </a:r>
-          </a:p>
-        </p:txBody>
-      </p:sp>
-      <p:sp>
-        <p:nvSpPr>
-          <p:cNvPr id="3" name="Content Placeholder 2">
-            <a:extLst>
-              <a:ext uri="{FF2B5EF4-FFF2-40B4-BE49-F238E27FC236}">
-                <a16:creationId xmlns:a16="http://schemas.microsoft.com/office/drawing/2014/main" id="{6580A05C-C7C5-F3B9-BEA1-C2E51FBD2E9F}"/>
-              </a:ext>
-            </a:extLst>
-          </p:cNvPr>
-          <p:cNvSpPr>
-            <a:spLocks noGrp="1"/>
-          </p:cNvSpPr>
-          <p:nvPr>
-            <p:ph idx="1"/>
-          </p:nvPr>
-        </p:nvSpPr>
-        <p:spPr/>
-        <p:txBody>
-          <a:bodyPr/>
-          <a:lstStyle/>
-          <a:p>
-            <a:pPr>
-              <a:buNone/>
-            </a:pPr>
-            <a:r>
-              <a:rPr lang="en-US" b="1" dirty="0"/>
-              <a:t>Amazon VPC</a:t>
-            </a:r>
-            <a:r>
-              <a:rPr lang="en-US" dirty="0"/>
-              <a:t> allows you to provision a </a:t>
-            </a:r>
-            <a:r>
-              <a:rPr lang="en-US" b="1" dirty="0"/>
-              <a:t>logically isolated network</a:t>
-            </a:r>
-            <a:r>
-              <a:rPr lang="en-US" dirty="0"/>
-              <a:t> within AWS.</a:t>
-            </a:r>
-          </a:p>
-          <a:p>
-            <a:pPr>
-              <a:buNone/>
-            </a:pPr>
-            <a:r>
-              <a:rPr lang="en-US" b="1" dirty="0"/>
-              <a:t>Key Features:</a:t>
-            </a:r>
-            <a:endParaRPr lang="en-US" dirty="0"/>
-          </a:p>
-          <a:p>
-            <a:pPr>
-              <a:buFont typeface="Arial" panose="020B0604020202020204" pitchFamily="34" charset="0"/>
-              <a:buChar char="•"/>
-            </a:pPr>
-            <a:r>
-              <a:rPr lang="en-US" dirty="0"/>
-              <a:t>Define subnets, IP ranges, route tables</a:t>
-            </a:r>
-          </a:p>
-          <a:p>
-            <a:pPr>
-              <a:buFont typeface="Arial" panose="020B0604020202020204" pitchFamily="34" charset="0"/>
-              <a:buChar char="•"/>
-            </a:pPr>
-            <a:r>
-              <a:rPr lang="en-US" dirty="0"/>
-              <a:t>Configure security groups and network ACLs</a:t>
-            </a:r>
-          </a:p>
-          <a:p>
-            <a:pPr>
-              <a:buFont typeface="Arial" panose="020B0604020202020204" pitchFamily="34" charset="0"/>
-              <a:buChar char="•"/>
-            </a:pPr>
-            <a:r>
-              <a:rPr lang="en-US" dirty="0"/>
-              <a:t>Enable private and public subnets</a:t>
-            </a:r>
-          </a:p>
-          <a:p>
-            <a:pPr>
-              <a:buFont typeface="Arial" panose="020B0604020202020204" pitchFamily="34" charset="0"/>
-              <a:buChar char="•"/>
-            </a:pPr>
-            <a:r>
-              <a:rPr lang="en-US" dirty="0"/>
-              <a:t>Connect VPC to on-premises via VPN or Direct Connect</a:t>
-            </a:r>
-          </a:p>
-          <a:p>
-            <a:r>
-              <a:rPr lang="en-US" b="1" dirty="0"/>
-              <a:t>Use Case:</a:t>
-            </a:r>
-            <a:br>
-              <a:rPr lang="en-US" dirty="0"/>
-            </a:br>
-            <a:r>
-              <a:rPr lang="en-US" dirty="0"/>
-              <a:t>Run secure applications in a private environment</a:t>
-            </a:r>
-          </a:p>
-          <a:p>
-            <a:endParaRPr lang="en-US" dirty="0"/>
-          </a:p>
-        </p:txBody>
-      </p:sp>
-    </p:spTree>
-    <p:extLst>
-      <p:ext uri="{BB962C8B-B14F-4D97-AF65-F5344CB8AC3E}">
-        <p14:creationId xmlns:p14="http://schemas.microsoft.com/office/powerpoint/2010/main" val="488425355"/>
-      </p:ext>
-    </p:extLst>
-  </p:cSld>
-  <p:clrMapOvr>
-    <a:masterClrMapping/>
-  </p:clrMapOvr>
-</p:sld>
-</file>
-
-<file path=ppt/slides/slide82.xml><?xml version="1.0" encoding="utf-8"?>
-<p:sld xmlns:a="http://schemas.openxmlformats.org/drawingml/2006/main" xmlns:r="http://schemas.openxmlformats.org/officeDocument/2006/relationships" xmlns:p="http://schemas.openxmlformats.org/presentationml/2006/main">
-  <p:cSld>
-    <p:spTree>
-      <p:nvGrpSpPr>
-        <p:cNvPr id="1" name="">
-          <a:extLst>
-            <a:ext uri="{FF2B5EF4-FFF2-40B4-BE49-F238E27FC236}">
               <a16:creationId xmlns:a16="http://schemas.microsoft.com/office/drawing/2014/main" id="{A59FF931-E8A5-A5CD-46F1-A01332F8E11F}"/>
             </a:ext>
           </a:extLst>
@@ -38355,11 +38553,19 @@
               <a:buNone/>
             </a:pPr>
             <a:r>
-              <a:rPr lang="en-US" b="1" dirty="0"/>
+              <a:rPr lang="en-US" b="1" dirty="0">
+                <a:solidFill>
+                  <a:srgbClr val="00B050"/>
+                </a:solidFill>
+              </a:rPr>
               <a:t>ELB</a:t>
             </a:r>
             <a:r>
-              <a:rPr lang="en-US" dirty="0"/>
+              <a:rPr lang="en-US" dirty="0">
+                <a:solidFill>
+                  <a:srgbClr val="00B050"/>
+                </a:solidFill>
+              </a:rPr>
               <a:t> automatically distributes incoming traffic across multiple targets.</a:t>
             </a:r>
           </a:p>
@@ -38461,7 +38667,7 @@
 </p:sld>
 </file>
 
-<file path=ppt/slides/slide83.xml><?xml version="1.0" encoding="utf-8"?>
+<file path=ppt/slides/slide81.xml><?xml version="1.0" encoding="utf-8"?>
 <p:sld xmlns:a="http://schemas.openxmlformats.org/drawingml/2006/main" xmlns:r="http://schemas.openxmlformats.org/officeDocument/2006/relationships" xmlns:p="http://schemas.openxmlformats.org/presentationml/2006/main">
   <p:cSld>
     <p:spTree>
@@ -38533,23 +38739,39 @@
           <a:bodyPr/>
           <a:lstStyle/>
           <a:p>
-            <a:pPr>
+            <a:pPr marL="0" indent="0">
               <a:buNone/>
             </a:pPr>
             <a:r>
-              <a:rPr lang="en-US" b="1" dirty="0"/>
+              <a:rPr lang="en-US" b="1" dirty="0">
+                <a:solidFill>
+                  <a:srgbClr val="00B050"/>
+                </a:solidFill>
+              </a:rPr>
               <a:t>Amazon Route 53</a:t>
             </a:r>
             <a:r>
-              <a:rPr lang="en-US" dirty="0"/>
+              <a:rPr lang="en-US" dirty="0">
+                <a:solidFill>
+                  <a:srgbClr val="00B050"/>
+                </a:solidFill>
+              </a:rPr>
               <a:t> is a </a:t>
             </a:r>
             <a:r>
-              <a:rPr lang="en-US" b="1" dirty="0"/>
+              <a:rPr lang="en-US" b="1" dirty="0">
+                <a:solidFill>
+                  <a:srgbClr val="00B050"/>
+                </a:solidFill>
+              </a:rPr>
               <a:t>highly available and scalable DNS</a:t>
             </a:r>
             <a:r>
-              <a:rPr lang="en-US" dirty="0"/>
+              <a:rPr lang="en-US" dirty="0">
+                <a:solidFill>
+                  <a:srgbClr val="00B050"/>
+                </a:solidFill>
+              </a:rPr>
               <a:t> (Domain Name System) service.</a:t>
             </a:r>
           </a:p>
@@ -38634,7 +38856,7 @@
 </p:sld>
 </file>
 
-<file path=ppt/slides/slide84.xml><?xml version="1.0" encoding="utf-8"?>
+<file path=ppt/slides/slide82.xml><?xml version="1.0" encoding="utf-8"?>
 <p:sld xmlns:a="http://schemas.openxmlformats.org/drawingml/2006/main" xmlns:r="http://schemas.openxmlformats.org/officeDocument/2006/relationships" xmlns:p="http://schemas.openxmlformats.org/presentationml/2006/main">
   <p:cSld>
     <p:spTree>
@@ -38710,11 +38932,19 @@
               <a:buNone/>
             </a:pPr>
             <a:r>
-              <a:rPr lang="en-US" b="1" dirty="0"/>
+              <a:rPr lang="en-US" b="1" dirty="0">
+                <a:solidFill>
+                  <a:srgbClr val="00B050"/>
+                </a:solidFill>
+              </a:rPr>
               <a:t>CloudFront</a:t>
             </a:r>
             <a:r>
-              <a:rPr lang="en-US" dirty="0"/>
+              <a:rPr lang="en-US" dirty="0">
+                <a:solidFill>
+                  <a:srgbClr val="00B050"/>
+                </a:solidFill>
+              </a:rPr>
               <a:t> speeds up delivery of content (e.g., HTML, CSS, images, videos, APIs).</a:t>
             </a:r>
           </a:p>
@@ -38804,7 +39034,7 @@
 </p:sld>
 </file>
 
-<file path=ppt/slides/slide85.xml><?xml version="1.0" encoding="utf-8"?>
+<file path=ppt/slides/slide83.xml><?xml version="1.0" encoding="utf-8"?>
 <p:sld xmlns:a="http://schemas.openxmlformats.org/drawingml/2006/main" xmlns:r="http://schemas.openxmlformats.org/officeDocument/2006/relationships" xmlns:p="http://schemas.openxmlformats.org/presentationml/2006/main">
   <p:cSld>
     <p:spTree>
@@ -38876,23 +39106,39 @@
           <a:bodyPr/>
           <a:lstStyle/>
           <a:p>
-            <a:pPr>
+            <a:pPr marL="0" indent="0">
               <a:buNone/>
             </a:pPr>
             <a:r>
-              <a:rPr lang="en-US" b="1" dirty="0"/>
+              <a:rPr lang="en-US" b="1" dirty="0">
+                <a:solidFill>
+                  <a:srgbClr val="00B050"/>
+                </a:solidFill>
+              </a:rPr>
               <a:t>AWS Direct Connect</a:t>
             </a:r>
             <a:r>
-              <a:rPr lang="en-US" dirty="0"/>
+              <a:rPr lang="en-US" dirty="0">
+                <a:solidFill>
+                  <a:srgbClr val="00B050"/>
+                </a:solidFill>
+              </a:rPr>
               <a:t> establishes a </a:t>
             </a:r>
             <a:r>
-              <a:rPr lang="en-US" b="1" dirty="0"/>
+              <a:rPr lang="en-US" b="1" dirty="0">
+                <a:solidFill>
+                  <a:srgbClr val="00B050"/>
+                </a:solidFill>
+              </a:rPr>
               <a:t>dedicated private network connection</a:t>
             </a:r>
             <a:r>
-              <a:rPr lang="en-US" dirty="0"/>
+              <a:rPr lang="en-US" dirty="0">
+                <a:solidFill>
+                  <a:srgbClr val="00B050"/>
+                </a:solidFill>
+              </a:rPr>
               <a:t> from your data center to AWS.</a:t>
             </a:r>
           </a:p>
@@ -38967,7 +39213,7 @@
 </p:sld>
 </file>
 
-<file path=ppt/slides/slide86.xml><?xml version="1.0" encoding="utf-8"?>
+<file path=ppt/slides/slide84.xml><?xml version="1.0" encoding="utf-8"?>
 <p:sld xmlns:a="http://schemas.openxmlformats.org/drawingml/2006/main" xmlns:r="http://schemas.openxmlformats.org/officeDocument/2006/relationships" xmlns:p="http://schemas.openxmlformats.org/presentationml/2006/main">
   <p:cSld>
     <p:spTree>
@@ -39033,15 +39279,23 @@
           <a:bodyPr/>
           <a:lstStyle/>
           <a:p>
-            <a:pPr>
+            <a:pPr marL="0" indent="0">
               <a:buNone/>
             </a:pPr>
             <a:r>
-              <a:rPr lang="en-US" b="1" dirty="0"/>
+              <a:rPr lang="en-US" b="1" dirty="0">
+                <a:solidFill>
+                  <a:srgbClr val="00B050"/>
+                </a:solidFill>
+              </a:rPr>
               <a:t>AWS VPN</a:t>
             </a:r>
             <a:r>
-              <a:rPr lang="en-US" dirty="0"/>
+              <a:rPr lang="en-US" dirty="0">
+                <a:solidFill>
+                  <a:srgbClr val="00B050"/>
+                </a:solidFill>
+              </a:rPr>
               <a:t> allows you to securely connect on-premises networks to AWS over the public internet.</a:t>
             </a:r>
           </a:p>
@@ -39106,7 +39360,7 @@
 </p:sld>
 </file>
 
-<file path=ppt/slides/slide87.xml><?xml version="1.0" encoding="utf-8"?>
+<file path=ppt/slides/slide85.xml><?xml version="1.0" encoding="utf-8"?>
 <p:sld xmlns:a="http://schemas.openxmlformats.org/drawingml/2006/main" xmlns:r="http://schemas.openxmlformats.org/officeDocument/2006/relationships" xmlns:p="http://schemas.openxmlformats.org/presentationml/2006/main">
   <p:cSld>
     <p:spTree>
@@ -39191,7 +39445,7 @@
 </p:sld>
 </file>
 
-<file path=ppt/slides/slide88.xml><?xml version="1.0" encoding="utf-8"?>
+<file path=ppt/slides/slide86.xml><?xml version="1.0" encoding="utf-8"?>
 <p:sld xmlns:a="http://schemas.openxmlformats.org/drawingml/2006/main" xmlns:r="http://schemas.openxmlformats.org/officeDocument/2006/relationships" xmlns:p="http://schemas.openxmlformats.org/presentationml/2006/main">
   <p:cSld>
     <p:spTree>
@@ -39333,7 +39587,7 @@
 </p:sld>
 </file>
 
-<file path=ppt/slides/slide89.xml><?xml version="1.0" encoding="utf-8"?>
+<file path=ppt/slides/slide87.xml><?xml version="1.0" encoding="utf-8"?>
 <p:sld xmlns:a="http://schemas.openxmlformats.org/drawingml/2006/main" xmlns:r="http://schemas.openxmlformats.org/officeDocument/2006/relationships" xmlns:p="http://schemas.openxmlformats.org/presentationml/2006/main">
   <p:cSld>
     <p:spTree>
@@ -39403,11 +39657,19 @@
               <a:buNone/>
             </a:pPr>
             <a:r>
-              <a:rPr lang="en-US" b="1" dirty="0"/>
+              <a:rPr lang="en-US" b="1" dirty="0">
+                <a:solidFill>
+                  <a:srgbClr val="00B050"/>
+                </a:solidFill>
+              </a:rPr>
               <a:t>Amazon CloudWatch</a:t>
             </a:r>
             <a:r>
-              <a:rPr lang="en-US" dirty="0"/>
+              <a:rPr lang="en-US" dirty="0">
+                <a:solidFill>
+                  <a:srgbClr val="00B050"/>
+                </a:solidFill>
+              </a:rPr>
               <a:t> provides data and actionable insights for:</a:t>
             </a:r>
           </a:p>
@@ -39510,6 +39772,537 @@
     <p:extLst>
       <p:ext uri="{BB962C8B-B14F-4D97-AF65-F5344CB8AC3E}">
         <p14:creationId xmlns:p14="http://schemas.microsoft.com/office/powerpoint/2010/main" val="1176656988"/>
+      </p:ext>
+    </p:extLst>
+  </p:cSld>
+  <p:clrMapOvr>
+    <a:masterClrMapping/>
+  </p:clrMapOvr>
+</p:sld>
+</file>
+
+<file path=ppt/slides/slide88.xml><?xml version="1.0" encoding="utf-8"?>
+<p:sld xmlns:a="http://schemas.openxmlformats.org/drawingml/2006/main" xmlns:r="http://schemas.openxmlformats.org/officeDocument/2006/relationships" xmlns:p="http://schemas.openxmlformats.org/presentationml/2006/main">
+  <p:cSld>
+    <p:spTree>
+      <p:nvGrpSpPr>
+        <p:cNvPr id="1" name=""/>
+        <p:cNvGrpSpPr/>
+        <p:nvPr/>
+      </p:nvGrpSpPr>
+      <p:grpSpPr>
+        <a:xfrm>
+          <a:off x="0" y="0"/>
+          <a:ext cx="0" cy="0"/>
+          <a:chOff x="0" y="0"/>
+          <a:chExt cx="0" cy="0"/>
+        </a:xfrm>
+      </p:grpSpPr>
+      <p:sp>
+        <p:nvSpPr>
+          <p:cNvPr id="2" name="Title 1">
+            <a:extLst>
+              <a:ext uri="{FF2B5EF4-FFF2-40B4-BE49-F238E27FC236}">
+                <a16:creationId xmlns:a16="http://schemas.microsoft.com/office/drawing/2014/main" id="{3CEBA481-6E10-2760-8DF5-2099195F2078}"/>
+              </a:ext>
+            </a:extLst>
+          </p:cNvPr>
+          <p:cNvSpPr>
+            <a:spLocks noGrp="1"/>
+          </p:cNvSpPr>
+          <p:nvPr>
+            <p:ph type="title"/>
+          </p:nvPr>
+        </p:nvSpPr>
+        <p:spPr/>
+        <p:txBody>
+          <a:bodyPr/>
+          <a:lstStyle/>
+          <a:p>
+            <a:r>
+              <a:rPr lang="en-US" dirty="0"/>
+              <a:t>CloudWatch Features</a:t>
+            </a:r>
+          </a:p>
+        </p:txBody>
+      </p:sp>
+      <p:graphicFrame>
+        <p:nvGraphicFramePr>
+          <p:cNvPr id="4" name="Content Placeholder 3">
+            <a:extLst>
+              <a:ext uri="{FF2B5EF4-FFF2-40B4-BE49-F238E27FC236}">
+                <a16:creationId xmlns:a16="http://schemas.microsoft.com/office/drawing/2014/main" id="{8CAAF197-B910-33E4-9D68-4372C6CA4E1C}"/>
+              </a:ext>
+            </a:extLst>
+          </p:cNvPr>
+          <p:cNvGraphicFramePr>
+            <a:graphicFrameLocks noGrp="1"/>
+          </p:cNvGraphicFramePr>
+          <p:nvPr>
+            <p:ph idx="1"/>
+            <p:extLst>
+              <p:ext uri="{D42A27DB-BD31-4B8C-83A1-F6EECF244321}">
+                <p14:modId xmlns:p14="http://schemas.microsoft.com/office/powerpoint/2010/main" val="1631453974"/>
+              </p:ext>
+            </p:extLst>
+          </p:nvPr>
+        </p:nvGraphicFramePr>
+        <p:xfrm>
+          <a:off x="838200" y="1897578"/>
+          <a:ext cx="10515600" cy="1828800"/>
+        </p:xfrm>
+        <a:graphic>
+          <a:graphicData uri="http://schemas.openxmlformats.org/drawingml/2006/table">
+            <a:tbl>
+              <a:tblPr>
+                <a:tableStyleId>{616DA210-FB5B-4158-B5E0-FEB733F419BA}</a:tableStyleId>
+              </a:tblPr>
+              <a:tblGrid>
+                <a:gridCol w="2863362">
+                  <a:extLst>
+                    <a:ext uri="{9D8B030D-6E8A-4147-A177-3AD203B41FA5}">
+                      <a16:colId xmlns:a16="http://schemas.microsoft.com/office/drawing/2014/main" val="559838763"/>
+                    </a:ext>
+                  </a:extLst>
+                </a:gridCol>
+                <a:gridCol w="7652238">
+                  <a:extLst>
+                    <a:ext uri="{9D8B030D-6E8A-4147-A177-3AD203B41FA5}">
+                      <a16:colId xmlns:a16="http://schemas.microsoft.com/office/drawing/2014/main" val="2314008159"/>
+                    </a:ext>
+                  </a:extLst>
+                </a:gridCol>
+              </a:tblGrid>
+              <a:tr h="0">
+                <a:tc>
+                  <a:txBody>
+                    <a:bodyPr/>
+                    <a:lstStyle/>
+                    <a:p>
+                      <a:pPr algn="ctr"/>
+                      <a:r>
+                        <a:rPr lang="en-US" b="1"/>
+                        <a:t>Feature</a:t>
+                      </a:r>
+                    </a:p>
+                  </a:txBody>
+                  <a:tcPr anchor="ctr">
+                    <a:solidFill>
+                      <a:schemeClr val="bg1">
+                        <a:lumMod val="85000"/>
+                      </a:schemeClr>
+                    </a:solidFill>
+                  </a:tcPr>
+                </a:tc>
+                <a:tc>
+                  <a:txBody>
+                    <a:bodyPr/>
+                    <a:lstStyle/>
+                    <a:p>
+                      <a:pPr algn="ctr"/>
+                      <a:r>
+                        <a:rPr lang="en-US" b="1" dirty="0"/>
+                        <a:t>Functionality</a:t>
+                      </a:r>
+                    </a:p>
+                  </a:txBody>
+                  <a:tcPr anchor="ctr">
+                    <a:solidFill>
+                      <a:schemeClr val="bg1">
+                        <a:lumMod val="85000"/>
+                      </a:schemeClr>
+                    </a:solidFill>
+                  </a:tcPr>
+                </a:tc>
+                <a:extLst>
+                  <a:ext uri="{0D108BD9-81ED-4DB2-BD59-A6C34878D82A}">
+                    <a16:rowId xmlns:a16="http://schemas.microsoft.com/office/drawing/2014/main" val="2395295814"/>
+                  </a:ext>
+                </a:extLst>
+              </a:tr>
+              <a:tr h="0">
+                <a:tc>
+                  <a:txBody>
+                    <a:bodyPr/>
+                    <a:lstStyle/>
+                    <a:p>
+                      <a:pPr algn="l"/>
+                      <a:r>
+                        <a:rPr lang="en-US" b="1" dirty="0"/>
+                        <a:t>Metrics</a:t>
+                      </a:r>
+                      <a:endParaRPr lang="en-US" dirty="0"/>
+                    </a:p>
+                  </a:txBody>
+                  <a:tcPr anchor="ctr"/>
+                </a:tc>
+                <a:tc>
+                  <a:txBody>
+                    <a:bodyPr/>
+                    <a:lstStyle/>
+                    <a:p>
+                      <a:pPr algn="l"/>
+                      <a:r>
+                        <a:rPr lang="en-US"/>
+                        <a:t>Track performance data (CPU, memory, etc.)</a:t>
+                      </a:r>
+                    </a:p>
+                  </a:txBody>
+                  <a:tcPr anchor="ctr"/>
+                </a:tc>
+                <a:extLst>
+                  <a:ext uri="{0D108BD9-81ED-4DB2-BD59-A6C34878D82A}">
+                    <a16:rowId xmlns:a16="http://schemas.microsoft.com/office/drawing/2014/main" val="2380020479"/>
+                  </a:ext>
+                </a:extLst>
+              </a:tr>
+              <a:tr h="0">
+                <a:tc>
+                  <a:txBody>
+                    <a:bodyPr/>
+                    <a:lstStyle/>
+                    <a:p>
+                      <a:pPr algn="l"/>
+                      <a:r>
+                        <a:rPr lang="en-US" b="1"/>
+                        <a:t>Logs</a:t>
+                      </a:r>
+                      <a:endParaRPr lang="en-US"/>
+                    </a:p>
+                  </a:txBody>
+                  <a:tcPr anchor="ctr"/>
+                </a:tc>
+                <a:tc>
+                  <a:txBody>
+                    <a:bodyPr/>
+                    <a:lstStyle/>
+                    <a:p>
+                      <a:pPr algn="l"/>
+                      <a:r>
+                        <a:rPr lang="en-US"/>
+                        <a:t>Collect logs from AWS and applications</a:t>
+                      </a:r>
+                    </a:p>
+                  </a:txBody>
+                  <a:tcPr anchor="ctr"/>
+                </a:tc>
+                <a:extLst>
+                  <a:ext uri="{0D108BD9-81ED-4DB2-BD59-A6C34878D82A}">
+                    <a16:rowId xmlns:a16="http://schemas.microsoft.com/office/drawing/2014/main" val="3465505769"/>
+                  </a:ext>
+                </a:extLst>
+              </a:tr>
+              <a:tr h="0">
+                <a:tc>
+                  <a:txBody>
+                    <a:bodyPr/>
+                    <a:lstStyle/>
+                    <a:p>
+                      <a:pPr algn="l"/>
+                      <a:r>
+                        <a:rPr lang="en-US" b="1"/>
+                        <a:t>Alarms</a:t>
+                      </a:r>
+                      <a:endParaRPr lang="en-US"/>
+                    </a:p>
+                  </a:txBody>
+                  <a:tcPr anchor="ctr"/>
+                </a:tc>
+                <a:tc>
+                  <a:txBody>
+                    <a:bodyPr/>
+                    <a:lstStyle/>
+                    <a:p>
+                      <a:pPr algn="l"/>
+                      <a:r>
+                        <a:rPr lang="en-US"/>
+                        <a:t>Alert you when thresholds are breached</a:t>
+                      </a:r>
+                    </a:p>
+                  </a:txBody>
+                  <a:tcPr anchor="ctr"/>
+                </a:tc>
+                <a:extLst>
+                  <a:ext uri="{0D108BD9-81ED-4DB2-BD59-A6C34878D82A}">
+                    <a16:rowId xmlns:a16="http://schemas.microsoft.com/office/drawing/2014/main" val="98874284"/>
+                  </a:ext>
+                </a:extLst>
+              </a:tr>
+              <a:tr h="0">
+                <a:tc>
+                  <a:txBody>
+                    <a:bodyPr/>
+                    <a:lstStyle/>
+                    <a:p>
+                      <a:pPr algn="l"/>
+                      <a:r>
+                        <a:rPr lang="en-US" b="1"/>
+                        <a:t>Dashboards</a:t>
+                      </a:r>
+                      <a:endParaRPr lang="en-US"/>
+                    </a:p>
+                  </a:txBody>
+                  <a:tcPr anchor="ctr"/>
+                </a:tc>
+                <a:tc>
+                  <a:txBody>
+                    <a:bodyPr/>
+                    <a:lstStyle/>
+                    <a:p>
+                      <a:pPr algn="l"/>
+                      <a:r>
+                        <a:rPr lang="en-US" dirty="0"/>
+                        <a:t>Visualize key indicators in real time</a:t>
+                      </a:r>
+                    </a:p>
+                  </a:txBody>
+                  <a:tcPr anchor="ctr"/>
+                </a:tc>
+                <a:extLst>
+                  <a:ext uri="{0D108BD9-81ED-4DB2-BD59-A6C34878D82A}">
+                    <a16:rowId xmlns:a16="http://schemas.microsoft.com/office/drawing/2014/main" val="2098221836"/>
+                  </a:ext>
+                </a:extLst>
+              </a:tr>
+            </a:tbl>
+          </a:graphicData>
+        </a:graphic>
+      </p:graphicFrame>
+      <p:sp>
+        <p:nvSpPr>
+          <p:cNvPr id="6" name="TextBox 5">
+            <a:extLst>
+              <a:ext uri="{FF2B5EF4-FFF2-40B4-BE49-F238E27FC236}">
+                <a16:creationId xmlns:a16="http://schemas.microsoft.com/office/drawing/2014/main" id="{6C6A8217-03D7-4CC1-0AE6-A4DBD9A0BF5C}"/>
+              </a:ext>
+            </a:extLst>
+          </p:cNvPr>
+          <p:cNvSpPr txBox="1"/>
+          <p:nvPr/>
+        </p:nvSpPr>
+        <p:spPr>
+          <a:xfrm>
+            <a:off x="838200" y="4187051"/>
+            <a:ext cx="7023271" cy="369332"/>
+          </a:xfrm>
+          <a:prstGeom prst="rect">
+            <a:avLst/>
+          </a:prstGeom>
+          <a:noFill/>
+        </p:spPr>
+        <p:txBody>
+          <a:bodyPr wrap="square">
+            <a:spAutoFit/>
+          </a:bodyPr>
+          <a:lstStyle/>
+          <a:p>
+            <a:r>
+              <a:rPr lang="en-US" b="1" dirty="0"/>
+              <a:t>Integration:</a:t>
+            </a:r>
+            <a:r>
+              <a:rPr lang="en-US" dirty="0"/>
+              <a:t> Works with EC2, Lambda, RDS, ECS, and custom applications</a:t>
+            </a:r>
+          </a:p>
+        </p:txBody>
+      </p:sp>
+    </p:spTree>
+    <p:extLst>
+      <p:ext uri="{BB962C8B-B14F-4D97-AF65-F5344CB8AC3E}">
+        <p14:creationId xmlns:p14="http://schemas.microsoft.com/office/powerpoint/2010/main" val="3540067521"/>
+      </p:ext>
+    </p:extLst>
+  </p:cSld>
+  <p:clrMapOvr>
+    <a:masterClrMapping/>
+  </p:clrMapOvr>
+</p:sld>
+</file>
+
+<file path=ppt/slides/slide89.xml><?xml version="1.0" encoding="utf-8"?>
+<p:sld xmlns:a="http://schemas.openxmlformats.org/drawingml/2006/main" xmlns:r="http://schemas.openxmlformats.org/officeDocument/2006/relationships" xmlns:p="http://schemas.openxmlformats.org/presentationml/2006/main">
+  <p:cSld>
+    <p:spTree>
+      <p:nvGrpSpPr>
+        <p:cNvPr id="1" name="">
+          <a:extLst>
+            <a:ext uri="{FF2B5EF4-FFF2-40B4-BE49-F238E27FC236}">
+              <a16:creationId xmlns:a16="http://schemas.microsoft.com/office/drawing/2014/main" id="{D170478C-E27F-1C75-0DDD-981A9B5F0EF3}"/>
+            </a:ext>
+          </a:extLst>
+        </p:cNvPr>
+        <p:cNvGrpSpPr/>
+        <p:nvPr/>
+      </p:nvGrpSpPr>
+      <p:grpSpPr>
+        <a:xfrm>
+          <a:off x="0" y="0"/>
+          <a:ext cx="0" cy="0"/>
+          <a:chOff x="0" y="0"/>
+          <a:chExt cx="0" cy="0"/>
+        </a:xfrm>
+      </p:grpSpPr>
+      <p:sp>
+        <p:nvSpPr>
+          <p:cNvPr id="2" name="Title 1">
+            <a:extLst>
+              <a:ext uri="{FF2B5EF4-FFF2-40B4-BE49-F238E27FC236}">
+                <a16:creationId xmlns:a16="http://schemas.microsoft.com/office/drawing/2014/main" id="{2D11DB5A-5890-24C4-73E2-2738D7CFA0ED}"/>
+              </a:ext>
+            </a:extLst>
+          </p:cNvPr>
+          <p:cNvSpPr>
+            <a:spLocks noGrp="1"/>
+          </p:cNvSpPr>
+          <p:nvPr>
+            <p:ph type="title"/>
+          </p:nvPr>
+        </p:nvSpPr>
+        <p:spPr/>
+        <p:txBody>
+          <a:bodyPr>
+            <a:normAutofit/>
+          </a:bodyPr>
+          <a:lstStyle/>
+          <a:p>
+            <a:r>
+              <a:rPr lang="en-US" dirty="0"/>
+              <a:t>AWS CloudTrail – Governance and Auditing</a:t>
+            </a:r>
+          </a:p>
+        </p:txBody>
+      </p:sp>
+      <p:sp>
+        <p:nvSpPr>
+          <p:cNvPr id="3" name="Content Placeholder 2">
+            <a:extLst>
+              <a:ext uri="{FF2B5EF4-FFF2-40B4-BE49-F238E27FC236}">
+                <a16:creationId xmlns:a16="http://schemas.microsoft.com/office/drawing/2014/main" id="{0F15A2FC-6496-2FF9-75EF-BBC4343E6164}"/>
+              </a:ext>
+            </a:extLst>
+          </p:cNvPr>
+          <p:cNvSpPr>
+            <a:spLocks noGrp="1"/>
+          </p:cNvSpPr>
+          <p:nvPr>
+            <p:ph idx="1"/>
+          </p:nvPr>
+        </p:nvSpPr>
+        <p:spPr/>
+        <p:txBody>
+          <a:bodyPr/>
+          <a:lstStyle/>
+          <a:p>
+            <a:pPr>
+              <a:buNone/>
+            </a:pPr>
+            <a:r>
+              <a:rPr lang="en-US" b="1" dirty="0">
+                <a:solidFill>
+                  <a:srgbClr val="00B050"/>
+                </a:solidFill>
+              </a:rPr>
+              <a:t>AWS CloudTrail</a:t>
+            </a:r>
+            <a:r>
+              <a:rPr lang="en-US" dirty="0">
+                <a:solidFill>
+                  <a:srgbClr val="00B050"/>
+                </a:solidFill>
+              </a:rPr>
+              <a:t> records all API calls made in your AWS account.</a:t>
+            </a:r>
+          </a:p>
+          <a:p>
+            <a:pPr>
+              <a:buNone/>
+            </a:pPr>
+            <a:r>
+              <a:rPr lang="en-US" b="1" dirty="0"/>
+              <a:t>Tracks:</a:t>
+            </a:r>
+            <a:endParaRPr lang="en-US" dirty="0"/>
+          </a:p>
+          <a:p>
+            <a:pPr>
+              <a:buFont typeface="Arial" panose="020B0604020202020204" pitchFamily="34" charset="0"/>
+              <a:buChar char="•"/>
+            </a:pPr>
+            <a:r>
+              <a:rPr lang="en-US" dirty="0"/>
+              <a:t>Who did what, and when</a:t>
+            </a:r>
+          </a:p>
+          <a:p>
+            <a:pPr>
+              <a:buFont typeface="Arial" panose="020B0604020202020204" pitchFamily="34" charset="0"/>
+              <a:buChar char="•"/>
+            </a:pPr>
+            <a:r>
+              <a:rPr lang="en-US" dirty="0"/>
+              <a:t>Service-level activity logs</a:t>
+            </a:r>
+          </a:p>
+          <a:p>
+            <a:pPr>
+              <a:buFont typeface="Arial" panose="020B0604020202020204" pitchFamily="34" charset="0"/>
+              <a:buChar char="•"/>
+            </a:pPr>
+            <a:r>
+              <a:rPr lang="en-US" dirty="0"/>
+              <a:t>Security, troubleshooting, and audit trails</a:t>
+            </a:r>
+          </a:p>
+          <a:p>
+            <a:pPr>
+              <a:buNone/>
+            </a:pPr>
+            <a:r>
+              <a:rPr lang="en-US" b="1" dirty="0"/>
+              <a:t>Use Cases:</a:t>
+            </a:r>
+            <a:endParaRPr lang="en-US" dirty="0"/>
+          </a:p>
+          <a:p>
+            <a:pPr>
+              <a:buFont typeface="Arial" panose="020B0604020202020204" pitchFamily="34" charset="0"/>
+              <a:buChar char="•"/>
+            </a:pPr>
+            <a:r>
+              <a:rPr lang="en-US" dirty="0"/>
+              <a:t>Investigate unusual activity</a:t>
+            </a:r>
+          </a:p>
+          <a:p>
+            <a:pPr>
+              <a:buFont typeface="Arial" panose="020B0604020202020204" pitchFamily="34" charset="0"/>
+              <a:buChar char="•"/>
+            </a:pPr>
+            <a:r>
+              <a:rPr lang="en-US" dirty="0"/>
+              <a:t>Audit resource usage</a:t>
+            </a:r>
+          </a:p>
+          <a:p>
+            <a:pPr>
+              <a:buFont typeface="Arial" panose="020B0604020202020204" pitchFamily="34" charset="0"/>
+              <a:buChar char="•"/>
+            </a:pPr>
+            <a:r>
+              <a:rPr lang="en-US" dirty="0"/>
+              <a:t>Prove compliance</a:t>
+            </a:r>
+          </a:p>
+          <a:p>
+            <a:endParaRPr lang="en-US" dirty="0"/>
+          </a:p>
+        </p:txBody>
+      </p:sp>
+    </p:spTree>
+    <p:extLst>
+      <p:ext uri="{BB962C8B-B14F-4D97-AF65-F5344CB8AC3E}">
+        <p14:creationId xmlns:p14="http://schemas.microsoft.com/office/powerpoint/2010/main" val="1268903903"/>
       </p:ext>
     </p:extLst>
   </p:cSld>
@@ -39891,529 +40684,6 @@
   <p:cSld>
     <p:spTree>
       <p:nvGrpSpPr>
-        <p:cNvPr id="1" name=""/>
-        <p:cNvGrpSpPr/>
-        <p:nvPr/>
-      </p:nvGrpSpPr>
-      <p:grpSpPr>
-        <a:xfrm>
-          <a:off x="0" y="0"/>
-          <a:ext cx="0" cy="0"/>
-          <a:chOff x="0" y="0"/>
-          <a:chExt cx="0" cy="0"/>
-        </a:xfrm>
-      </p:grpSpPr>
-      <p:sp>
-        <p:nvSpPr>
-          <p:cNvPr id="2" name="Title 1">
-            <a:extLst>
-              <a:ext uri="{FF2B5EF4-FFF2-40B4-BE49-F238E27FC236}">
-                <a16:creationId xmlns:a16="http://schemas.microsoft.com/office/drawing/2014/main" id="{3CEBA481-6E10-2760-8DF5-2099195F2078}"/>
-              </a:ext>
-            </a:extLst>
-          </p:cNvPr>
-          <p:cNvSpPr>
-            <a:spLocks noGrp="1"/>
-          </p:cNvSpPr>
-          <p:nvPr>
-            <p:ph type="title"/>
-          </p:nvPr>
-        </p:nvSpPr>
-        <p:spPr/>
-        <p:txBody>
-          <a:bodyPr/>
-          <a:lstStyle/>
-          <a:p>
-            <a:r>
-              <a:rPr lang="en-US" dirty="0"/>
-              <a:t>CloudWatch Features</a:t>
-            </a:r>
-          </a:p>
-        </p:txBody>
-      </p:sp>
-      <p:graphicFrame>
-        <p:nvGraphicFramePr>
-          <p:cNvPr id="4" name="Content Placeholder 3">
-            <a:extLst>
-              <a:ext uri="{FF2B5EF4-FFF2-40B4-BE49-F238E27FC236}">
-                <a16:creationId xmlns:a16="http://schemas.microsoft.com/office/drawing/2014/main" id="{8CAAF197-B910-33E4-9D68-4372C6CA4E1C}"/>
-              </a:ext>
-            </a:extLst>
-          </p:cNvPr>
-          <p:cNvGraphicFramePr>
-            <a:graphicFrameLocks noGrp="1"/>
-          </p:cNvGraphicFramePr>
-          <p:nvPr>
-            <p:ph idx="1"/>
-            <p:extLst>
-              <p:ext uri="{D42A27DB-BD31-4B8C-83A1-F6EECF244321}">
-                <p14:modId xmlns:p14="http://schemas.microsoft.com/office/powerpoint/2010/main" val="3360103636"/>
-              </p:ext>
-            </p:extLst>
-          </p:nvPr>
-        </p:nvGraphicFramePr>
-        <p:xfrm>
-          <a:off x="838200" y="1897578"/>
-          <a:ext cx="10515600" cy="1828800"/>
-        </p:xfrm>
-        <a:graphic>
-          <a:graphicData uri="http://schemas.openxmlformats.org/drawingml/2006/table">
-            <a:tbl>
-              <a:tblPr>
-                <a:tableStyleId>{616DA210-FB5B-4158-B5E0-FEB733F419BA}</a:tableStyleId>
-              </a:tblPr>
-              <a:tblGrid>
-                <a:gridCol w="3010930">
-                  <a:extLst>
-                    <a:ext uri="{9D8B030D-6E8A-4147-A177-3AD203B41FA5}">
-                      <a16:colId xmlns:a16="http://schemas.microsoft.com/office/drawing/2014/main" val="559838763"/>
-                    </a:ext>
-                  </a:extLst>
-                </a:gridCol>
-                <a:gridCol w="7504670">
-                  <a:extLst>
-                    <a:ext uri="{9D8B030D-6E8A-4147-A177-3AD203B41FA5}">
-                      <a16:colId xmlns:a16="http://schemas.microsoft.com/office/drawing/2014/main" val="2314008159"/>
-                    </a:ext>
-                  </a:extLst>
-                </a:gridCol>
-              </a:tblGrid>
-              <a:tr h="0">
-                <a:tc>
-                  <a:txBody>
-                    <a:bodyPr/>
-                    <a:lstStyle/>
-                    <a:p>
-                      <a:pPr algn="ctr"/>
-                      <a:r>
-                        <a:rPr lang="en-US" b="1"/>
-                        <a:t>Feature</a:t>
-                      </a:r>
-                    </a:p>
-                  </a:txBody>
-                  <a:tcPr anchor="ctr">
-                    <a:solidFill>
-                      <a:schemeClr val="bg1">
-                        <a:lumMod val="85000"/>
-                      </a:schemeClr>
-                    </a:solidFill>
-                  </a:tcPr>
-                </a:tc>
-                <a:tc>
-                  <a:txBody>
-                    <a:bodyPr/>
-                    <a:lstStyle/>
-                    <a:p>
-                      <a:pPr algn="ctr"/>
-                      <a:r>
-                        <a:rPr lang="en-US" b="1" dirty="0"/>
-                        <a:t>Functionality</a:t>
-                      </a:r>
-                    </a:p>
-                  </a:txBody>
-                  <a:tcPr anchor="ctr">
-                    <a:solidFill>
-                      <a:schemeClr val="bg1">
-                        <a:lumMod val="85000"/>
-                      </a:schemeClr>
-                    </a:solidFill>
-                  </a:tcPr>
-                </a:tc>
-                <a:extLst>
-                  <a:ext uri="{0D108BD9-81ED-4DB2-BD59-A6C34878D82A}">
-                    <a16:rowId xmlns:a16="http://schemas.microsoft.com/office/drawing/2014/main" val="2395295814"/>
-                  </a:ext>
-                </a:extLst>
-              </a:tr>
-              <a:tr h="0">
-                <a:tc>
-                  <a:txBody>
-                    <a:bodyPr/>
-                    <a:lstStyle/>
-                    <a:p>
-                      <a:pPr algn="l"/>
-                      <a:r>
-                        <a:rPr lang="en-US" b="1" dirty="0"/>
-                        <a:t>Metrics</a:t>
-                      </a:r>
-                      <a:endParaRPr lang="en-US" dirty="0"/>
-                    </a:p>
-                  </a:txBody>
-                  <a:tcPr anchor="ctr"/>
-                </a:tc>
-                <a:tc>
-                  <a:txBody>
-                    <a:bodyPr/>
-                    <a:lstStyle/>
-                    <a:p>
-                      <a:pPr algn="l"/>
-                      <a:r>
-                        <a:rPr lang="en-US"/>
-                        <a:t>Track performance data (CPU, memory, etc.)</a:t>
-                      </a:r>
-                    </a:p>
-                  </a:txBody>
-                  <a:tcPr anchor="ctr"/>
-                </a:tc>
-                <a:extLst>
-                  <a:ext uri="{0D108BD9-81ED-4DB2-BD59-A6C34878D82A}">
-                    <a16:rowId xmlns:a16="http://schemas.microsoft.com/office/drawing/2014/main" val="2380020479"/>
-                  </a:ext>
-                </a:extLst>
-              </a:tr>
-              <a:tr h="0">
-                <a:tc>
-                  <a:txBody>
-                    <a:bodyPr/>
-                    <a:lstStyle/>
-                    <a:p>
-                      <a:pPr algn="l"/>
-                      <a:r>
-                        <a:rPr lang="en-US" b="1"/>
-                        <a:t>Logs</a:t>
-                      </a:r>
-                      <a:endParaRPr lang="en-US"/>
-                    </a:p>
-                  </a:txBody>
-                  <a:tcPr anchor="ctr"/>
-                </a:tc>
-                <a:tc>
-                  <a:txBody>
-                    <a:bodyPr/>
-                    <a:lstStyle/>
-                    <a:p>
-                      <a:pPr algn="l"/>
-                      <a:r>
-                        <a:rPr lang="en-US"/>
-                        <a:t>Collect logs from AWS and applications</a:t>
-                      </a:r>
-                    </a:p>
-                  </a:txBody>
-                  <a:tcPr anchor="ctr"/>
-                </a:tc>
-                <a:extLst>
-                  <a:ext uri="{0D108BD9-81ED-4DB2-BD59-A6C34878D82A}">
-                    <a16:rowId xmlns:a16="http://schemas.microsoft.com/office/drawing/2014/main" val="3465505769"/>
-                  </a:ext>
-                </a:extLst>
-              </a:tr>
-              <a:tr h="0">
-                <a:tc>
-                  <a:txBody>
-                    <a:bodyPr/>
-                    <a:lstStyle/>
-                    <a:p>
-                      <a:pPr algn="l"/>
-                      <a:r>
-                        <a:rPr lang="en-US" b="1"/>
-                        <a:t>Alarms</a:t>
-                      </a:r>
-                      <a:endParaRPr lang="en-US"/>
-                    </a:p>
-                  </a:txBody>
-                  <a:tcPr anchor="ctr"/>
-                </a:tc>
-                <a:tc>
-                  <a:txBody>
-                    <a:bodyPr/>
-                    <a:lstStyle/>
-                    <a:p>
-                      <a:pPr algn="l"/>
-                      <a:r>
-                        <a:rPr lang="en-US"/>
-                        <a:t>Alert you when thresholds are breached</a:t>
-                      </a:r>
-                    </a:p>
-                  </a:txBody>
-                  <a:tcPr anchor="ctr"/>
-                </a:tc>
-                <a:extLst>
-                  <a:ext uri="{0D108BD9-81ED-4DB2-BD59-A6C34878D82A}">
-                    <a16:rowId xmlns:a16="http://schemas.microsoft.com/office/drawing/2014/main" val="98874284"/>
-                  </a:ext>
-                </a:extLst>
-              </a:tr>
-              <a:tr h="0">
-                <a:tc>
-                  <a:txBody>
-                    <a:bodyPr/>
-                    <a:lstStyle/>
-                    <a:p>
-                      <a:pPr algn="l"/>
-                      <a:r>
-                        <a:rPr lang="en-US" b="1"/>
-                        <a:t>Dashboards</a:t>
-                      </a:r>
-                      <a:endParaRPr lang="en-US"/>
-                    </a:p>
-                  </a:txBody>
-                  <a:tcPr anchor="ctr"/>
-                </a:tc>
-                <a:tc>
-                  <a:txBody>
-                    <a:bodyPr/>
-                    <a:lstStyle/>
-                    <a:p>
-                      <a:pPr algn="l"/>
-                      <a:r>
-                        <a:rPr lang="en-US" dirty="0"/>
-                        <a:t>Visualize key indicators in real time</a:t>
-                      </a:r>
-                    </a:p>
-                  </a:txBody>
-                  <a:tcPr anchor="ctr"/>
-                </a:tc>
-                <a:extLst>
-                  <a:ext uri="{0D108BD9-81ED-4DB2-BD59-A6C34878D82A}">
-                    <a16:rowId xmlns:a16="http://schemas.microsoft.com/office/drawing/2014/main" val="2098221836"/>
-                  </a:ext>
-                </a:extLst>
-              </a:tr>
-            </a:tbl>
-          </a:graphicData>
-        </a:graphic>
-      </p:graphicFrame>
-      <p:sp>
-        <p:nvSpPr>
-          <p:cNvPr id="6" name="TextBox 5">
-            <a:extLst>
-              <a:ext uri="{FF2B5EF4-FFF2-40B4-BE49-F238E27FC236}">
-                <a16:creationId xmlns:a16="http://schemas.microsoft.com/office/drawing/2014/main" id="{6C6A8217-03D7-4CC1-0AE6-A4DBD9A0BF5C}"/>
-              </a:ext>
-            </a:extLst>
-          </p:cNvPr>
-          <p:cNvSpPr txBox="1"/>
-          <p:nvPr/>
-        </p:nvSpPr>
-        <p:spPr>
-          <a:xfrm>
-            <a:off x="838200" y="4187051"/>
-            <a:ext cx="7023271" cy="369332"/>
-          </a:xfrm>
-          <a:prstGeom prst="rect">
-            <a:avLst/>
-          </a:prstGeom>
-          <a:noFill/>
-        </p:spPr>
-        <p:txBody>
-          <a:bodyPr wrap="square">
-            <a:spAutoFit/>
-          </a:bodyPr>
-          <a:lstStyle/>
-          <a:p>
-            <a:r>
-              <a:rPr lang="en-US" b="1" dirty="0"/>
-              <a:t>Integration:</a:t>
-            </a:r>
-            <a:r>
-              <a:rPr lang="en-US" dirty="0"/>
-              <a:t> Works with EC2, Lambda, RDS, ECS, and custom applications</a:t>
-            </a:r>
-          </a:p>
-        </p:txBody>
-      </p:sp>
-    </p:spTree>
-    <p:extLst>
-      <p:ext uri="{BB962C8B-B14F-4D97-AF65-F5344CB8AC3E}">
-        <p14:creationId xmlns:p14="http://schemas.microsoft.com/office/powerpoint/2010/main" val="3540067521"/>
-      </p:ext>
-    </p:extLst>
-  </p:cSld>
-  <p:clrMapOvr>
-    <a:masterClrMapping/>
-  </p:clrMapOvr>
-</p:sld>
-</file>
-
-<file path=ppt/slides/slide91.xml><?xml version="1.0" encoding="utf-8"?>
-<p:sld xmlns:a="http://schemas.openxmlformats.org/drawingml/2006/main" xmlns:r="http://schemas.openxmlformats.org/officeDocument/2006/relationships" xmlns:p="http://schemas.openxmlformats.org/presentationml/2006/main">
-  <p:cSld>
-    <p:spTree>
-      <p:nvGrpSpPr>
-        <p:cNvPr id="1" name="">
-          <a:extLst>
-            <a:ext uri="{FF2B5EF4-FFF2-40B4-BE49-F238E27FC236}">
-              <a16:creationId xmlns:a16="http://schemas.microsoft.com/office/drawing/2014/main" id="{D170478C-E27F-1C75-0DDD-981A9B5F0EF3}"/>
-            </a:ext>
-          </a:extLst>
-        </p:cNvPr>
-        <p:cNvGrpSpPr/>
-        <p:nvPr/>
-      </p:nvGrpSpPr>
-      <p:grpSpPr>
-        <a:xfrm>
-          <a:off x="0" y="0"/>
-          <a:ext cx="0" cy="0"/>
-          <a:chOff x="0" y="0"/>
-          <a:chExt cx="0" cy="0"/>
-        </a:xfrm>
-      </p:grpSpPr>
-      <p:sp>
-        <p:nvSpPr>
-          <p:cNvPr id="2" name="Title 1">
-            <a:extLst>
-              <a:ext uri="{FF2B5EF4-FFF2-40B4-BE49-F238E27FC236}">
-                <a16:creationId xmlns:a16="http://schemas.microsoft.com/office/drawing/2014/main" id="{2D11DB5A-5890-24C4-73E2-2738D7CFA0ED}"/>
-              </a:ext>
-            </a:extLst>
-          </p:cNvPr>
-          <p:cNvSpPr>
-            <a:spLocks noGrp="1"/>
-          </p:cNvSpPr>
-          <p:nvPr>
-            <p:ph type="title"/>
-          </p:nvPr>
-        </p:nvSpPr>
-        <p:spPr/>
-        <p:txBody>
-          <a:bodyPr>
-            <a:normAutofit/>
-          </a:bodyPr>
-          <a:lstStyle/>
-          <a:p>
-            <a:r>
-              <a:rPr lang="en-US" dirty="0"/>
-              <a:t>AWS CloudTrail – Governance and Auditing</a:t>
-            </a:r>
-          </a:p>
-        </p:txBody>
-      </p:sp>
-      <p:sp>
-        <p:nvSpPr>
-          <p:cNvPr id="3" name="Content Placeholder 2">
-            <a:extLst>
-              <a:ext uri="{FF2B5EF4-FFF2-40B4-BE49-F238E27FC236}">
-                <a16:creationId xmlns:a16="http://schemas.microsoft.com/office/drawing/2014/main" id="{0F15A2FC-6496-2FF9-75EF-BBC4343E6164}"/>
-              </a:ext>
-            </a:extLst>
-          </p:cNvPr>
-          <p:cNvSpPr>
-            <a:spLocks noGrp="1"/>
-          </p:cNvSpPr>
-          <p:nvPr>
-            <p:ph idx="1"/>
-          </p:nvPr>
-        </p:nvSpPr>
-        <p:spPr/>
-        <p:txBody>
-          <a:bodyPr/>
-          <a:lstStyle/>
-          <a:p>
-            <a:pPr>
-              <a:buNone/>
-            </a:pPr>
-            <a:r>
-              <a:rPr lang="en-US" b="1" dirty="0"/>
-              <a:t>AWS CloudTrail</a:t>
-            </a:r>
-            <a:r>
-              <a:rPr lang="en-US" dirty="0"/>
-              <a:t> records all API calls made in your AWS account.</a:t>
-            </a:r>
-          </a:p>
-          <a:p>
-            <a:pPr>
-              <a:buNone/>
-            </a:pPr>
-            <a:r>
-              <a:rPr lang="en-US" b="1" dirty="0"/>
-              <a:t>Tracks:</a:t>
-            </a:r>
-            <a:endParaRPr lang="en-US" dirty="0"/>
-          </a:p>
-          <a:p>
-            <a:pPr>
-              <a:buFont typeface="Arial" panose="020B0604020202020204" pitchFamily="34" charset="0"/>
-              <a:buChar char="•"/>
-            </a:pPr>
-            <a:r>
-              <a:rPr lang="en-US" dirty="0"/>
-              <a:t>Who did what, and when</a:t>
-            </a:r>
-          </a:p>
-          <a:p>
-            <a:pPr>
-              <a:buFont typeface="Arial" panose="020B0604020202020204" pitchFamily="34" charset="0"/>
-              <a:buChar char="•"/>
-            </a:pPr>
-            <a:r>
-              <a:rPr lang="en-US" dirty="0"/>
-              <a:t>Service-level activity logs</a:t>
-            </a:r>
-          </a:p>
-          <a:p>
-            <a:pPr>
-              <a:buFont typeface="Arial" panose="020B0604020202020204" pitchFamily="34" charset="0"/>
-              <a:buChar char="•"/>
-            </a:pPr>
-            <a:r>
-              <a:rPr lang="en-US" dirty="0"/>
-              <a:t>Security, troubleshooting, and audit trails</a:t>
-            </a:r>
-          </a:p>
-          <a:p>
-            <a:pPr>
-              <a:buNone/>
-            </a:pPr>
-            <a:r>
-              <a:rPr lang="en-US" b="1" dirty="0"/>
-              <a:t>Use Cases:</a:t>
-            </a:r>
-            <a:endParaRPr lang="en-US" dirty="0"/>
-          </a:p>
-          <a:p>
-            <a:pPr>
-              <a:buFont typeface="Arial" panose="020B0604020202020204" pitchFamily="34" charset="0"/>
-              <a:buChar char="•"/>
-            </a:pPr>
-            <a:r>
-              <a:rPr lang="en-US" dirty="0"/>
-              <a:t>Investigate unusual activity</a:t>
-            </a:r>
-          </a:p>
-          <a:p>
-            <a:pPr>
-              <a:buFont typeface="Arial" panose="020B0604020202020204" pitchFamily="34" charset="0"/>
-              <a:buChar char="•"/>
-            </a:pPr>
-            <a:r>
-              <a:rPr lang="en-US" dirty="0"/>
-              <a:t>Audit resource usage</a:t>
-            </a:r>
-          </a:p>
-          <a:p>
-            <a:pPr>
-              <a:buFont typeface="Arial" panose="020B0604020202020204" pitchFamily="34" charset="0"/>
-              <a:buChar char="•"/>
-            </a:pPr>
-            <a:r>
-              <a:rPr lang="en-US" dirty="0"/>
-              <a:t>Prove compliance</a:t>
-            </a:r>
-          </a:p>
-          <a:p>
-            <a:endParaRPr lang="en-US" dirty="0"/>
-          </a:p>
-        </p:txBody>
-      </p:sp>
-    </p:spTree>
-    <p:extLst>
-      <p:ext uri="{BB962C8B-B14F-4D97-AF65-F5344CB8AC3E}">
-        <p14:creationId xmlns:p14="http://schemas.microsoft.com/office/powerpoint/2010/main" val="1268903903"/>
-      </p:ext>
-    </p:extLst>
-  </p:cSld>
-  <p:clrMapOvr>
-    <a:masterClrMapping/>
-  </p:clrMapOvr>
-</p:sld>
-</file>
-
-<file path=ppt/slides/slide92.xml><?xml version="1.0" encoding="utf-8"?>
-<p:sld xmlns:a="http://schemas.openxmlformats.org/drawingml/2006/main" xmlns:r="http://schemas.openxmlformats.org/officeDocument/2006/relationships" xmlns:p="http://schemas.openxmlformats.org/presentationml/2006/main">
-  <p:cSld>
-    <p:spTree>
-      <p:nvGrpSpPr>
         <p:cNvPr id="1" name="">
           <a:extLst>
             <a:ext uri="{FF2B5EF4-FFF2-40B4-BE49-F238E27FC236}">
@@ -40487,11 +40757,19 @@
               <a:buNone/>
             </a:pPr>
             <a:r>
-              <a:rPr lang="en-US" b="1" dirty="0"/>
+              <a:rPr lang="en-US" b="1" dirty="0">
+                <a:solidFill>
+                  <a:srgbClr val="00B050"/>
+                </a:solidFill>
+              </a:rPr>
               <a:t>AWS Config</a:t>
             </a:r>
             <a:r>
-              <a:rPr lang="en-US" dirty="0"/>
+              <a:rPr lang="en-US" dirty="0">
+                <a:solidFill>
+                  <a:srgbClr val="00B050"/>
+                </a:solidFill>
+              </a:rPr>
               <a:t> helps track changes to your AWS resources over time.</a:t>
             </a:r>
           </a:p>
@@ -40568,7 +40846,7 @@
 </p:sld>
 </file>
 
-<file path=ppt/slides/slide93.xml><?xml version="1.0" encoding="utf-8"?>
+<file path=ppt/slides/slide91.xml><?xml version="1.0" encoding="utf-8"?>
 <p:sld xmlns:a="http://schemas.openxmlformats.org/drawingml/2006/main" xmlns:r="http://schemas.openxmlformats.org/officeDocument/2006/relationships" xmlns:p="http://schemas.openxmlformats.org/presentationml/2006/main">
   <p:cSld>
     <p:spTree>
@@ -40646,11 +40924,19 @@
               <a:buNone/>
             </a:pPr>
             <a:r>
-              <a:rPr lang="en-US" b="1" dirty="0"/>
+              <a:rPr lang="en-US" b="1" dirty="0">
+                <a:solidFill>
+                  <a:srgbClr val="00B050"/>
+                </a:solidFill>
+              </a:rPr>
               <a:t>Trusted Advisor</a:t>
             </a:r>
             <a:r>
-              <a:rPr lang="en-US" dirty="0"/>
+              <a:rPr lang="en-US" dirty="0">
+                <a:solidFill>
+                  <a:srgbClr val="00B050"/>
+                </a:solidFill>
+              </a:rPr>
               <a:t> provides real-time recommendations for:</a:t>
             </a:r>
           </a:p>
@@ -40725,7 +41011,7 @@
 </p:sld>
 </file>
 
-<file path=ppt/slides/slide94.xml><?xml version="1.0" encoding="utf-8"?>
+<file path=ppt/slides/slide92.xml><?xml version="1.0" encoding="utf-8"?>
 <p:sld xmlns:a="http://schemas.openxmlformats.org/drawingml/2006/main" xmlns:r="http://schemas.openxmlformats.org/officeDocument/2006/relationships" xmlns:p="http://schemas.openxmlformats.org/presentationml/2006/main">
   <p:cSld>
     <p:spTree>
@@ -40797,19 +41083,35 @@
               <a:buNone/>
             </a:pPr>
             <a:r>
-              <a:rPr lang="en-US" b="1" dirty="0"/>
+              <a:rPr lang="en-US" b="1" dirty="0">
+                <a:solidFill>
+                  <a:srgbClr val="00B050"/>
+                </a:solidFill>
+              </a:rPr>
               <a:t>Cost Explorer</a:t>
             </a:r>
             <a:r>
-              <a:rPr lang="en-US" dirty="0"/>
+              <a:rPr lang="en-US" dirty="0">
+                <a:solidFill>
+                  <a:srgbClr val="00B050"/>
+                </a:solidFill>
+              </a:rPr>
               <a:t> provides detailed </a:t>
             </a:r>
             <a:r>
-              <a:rPr lang="en-US" b="1" dirty="0"/>
+              <a:rPr lang="en-US" b="1" dirty="0">
+                <a:solidFill>
+                  <a:srgbClr val="00B050"/>
+                </a:solidFill>
+              </a:rPr>
               <a:t>visual insights</a:t>
             </a:r>
             <a:r>
-              <a:rPr lang="en-US" dirty="0"/>
+              <a:rPr lang="en-US" dirty="0">
+                <a:solidFill>
+                  <a:srgbClr val="00B050"/>
+                </a:solidFill>
+              </a:rPr>
               <a:t> into your AWS usage and spending.</a:t>
             </a:r>
           </a:p>
@@ -40884,7 +41186,7 @@
 </p:sld>
 </file>
 
-<file path=ppt/slides/slide95.xml><?xml version="1.0" encoding="utf-8"?>
+<file path=ppt/slides/slide93.xml><?xml version="1.0" encoding="utf-8"?>
 <p:sld xmlns:a="http://schemas.openxmlformats.org/drawingml/2006/main" xmlns:r="http://schemas.openxmlformats.org/officeDocument/2006/relationships" xmlns:p="http://schemas.openxmlformats.org/presentationml/2006/main">
   <p:cSld>
     <p:spTree>
@@ -40956,11 +41258,19 @@
               <a:buNone/>
             </a:pPr>
             <a:r>
-              <a:rPr lang="en-US" b="1" dirty="0"/>
+              <a:rPr lang="en-US" b="1" dirty="0">
+                <a:solidFill>
+                  <a:srgbClr val="00B050"/>
+                </a:solidFill>
+              </a:rPr>
               <a:t>AWS Budgets</a:t>
             </a:r>
             <a:r>
-              <a:rPr lang="en-US" dirty="0"/>
+              <a:rPr lang="en-US" dirty="0">
+                <a:solidFill>
+                  <a:srgbClr val="00B050"/>
+                </a:solidFill>
+              </a:rPr>
               <a:t> allows you to set custom thresholds for:</a:t>
             </a:r>
           </a:p>
@@ -41042,7 +41352,7 @@
 </p:sld>
 </file>
 
-<file path=ppt/slides/slide96.xml><?xml version="1.0" encoding="utf-8"?>
+<file path=ppt/slides/slide94.xml><?xml version="1.0" encoding="utf-8"?>
 <p:sld xmlns:a="http://schemas.openxmlformats.org/drawingml/2006/main" xmlns:r="http://schemas.openxmlformats.org/officeDocument/2006/relationships" xmlns:p="http://schemas.openxmlformats.org/presentationml/2006/main">
   <p:cSld>
     <p:spTree>
@@ -41103,7 +41413,7 @@
             <p:ph idx="1"/>
             <p:extLst>
               <p:ext uri="{D42A27DB-BD31-4B8C-83A1-F6EECF244321}">
-                <p14:modId xmlns:p14="http://schemas.microsoft.com/office/powerpoint/2010/main" val="2464525143"/>
+                <p14:modId xmlns:p14="http://schemas.microsoft.com/office/powerpoint/2010/main" val="3764986623"/>
               </p:ext>
             </p:extLst>
           </p:nvPr>
@@ -41119,14 +41429,14 @@
                 <a:tableStyleId>{616DA210-FB5B-4158-B5E0-FEB733F419BA}</a:tableStyleId>
               </a:tblPr>
               <a:tblGrid>
-                <a:gridCol w="3282778">
+                <a:gridCol w="2995246">
                   <a:extLst>
                     <a:ext uri="{9D8B030D-6E8A-4147-A177-3AD203B41FA5}">
                       <a16:colId xmlns:a16="http://schemas.microsoft.com/office/drawing/2014/main" val="582596972"/>
                     </a:ext>
                   </a:extLst>
                 </a:gridCol>
-                <a:gridCol w="7232822">
+                <a:gridCol w="7520354">
                   <a:extLst>
                     <a:ext uri="{9D8B030D-6E8A-4147-A177-3AD203B41FA5}">
                       <a16:colId xmlns:a16="http://schemas.microsoft.com/office/drawing/2014/main" val="2775451889"/>
@@ -41334,7 +41644,7 @@
 </p:sld>
 </file>
 
-<file path=ppt/slides/slide97.xml><?xml version="1.0" encoding="utf-8"?>
+<file path=ppt/slides/slide95.xml><?xml version="1.0" encoding="utf-8"?>
 <p:sld xmlns:a="http://schemas.openxmlformats.org/drawingml/2006/main" xmlns:r="http://schemas.openxmlformats.org/officeDocument/2006/relationships" xmlns:p="http://schemas.openxmlformats.org/presentationml/2006/main">
   <p:cSld>
     <p:spTree>
@@ -41419,7 +41729,7 @@
 </p:sld>
 </file>
 
-<file path=ppt/slides/slide98.xml><?xml version="1.0" encoding="utf-8"?>
+<file path=ppt/slides/slide96.xml><?xml version="1.0" encoding="utf-8"?>
 <p:sld xmlns:a="http://schemas.openxmlformats.org/drawingml/2006/main" xmlns:r="http://schemas.openxmlformats.org/officeDocument/2006/relationships" xmlns:p="http://schemas.openxmlformats.org/presentationml/2006/main">
   <p:cSld>
     <p:spTree>
@@ -41576,7 +41886,7 @@
 </p:sld>
 </file>
 
-<file path=ppt/slides/slide99.xml><?xml version="1.0" encoding="utf-8"?>
+<file path=ppt/slides/slide97.xml><?xml version="1.0" encoding="utf-8"?>
 <p:sld xmlns:a="http://schemas.openxmlformats.org/drawingml/2006/main" xmlns:r="http://schemas.openxmlformats.org/officeDocument/2006/relationships" xmlns:p="http://schemas.openxmlformats.org/presentationml/2006/main">
   <p:cSld>
     <p:spTree>
@@ -41643,7 +41953,7 @@
             <p:ph idx="1"/>
             <p:extLst>
               <p:ext uri="{D42A27DB-BD31-4B8C-83A1-F6EECF244321}">
-                <p14:modId xmlns:p14="http://schemas.microsoft.com/office/powerpoint/2010/main" val="40740402"/>
+                <p14:modId xmlns:p14="http://schemas.microsoft.com/office/powerpoint/2010/main" val="11933855"/>
               </p:ext>
             </p:extLst>
           </p:nvPr>
@@ -41659,14 +41969,14 @@
                 <a:tableStyleId>{616DA210-FB5B-4158-B5E0-FEB733F419BA}</a:tableStyleId>
               </a:tblPr>
               <a:tblGrid>
-                <a:gridCol w="3641124">
+                <a:gridCol w="3118338">
                   <a:extLst>
                     <a:ext uri="{9D8B030D-6E8A-4147-A177-3AD203B41FA5}">
                       <a16:colId xmlns:a16="http://schemas.microsoft.com/office/drawing/2014/main" val="2631188853"/>
                     </a:ext>
                   </a:extLst>
                 </a:gridCol>
-                <a:gridCol w="6874476">
+                <a:gridCol w="7397262">
                   <a:extLst>
                     <a:ext uri="{9D8B030D-6E8A-4147-A177-3AD203B41FA5}">
                       <a16:colId xmlns:a16="http://schemas.microsoft.com/office/drawing/2014/main" val="3324019378"/>
@@ -41894,6 +42204,400 @@
     <p:extLst>
       <p:ext uri="{BB962C8B-B14F-4D97-AF65-F5344CB8AC3E}">
         <p14:creationId xmlns:p14="http://schemas.microsoft.com/office/powerpoint/2010/main" val="1822846115"/>
+      </p:ext>
+    </p:extLst>
+  </p:cSld>
+  <p:clrMapOvr>
+    <a:masterClrMapping/>
+  </p:clrMapOvr>
+</p:sld>
+</file>
+
+<file path=ppt/slides/slide98.xml><?xml version="1.0" encoding="utf-8"?>
+<p:sld xmlns:a="http://schemas.openxmlformats.org/drawingml/2006/main" xmlns:r="http://schemas.openxmlformats.org/officeDocument/2006/relationships" xmlns:p="http://schemas.openxmlformats.org/presentationml/2006/main">
+  <p:cSld>
+    <p:spTree>
+      <p:nvGrpSpPr>
+        <p:cNvPr id="1" name="">
+          <a:extLst>
+            <a:ext uri="{FF2B5EF4-FFF2-40B4-BE49-F238E27FC236}">
+              <a16:creationId xmlns:a16="http://schemas.microsoft.com/office/drawing/2014/main" id="{548E8376-C143-34FC-D9D3-4CB00868105C}"/>
+            </a:ext>
+          </a:extLst>
+        </p:cNvPr>
+        <p:cNvGrpSpPr/>
+        <p:nvPr/>
+      </p:nvGrpSpPr>
+      <p:grpSpPr>
+        <a:xfrm>
+          <a:off x="0" y="0"/>
+          <a:ext cx="0" cy="0"/>
+          <a:chOff x="0" y="0"/>
+          <a:chExt cx="0" cy="0"/>
+        </a:xfrm>
+      </p:grpSpPr>
+      <p:sp>
+        <p:nvSpPr>
+          <p:cNvPr id="2" name="Title 1">
+            <a:extLst>
+              <a:ext uri="{FF2B5EF4-FFF2-40B4-BE49-F238E27FC236}">
+                <a16:creationId xmlns:a16="http://schemas.microsoft.com/office/drawing/2014/main" id="{AB4702C9-F54F-67EF-570B-C50D4D5D2380}"/>
+              </a:ext>
+            </a:extLst>
+          </p:cNvPr>
+          <p:cNvSpPr>
+            <a:spLocks noGrp="1"/>
+          </p:cNvSpPr>
+          <p:nvPr>
+            <p:ph type="title"/>
+          </p:nvPr>
+        </p:nvSpPr>
+        <p:spPr/>
+        <p:txBody>
+          <a:bodyPr/>
+          <a:lstStyle/>
+          <a:p>
+            <a:r>
+              <a:rPr lang="pt-BR" dirty="0"/>
+              <a:t>Amazon S3 as a Data Lake</a:t>
+            </a:r>
+            <a:endParaRPr lang="en-US" dirty="0"/>
+          </a:p>
+        </p:txBody>
+      </p:sp>
+      <p:sp>
+        <p:nvSpPr>
+          <p:cNvPr id="3" name="Content Placeholder 2">
+            <a:extLst>
+              <a:ext uri="{FF2B5EF4-FFF2-40B4-BE49-F238E27FC236}">
+                <a16:creationId xmlns:a16="http://schemas.microsoft.com/office/drawing/2014/main" id="{FA755082-70DA-3D50-1613-A4A6723FED1F}"/>
+              </a:ext>
+            </a:extLst>
+          </p:cNvPr>
+          <p:cNvSpPr>
+            <a:spLocks noGrp="1"/>
+          </p:cNvSpPr>
+          <p:nvPr>
+            <p:ph idx="1"/>
+          </p:nvPr>
+        </p:nvSpPr>
+        <p:spPr>
+          <a:xfrm>
+            <a:off x="838199" y="1706007"/>
+            <a:ext cx="10962503" cy="4991039"/>
+          </a:xfrm>
+        </p:spPr>
+        <p:txBody>
+          <a:bodyPr/>
+          <a:lstStyle/>
+          <a:p>
+            <a:pPr>
+              <a:buNone/>
+            </a:pPr>
+            <a:r>
+              <a:rPr lang="en-US" b="1" dirty="0">
+                <a:solidFill>
+                  <a:srgbClr val="00B050"/>
+                </a:solidFill>
+              </a:rPr>
+              <a:t>Amazon S3</a:t>
+            </a:r>
+            <a:r>
+              <a:rPr lang="en-US" dirty="0">
+                <a:solidFill>
+                  <a:srgbClr val="00B050"/>
+                </a:solidFill>
+              </a:rPr>
+              <a:t> is often used as a </a:t>
+            </a:r>
+            <a:r>
+              <a:rPr lang="en-US" b="1" dirty="0">
+                <a:solidFill>
+                  <a:srgbClr val="00B050"/>
+                </a:solidFill>
+              </a:rPr>
+              <a:t>data lake</a:t>
+            </a:r>
+            <a:r>
+              <a:rPr lang="en-US" dirty="0">
+                <a:solidFill>
+                  <a:srgbClr val="00B050"/>
+                </a:solidFill>
+              </a:rPr>
+              <a:t> for storing structured and unstructured data.</a:t>
+            </a:r>
+          </a:p>
+          <a:p>
+            <a:pPr>
+              <a:buNone/>
+            </a:pPr>
+            <a:r>
+              <a:rPr lang="en-US" b="1" dirty="0"/>
+              <a:t>Why?</a:t>
+            </a:r>
+            <a:endParaRPr lang="en-US" dirty="0"/>
+          </a:p>
+          <a:p>
+            <a:pPr>
+              <a:buFont typeface="Arial" panose="020B0604020202020204" pitchFamily="34" charset="0"/>
+              <a:buChar char="•"/>
+            </a:pPr>
+            <a:r>
+              <a:rPr lang="en-US" dirty="0"/>
+              <a:t>Unlimited scale</a:t>
+            </a:r>
+          </a:p>
+          <a:p>
+            <a:pPr>
+              <a:buFont typeface="Arial" panose="020B0604020202020204" pitchFamily="34" charset="0"/>
+              <a:buChar char="•"/>
+            </a:pPr>
+            <a:r>
+              <a:rPr lang="en-US" dirty="0"/>
+              <a:t>High durability and availability</a:t>
+            </a:r>
+          </a:p>
+          <a:p>
+            <a:pPr>
+              <a:buFont typeface="Arial" panose="020B0604020202020204" pitchFamily="34" charset="0"/>
+              <a:buChar char="•"/>
+            </a:pPr>
+            <a:r>
+              <a:rPr lang="en-US" dirty="0"/>
+              <a:t>Integration with analytics and ML tools</a:t>
+            </a:r>
+          </a:p>
+          <a:p>
+            <a:pPr marL="0" indent="0">
+              <a:buNone/>
+            </a:pPr>
+            <a:endParaRPr lang="en-US" b="1" dirty="0"/>
+          </a:p>
+          <a:p>
+            <a:pPr marL="0" indent="0">
+              <a:buNone/>
+            </a:pPr>
+            <a:r>
+              <a:rPr lang="en-US" b="1" dirty="0"/>
+              <a:t>Common Use:</a:t>
+            </a:r>
+            <a:r>
+              <a:rPr lang="en-US" dirty="0"/>
+              <a:t> Central repository for data before processing</a:t>
+            </a:r>
+          </a:p>
+          <a:p>
+            <a:endParaRPr lang="en-US" dirty="0"/>
+          </a:p>
+        </p:txBody>
+      </p:sp>
+    </p:spTree>
+    <p:extLst>
+      <p:ext uri="{BB962C8B-B14F-4D97-AF65-F5344CB8AC3E}">
+        <p14:creationId xmlns:p14="http://schemas.microsoft.com/office/powerpoint/2010/main" val="1196054167"/>
+      </p:ext>
+    </p:extLst>
+  </p:cSld>
+  <p:clrMapOvr>
+    <a:masterClrMapping/>
+  </p:clrMapOvr>
+</p:sld>
+</file>
+
+<file path=ppt/slides/slide99.xml><?xml version="1.0" encoding="utf-8"?>
+<p:sld xmlns:a="http://schemas.openxmlformats.org/drawingml/2006/main" xmlns:r="http://schemas.openxmlformats.org/officeDocument/2006/relationships" xmlns:p="http://schemas.openxmlformats.org/presentationml/2006/main">
+  <p:cSld>
+    <p:spTree>
+      <p:nvGrpSpPr>
+        <p:cNvPr id="1" name="">
+          <a:extLst>
+            <a:ext uri="{FF2B5EF4-FFF2-40B4-BE49-F238E27FC236}">
+              <a16:creationId xmlns:a16="http://schemas.microsoft.com/office/drawing/2014/main" id="{9CB9C995-32E8-5BA3-55B1-89146D8D265A}"/>
+            </a:ext>
+          </a:extLst>
+        </p:cNvPr>
+        <p:cNvGrpSpPr/>
+        <p:nvPr/>
+      </p:nvGrpSpPr>
+      <p:grpSpPr>
+        <a:xfrm>
+          <a:off x="0" y="0"/>
+          <a:ext cx="0" cy="0"/>
+          <a:chOff x="0" y="0"/>
+          <a:chExt cx="0" cy="0"/>
+        </a:xfrm>
+      </p:grpSpPr>
+      <p:sp>
+        <p:nvSpPr>
+          <p:cNvPr id="2" name="Title 1">
+            <a:extLst>
+              <a:ext uri="{FF2B5EF4-FFF2-40B4-BE49-F238E27FC236}">
+                <a16:creationId xmlns:a16="http://schemas.microsoft.com/office/drawing/2014/main" id="{640B72BD-2622-0BDA-1CEF-BAA04A5A39C5}"/>
+              </a:ext>
+            </a:extLst>
+          </p:cNvPr>
+          <p:cNvSpPr>
+            <a:spLocks noGrp="1"/>
+          </p:cNvSpPr>
+          <p:nvPr>
+            <p:ph type="title"/>
+          </p:nvPr>
+        </p:nvSpPr>
+        <p:spPr/>
+        <p:txBody>
+          <a:bodyPr>
+            <a:normAutofit/>
+          </a:bodyPr>
+          <a:lstStyle/>
+          <a:p>
+            <a:r>
+              <a:rPr lang="en-US" b="1" dirty="0"/>
+              <a:t>Amazon EMR – Big Data Frameworks</a:t>
+            </a:r>
+            <a:endParaRPr lang="en-US" dirty="0"/>
+          </a:p>
+        </p:txBody>
+      </p:sp>
+      <p:sp>
+        <p:nvSpPr>
+          <p:cNvPr id="3" name="Content Placeholder 2">
+            <a:extLst>
+              <a:ext uri="{FF2B5EF4-FFF2-40B4-BE49-F238E27FC236}">
+                <a16:creationId xmlns:a16="http://schemas.microsoft.com/office/drawing/2014/main" id="{B6929E43-3F39-A0AB-4FE3-2DF99D72D64C}"/>
+              </a:ext>
+            </a:extLst>
+          </p:cNvPr>
+          <p:cNvSpPr>
+            <a:spLocks noGrp="1"/>
+          </p:cNvSpPr>
+          <p:nvPr>
+            <p:ph idx="1"/>
+          </p:nvPr>
+        </p:nvSpPr>
+        <p:spPr/>
+        <p:txBody>
+          <a:bodyPr/>
+          <a:lstStyle/>
+          <a:p>
+            <a:pPr>
+              <a:buNone/>
+            </a:pPr>
+            <a:r>
+              <a:rPr lang="en-US" b="1" dirty="0">
+                <a:solidFill>
+                  <a:srgbClr val="00B050"/>
+                </a:solidFill>
+              </a:rPr>
+              <a:t>Amazon EMR</a:t>
+            </a:r>
+            <a:r>
+              <a:rPr lang="en-US" dirty="0">
+                <a:solidFill>
+                  <a:srgbClr val="00B050"/>
+                </a:solidFill>
+              </a:rPr>
+              <a:t> (Elastic MapReduce) runs big data frameworks like:</a:t>
+            </a:r>
+          </a:p>
+          <a:p>
+            <a:pPr>
+              <a:buFont typeface="Arial" panose="020B0604020202020204" pitchFamily="34" charset="0"/>
+              <a:buChar char="•"/>
+            </a:pPr>
+            <a:r>
+              <a:rPr lang="en-US" dirty="0"/>
+              <a:t>Apache Hadoop</a:t>
+            </a:r>
+          </a:p>
+          <a:p>
+            <a:pPr>
+              <a:buFont typeface="Arial" panose="020B0604020202020204" pitchFamily="34" charset="0"/>
+              <a:buChar char="•"/>
+            </a:pPr>
+            <a:r>
+              <a:rPr lang="en-US" dirty="0"/>
+              <a:t>Apache Spark</a:t>
+            </a:r>
+          </a:p>
+          <a:p>
+            <a:pPr>
+              <a:buFont typeface="Arial" panose="020B0604020202020204" pitchFamily="34" charset="0"/>
+              <a:buChar char="•"/>
+            </a:pPr>
+            <a:r>
+              <a:rPr lang="en-US" dirty="0"/>
+              <a:t>HBase</a:t>
+            </a:r>
+          </a:p>
+          <a:p>
+            <a:pPr>
+              <a:buFont typeface="Arial" panose="020B0604020202020204" pitchFamily="34" charset="0"/>
+              <a:buChar char="•"/>
+            </a:pPr>
+            <a:r>
+              <a:rPr lang="en-US" dirty="0"/>
+              <a:t>Hive</a:t>
+            </a:r>
+          </a:p>
+          <a:p>
+            <a:pPr>
+              <a:buNone/>
+            </a:pPr>
+            <a:r>
+              <a:rPr lang="en-US" b="1" dirty="0"/>
+              <a:t>Use Cases:</a:t>
+            </a:r>
+            <a:endParaRPr lang="en-US" dirty="0"/>
+          </a:p>
+          <a:p>
+            <a:pPr>
+              <a:buFont typeface="Arial" panose="020B0604020202020204" pitchFamily="34" charset="0"/>
+              <a:buChar char="•"/>
+            </a:pPr>
+            <a:r>
+              <a:rPr lang="en-US" dirty="0"/>
+              <a:t>Distributed data processing</a:t>
+            </a:r>
+          </a:p>
+          <a:p>
+            <a:pPr>
+              <a:buFont typeface="Arial" panose="020B0604020202020204" pitchFamily="34" charset="0"/>
+              <a:buChar char="•"/>
+            </a:pPr>
+            <a:r>
+              <a:rPr lang="en-US" dirty="0"/>
+              <a:t>ETL pipelines</a:t>
+            </a:r>
+          </a:p>
+          <a:p>
+            <a:pPr>
+              <a:buFont typeface="Arial" panose="020B0604020202020204" pitchFamily="34" charset="0"/>
+              <a:buChar char="•"/>
+            </a:pPr>
+            <a:r>
+              <a:rPr lang="en-US" dirty="0"/>
+              <a:t>Log analysis</a:t>
+            </a:r>
+          </a:p>
+          <a:p>
+            <a:pPr>
+              <a:buFont typeface="Arial" panose="020B0604020202020204" pitchFamily="34" charset="0"/>
+              <a:buChar char="•"/>
+            </a:pPr>
+            <a:r>
+              <a:rPr lang="en-US" dirty="0"/>
+              <a:t>Machine learning model training at scale</a:t>
+            </a:r>
+          </a:p>
+          <a:p>
+            <a:endParaRPr lang="en-US" dirty="0"/>
+          </a:p>
+        </p:txBody>
+      </p:sp>
+    </p:spTree>
+    <p:extLst>
+      <p:ext uri="{BB962C8B-B14F-4D97-AF65-F5344CB8AC3E}">
+        <p14:creationId xmlns:p14="http://schemas.microsoft.com/office/powerpoint/2010/main" val="313857250"/>
       </p:ext>
     </p:extLst>
   </p:cSld>
